--- a/docs/deck/progress-review.pptx
+++ b/docs/deck/progress-review.pptx
@@ -21,12 +21,9 @@
     <p:sldId id="269" r:id="rId15"/>
     <p:sldId id="270" r:id="rId16"/>
     <p:sldId id="271" r:id="rId17"/>
-    <p:sldId id="272" r:id="rId18"/>
-    <p:sldId id="273" r:id="rId19"/>
-    <p:sldId id="274" r:id="rId20"/>
   </p:sldIdLst>
   <p:notesMasterIdLst>
-    <p:notesMasterId r:id="rId21"/>
+    <p:notesMasterId r:id="rId18"/>
   </p:notesMasterIdLst>
   <p:sldSz cx="12192000" cy="6858000"/>
   <p:notesSz cx="6858000" cy="12192000"/>
@@ -125,14 +122,14 @@
   <p:extLst>
     <p:ext uri="{521415D9-36F7-43E2-AB2F-B90AF26B5E84}">
       <p14:sectionLst xmlns:p14="http://schemas.microsoft.com/office/powerpoint/2010/main">
-        <p14:section name="Problem and aim" id="{3ce04859-647f-9005-598f-4f4e6dbe5894}">
+        <p14:section name="Problem and aim" id="{f4ca400d-e3b4-4e0a-5786-67d22f46ca86}">
           <p14:sldIdLst>
             <p14:sldId id="256"/>
             <p14:sldId id="257"/>
             <p14:sldId id="258"/>
           </p14:sldIdLst>
         </p14:section>
-        <p14:section name="Foundation" id="{3791e2b0-7814-cf97-d9b8-fddb599e632e}">
+        <p14:section name="Foundation" id="{17c2d7d8-b7a1-0f72-f1d6-400df6491585}">
           <p14:sldIdLst>
             <p14:sldId id="259"/>
             <p14:sldId id="260"/>
@@ -141,7 +138,7 @@
             <p14:sldId id="263"/>
           </p14:sldIdLst>
         </p14:section>
-        <p14:section name="Learning the mismatch" id="{bcdd1a30-e6c2-11c0-9543-a83357910c5a}">
+        <p14:section name="Learning the mismatch" id="{a0d2c822-5f72-9fed-73ff-a45223accff0}">
           <p14:sldIdLst>
             <p14:sldId id="264"/>
             <p14:sldId id="265"/>
@@ -150,18 +147,11 @@
             <p14:sldId id="268"/>
           </p14:sldIdLst>
         </p14:section>
-        <p14:section name="Detection delay" id="{b36639fd-77fe-7b0a-89d9-fd1fc7b696e2}">
+        <p14:section name="Plan and summary" id="{57e66443-746c-f3cb-da8a-431d71f740e3}">
           <p14:sldIdLst>
             <p14:sldId id="269"/>
             <p14:sldId id="270"/>
             <p14:sldId id="271"/>
-            <p14:sldId id="272"/>
-          </p14:sldIdLst>
-        </p14:section>
-        <p14:section name="Plan and summary" id="{c381db68-5750-a315-30b9-33659c409c08}">
-          <p14:sldIdLst>
-            <p14:sldId id="273"/>
-            <p14:sldId id="274"/>
           </p14:sldIdLst>
         </p14:section>
       </p14:sectionLst>
@@ -568,7 +558,7 @@
           <a:p>
             <a:r>
               <a:rPr lang="en-US" dirty="0"/>
-              <a:t>Good morning. This is our progress review after the proposal. I will cover four things: the problem and our aim, the simulator and how we validated it against published results, first results on the residual Koopman approach we proposed, and first results on how long fault detection can take before recovery is no longer possible.</a:t>
+              <a:t>Good morning. This is our progress review. I will cover four things: the problem and our research question, the simulator and how we validated it against published results, our results on learning the error of the physics model, and the plan for the remaining weeks.</a:t>
             </a:r>
             <a:endParaRPr lang="en-US" dirty="0"/>
           </a:p>
@@ -744,7 +734,7 @@
           <a:p>
             <a:r>
               <a:rPr lang="en-US" dirty="0"/>
-              <a:t>Here is the main prediction result. On held-out episodes from the training plant, the residual model has the lowest error at every horizon from 100 milliseconds upward; at shorter horizons the full-state model is slightly better. At one second the residual error is 0.64, against 0.91 for full-state EDMDc and 7.1 for the analytical model, which is worse than simply assuming nothing changes, because the unmodelled thrust loss makes it drift. Our proposal claimed that full-state EDMDc is unstable; on the failed vehicle we confirm that it has eigenvalues outside the unit circle and that it falls behind the no-change baseline by two seconds. At two seconds even the residual model is behind no-change: long open-loop horizons need feedback, which is why the MPC re-plans every 5 milliseconds.</a:t>
+              <a:t>Here is the main prediction result. On held-out episodes from the training plant, the residual model has the lowest error of the three models from 100 milliseconds on, and is the best predictor overall from 100 milliseconds to one second; at shorter horizons the full-state model is better, about two and a half times at 20 milliseconds. At one second the residual error is 0.64, against 0.91 for full-state EDMDc and 7.1 for the analytical model, which is worse than simply assuming nothing changes, because the unmodelled thrust loss makes it drift. Our proposal claimed that full-state EDMDc is unstable; on the failed vehicle we confirm that it has eigenvalues outside the unit circle and that it falls behind the no-change baseline by two seconds. At two seconds even the residual model is behind no-change: long open-loop horizons need feedback, which is why the MPC re-plans every 5 milliseconds.</a:t>
             </a:r>
             <a:endParaRPr lang="en-US" dirty="0"/>
           </a:p>
@@ -920,7 +910,7 @@
           <a:p>
             <a:r>
               <a:rPr lang="en-US" dirty="0"/>
-              <a:t>Now in closed loop. We built a linear MPC on the analytical model, and the same MPC with the residual added as a measured disturbance, evaluated outside the optimization so the QP stays convex. On the training plant, the mismatch causes a steady altitude error of about 29 centimetres for LQR and analytical MPC. The residual-Koopman MPC cuts it to 19 centimetres, a 32 percent reduction, and it helps for each separate mismatch effect of that plant. On the held-out plant it helps overall, but when we remove that plant's thrust loss it makes the error 47 percent larger, which is the generalization problem again. The solver needs under a millisecond per step; our modelling layer adds overhead, so a real-time version would call the solver directly. When we used the MPCs to catch the vehicle after a detection delay, they did not beat LQR: LQR was safe up to 10 milliseconds, the MPCs only without delay. The likely reason is that the linear model is not valid far from the spin. The obvious next baseline is integral action, which we will add.</a:t>
+              <a:t>Now in closed loop. We built a linear MPC on the analytical model, and the same MPC with the learned residual added as a measured disturbance, evaluated outside the optimization so the QP stays convex. On the training plant, the mismatch causes a steady altitude error of about 29 centimetres for LQR and analytical MPC. The residual Koopman MPC cuts it to 19 centimetres, a 32 percent reduction, and it helps for each separate mismatch effect of that plant. On the held-out plant it helps overall, but when we remove that plant's thrust loss it makes the error 47 percent larger, which is the generalization problem again. The solver needs under a millisecond per step; our modelling layer adds overhead, so a real-time version would call the solver directly. Honestly, the most important missing baseline is integral action, or offset-free MPC, which in theory removes a constant bias completely; we will compare against it next.</a:t>
             </a:r>
             <a:endParaRPr lang="en-US" dirty="0"/>
           </a:p>
@@ -1008,7 +998,7 @@
           <a:p>
             <a:r>
               <a:rPr lang="en-US" dirty="0"/>
-              <a:t>The second part: how long can fault detection take?</a:t>
+              <a:t>Here is the plan up to the final presentation on 31 October and the final report on 13 November. We still owe the second controller from the proposal, MPC on the full-state Koopman model, and the classical integral-action baseline. Then we address the main weakness, generalization, with online adaptation: the residual is linear in its parameters, so recursive least squares is a natural, cheap choice. We will also make the truth plant more realistic with air-relative thrust and train the residual on spin-up transients. The main risk is that online adaptation needs richer data than a single flight gives; the fallback is a residual that also uses a short history of states.</a:t>
             </a:r>
             <a:endParaRPr lang="en-US" dirty="0"/>
           </a:p>
@@ -1096,7 +1086,7 @@
           <a:p>
             <a:r>
               <a:rPr lang="en-US" dirty="0"/>
-              <a:t>Why does the delay matter so much? When rotor 4 dies, rotor 2 on the opposite side is no longer balanced, which creates a roll torque. The healthy controller reacts by cutting rotor 2, but a running motor cannot go below its idle thrust. So a roll acceleration of at least 10.6 radians per second squared remains, whatever the tuning. The plot shows three tunings, all above this lower bound. After 100 milliseconds the vehicle is already tilted about 13 degrees, and after 200 about 37.</a:t>
+              <a:t>To summarize. Our simulator is validated against three papers and against the flight spin-up time. Learning only the error of the physics model gives the best predictions from 100 milliseconds to one second, and with 10 training episodes it beats a full Koopman model trained on 40. Inside MPC it cuts the altitude bias by a third, but it does not yet generalize to a different vehicle, and online adaptation is our next step. Thank you, we are happy to take questions.</a:t>
             </a:r>
             <a:endParaRPr lang="en-US" dirty="0"/>
           </a:p>
@@ -1184,7 +1174,7 @@
           <a:p>
             <a:r>
               <a:rPr lang="en-US" dirty="0"/>
-              <a:t>This is our key result so far on timing. We simulate the Mueller and D'Andrea strategy: spin up on two rotors, then switch to the LQR. For each delay we run 40 random pre-failure states and count the safe recoveries; the bands are 95 percent confidence intervals. With the thrust used in flight and instant detection, the vehicle climbs 40 centimetres and loses only 3 centimetres below its start, like their flight. With delay, things fall apart quickly: the probability of a safe recovery drops below 0.9 at about 12 milliseconds and below one half at about 19. With the lower, hover-neutral thrust these numbers are 7 and 14 milliseconds. Real detectors take 30 to 130 milliseconds. If we only ask for the attitude to be recovered, ignoring the altitude loss, the 50 percent point is at 52 milliseconds. These numbers hold for this strategy and model; nonlinear controllers in the literature have recovered with 100 milliseconds or more.</a:t>
+              <a:t>Backup slide with the key references, in case of questions on sources. The full bibliography is in the report.</a:t>
             </a:r>
             <a:endParaRPr lang="en-US" dirty="0"/>
           </a:p>
@@ -1208,270 +1198,6 @@
             <a:fld id="{F7021451-1387-4CA6-816F-3879F97B5CBC}" type="slidenum">
               <a:rPr lang="en-US"/>
               <a:t>16</a:t>
-            </a:fld>
-            <a:endParaRPr lang="en-US"/>
-          </a:p>
-        </p:txBody>
-      </p:sp>
-    </p:spTree>
-    <p:extLst>
-      <p:ext uri="{BB962C8B-B14F-4D97-AF65-F5344CB8AC3E}">
-        <p14:creationId xmlns:p14="http://schemas.microsoft.com/office/powerpoint/2010/main" val="1024086991"/>
-      </p:ext>
-    </p:extLst>
-  </p:cSld>
-  <p:clrMapOvr>
-    <a:masterClrMapping/>
-  </p:clrMapOvr>
-</p:notes>
-</file>
-
-<file path=ppt/notesSlides/notesSlide17.xml><?xml version="1.0" encoding="utf-8"?>
-<p:notes xmlns:a="http://schemas.openxmlformats.org/drawingml/2006/main" xmlns:r="http://schemas.openxmlformats.org/officeDocument/2006/relationships" xmlns:p="http://schemas.openxmlformats.org/presentationml/2006/main">
-  <p:cSld>
-    <p:spTree>
-      <p:nvGrpSpPr>
-        <p:cNvPr id="1" name=""/>
-        <p:cNvGrpSpPr/>
-        <p:nvPr/>
-      </p:nvGrpSpPr>
-      <p:grpSpPr>
-        <a:xfrm>
-          <a:off x="0" y="0"/>
-          <a:ext cx="0" cy="0"/>
-          <a:chOff x="0" y="0"/>
-          <a:chExt cx="0" cy="0"/>
-        </a:xfrm>
-      </p:grpSpPr>
-      <p:sp>
-        <p:nvSpPr>
-          <p:cNvPr id="2" name="Slide Image Placeholder 1"/>
-          <p:cNvSpPr>
-            <a:spLocks noGrp="1" noRot="1" noChangeAspect="1"/>
-          </p:cNvSpPr>
-          <p:nvPr>
-            <p:ph type="sldImg"/>
-          </p:nvPr>
-        </p:nvSpPr>
-        <p:spPr/>
-      </p:sp>
-      <p:sp>
-        <p:nvSpPr>
-          <p:cNvPr id="3" name="Notes Placeholder 2"/>
-          <p:cNvSpPr>
-            <a:spLocks noGrp="1"/>
-          </p:cNvSpPr>
-          <p:nvPr>
-            <p:ph type="body" idx="1"/>
-          </p:nvPr>
-        </p:nvSpPr>
-        <p:spPr/>
-        <p:txBody>
-          <a:bodyPr/>
-          <a:lstStyle/>
-          <a:p>
-            <a:r>
-              <a:rPr lang="en-US" dirty="0"/>
-              <a:t>To turn the delay question into a guarantee, we need a certified set of states from which the failure controller always recovers despite thrust limits. Our first version uses the Hu and Lin saturation conditions as LMIs on the linear model at the spinning equilibrium. It certifies about 22 percent of the way from the equilibrium to the state right after a failure in hover; simulation shows recovery up to 70 percent, so it is about three times conservative. The slice shows why: the controller only fails at spin rates of about 5 radians per second or less, but a certificate built at the full spin cannot reach there. That is exactly the gap our next step addresses, by treating the yaw rate as a varying parameter and certifying over the whole spin-up. These are certificates for the linear model; the nonlinear gap is measured by simulation.</a:t>
-            </a:r>
-            <a:endParaRPr lang="en-US" dirty="0"/>
-          </a:p>
-        </p:txBody>
-      </p:sp>
-      <p:sp>
-        <p:nvSpPr>
-          <p:cNvPr id="4" name="Slide Number Placeholder 3"/>
-          <p:cNvSpPr>
-            <a:spLocks noGrp="1"/>
-          </p:cNvSpPr>
-          <p:nvPr>
-            <p:ph type="sldNum" sz="quarter" idx="10"/>
-          </p:nvPr>
-        </p:nvSpPr>
-        <p:spPr/>
-        <p:txBody>
-          <a:bodyPr/>
-          <a:lstStyle/>
-          <a:p>
-            <a:fld id="{F7021451-1387-4CA6-816F-3879F97B5CBC}" type="slidenum">
-              <a:rPr lang="en-US"/>
-              <a:t>17</a:t>
-            </a:fld>
-            <a:endParaRPr lang="en-US"/>
-          </a:p>
-        </p:txBody>
-      </p:sp>
-    </p:spTree>
-    <p:extLst>
-      <p:ext uri="{BB962C8B-B14F-4D97-AF65-F5344CB8AC3E}">
-        <p14:creationId xmlns:p14="http://schemas.microsoft.com/office/powerpoint/2010/main" val="1024086991"/>
-      </p:ext>
-    </p:extLst>
-  </p:cSld>
-  <p:clrMapOvr>
-    <a:masterClrMapping/>
-  </p:clrMapOvr>
-</p:notes>
-</file>
-
-<file path=ppt/notesSlides/notesSlide18.xml><?xml version="1.0" encoding="utf-8"?>
-<p:notes xmlns:a="http://schemas.openxmlformats.org/drawingml/2006/main" xmlns:r="http://schemas.openxmlformats.org/officeDocument/2006/relationships" xmlns:p="http://schemas.openxmlformats.org/presentationml/2006/main">
-  <p:cSld>
-    <p:spTree>
-      <p:nvGrpSpPr>
-        <p:cNvPr id="1" name=""/>
-        <p:cNvGrpSpPr/>
-        <p:nvPr/>
-      </p:nvGrpSpPr>
-      <p:grpSpPr>
-        <a:xfrm>
-          <a:off x="0" y="0"/>
-          <a:ext cx="0" cy="0"/>
-          <a:chOff x="0" y="0"/>
-          <a:chExt cx="0" cy="0"/>
-        </a:xfrm>
-      </p:grpSpPr>
-      <p:sp>
-        <p:nvSpPr>
-          <p:cNvPr id="2" name="Slide Image Placeholder 1"/>
-          <p:cNvSpPr>
-            <a:spLocks noGrp="1" noRot="1" noChangeAspect="1"/>
-          </p:cNvSpPr>
-          <p:nvPr>
-            <p:ph type="sldImg"/>
-          </p:nvPr>
-        </p:nvSpPr>
-        <p:spPr/>
-      </p:sp>
-      <p:sp>
-        <p:nvSpPr>
-          <p:cNvPr id="3" name="Notes Placeholder 2"/>
-          <p:cNvSpPr>
-            <a:spLocks noGrp="1"/>
-          </p:cNvSpPr>
-          <p:nvPr>
-            <p:ph type="body" idx="1"/>
-          </p:nvPr>
-        </p:nvSpPr>
-        <p:spPr/>
-        <p:txBody>
-          <a:bodyPr/>
-          <a:lstStyle/>
-          <a:p>
-            <a:r>
-              <a:rPr lang="en-US" dirty="0"/>
-              <a:t>Here is the plan for the remaining weeks, up to the final presentation on 31 October and the final report on 13 November. On the learning side we still owe the second controller from the proposal, MPC on the full-state Koopman model, plus the classical integral-action baseline, then online adaptation to fix the generalization problem. On the timing side the next step is the certificate over the whole spin-up, then the reachable set of the undetected phase, which together give the certified delay budget. The main risk is that the spin-up certificate is infeasible or too conservative; we have two fallbacks ready.</a:t>
-            </a:r>
-            <a:endParaRPr lang="en-US" dirty="0"/>
-          </a:p>
-        </p:txBody>
-      </p:sp>
-      <p:sp>
-        <p:nvSpPr>
-          <p:cNvPr id="4" name="Slide Number Placeholder 3"/>
-          <p:cNvSpPr>
-            <a:spLocks noGrp="1"/>
-          </p:cNvSpPr>
-          <p:nvPr>
-            <p:ph type="sldNum" sz="quarter" idx="10"/>
-          </p:nvPr>
-        </p:nvSpPr>
-        <p:spPr/>
-        <p:txBody>
-          <a:bodyPr/>
-          <a:lstStyle/>
-          <a:p>
-            <a:fld id="{F7021451-1387-4CA6-816F-3879F97B5CBC}" type="slidenum">
-              <a:rPr lang="en-US"/>
-              <a:t>18</a:t>
-            </a:fld>
-            <a:endParaRPr lang="en-US"/>
-          </a:p>
-        </p:txBody>
-      </p:sp>
-    </p:spTree>
-    <p:extLst>
-      <p:ext uri="{BB962C8B-B14F-4D97-AF65-F5344CB8AC3E}">
-        <p14:creationId xmlns:p14="http://schemas.microsoft.com/office/powerpoint/2010/main" val="1024086991"/>
-      </p:ext>
-    </p:extLst>
-  </p:cSld>
-  <p:clrMapOvr>
-    <a:masterClrMapping/>
-  </p:clrMapOvr>
-</p:notes>
-</file>
-
-<file path=ppt/notesSlides/notesSlide19.xml><?xml version="1.0" encoding="utf-8"?>
-<p:notes xmlns:a="http://schemas.openxmlformats.org/drawingml/2006/main" xmlns:r="http://schemas.openxmlformats.org/officeDocument/2006/relationships" xmlns:p="http://schemas.openxmlformats.org/presentationml/2006/main">
-  <p:cSld>
-    <p:spTree>
-      <p:nvGrpSpPr>
-        <p:cNvPr id="1" name=""/>
-        <p:cNvGrpSpPr/>
-        <p:nvPr/>
-      </p:nvGrpSpPr>
-      <p:grpSpPr>
-        <a:xfrm>
-          <a:off x="0" y="0"/>
-          <a:ext cx="0" cy="0"/>
-          <a:chOff x="0" y="0"/>
-          <a:chExt cx="0" cy="0"/>
-        </a:xfrm>
-      </p:grpSpPr>
-      <p:sp>
-        <p:nvSpPr>
-          <p:cNvPr id="2" name="Slide Image Placeholder 1"/>
-          <p:cNvSpPr>
-            <a:spLocks noGrp="1" noRot="1" noChangeAspect="1"/>
-          </p:cNvSpPr>
-          <p:nvPr>
-            <p:ph type="sldImg"/>
-          </p:nvPr>
-        </p:nvSpPr>
-        <p:spPr/>
-      </p:sp>
-      <p:sp>
-        <p:nvSpPr>
-          <p:cNvPr id="3" name="Notes Placeholder 2"/>
-          <p:cNvSpPr>
-            <a:spLocks noGrp="1"/>
-          </p:cNvSpPr>
-          <p:nvPr>
-            <p:ph type="body" idx="1"/>
-          </p:nvPr>
-        </p:nvSpPr>
-        <p:spPr/>
-        <p:txBody>
-          <a:bodyPr/>
-          <a:lstStyle/>
-          <a:p>
-            <a:r>
-              <a:rPr lang="en-US" dirty="0"/>
-              <a:t>To summarize. Our simulator is validated against three papers and against the flight spin-up time. The residual Koopman model is the best predictor from 100 milliseconds on, needs less data, and improves MPC, but it does not yet generalize, and we have a concrete plan for that. On timing, the published recovery strategy is safe with high probability only for detection delays up to about 12 milliseconds in simulation, well below what real detectors need, which is the gap our certified delay budget will address. Thank you, we are happy to take questions.</a:t>
-            </a:r>
-            <a:endParaRPr lang="en-US" dirty="0"/>
-          </a:p>
-        </p:txBody>
-      </p:sp>
-      <p:sp>
-        <p:nvSpPr>
-          <p:cNvPr id="4" name="Slide Number Placeholder 3"/>
-          <p:cNvSpPr>
-            <a:spLocks noGrp="1"/>
-          </p:cNvSpPr>
-          <p:nvPr>
-            <p:ph type="sldNum" sz="quarter" idx="10"/>
-          </p:nvPr>
-        </p:nvSpPr>
-        <p:spPr/>
-        <p:txBody>
-          <a:bodyPr/>
-          <a:lstStyle/>
-          <a:p>
-            <a:fld id="{F7021451-1387-4CA6-816F-3879F97B5CBC}" type="slidenum">
-              <a:rPr lang="en-US"/>
-              <a:t>19</a:t>
             </a:fld>
             <a:endParaRPr lang="en-US"/>
           </a:p>
@@ -1536,7 +1262,7 @@
           <a:p>
             <a:r>
               <a:rPr lang="en-US" dirty="0"/>
-              <a:t>Our project has one aim with two parts. The first part is the approach from the proposal we presented: build the known physics of the spinning, failed vehicle into the model, and let a Koopman model learn only what the physics gets wrong, then use it inside MPC. The second part concerns timing. While reviewing the literature we found that recovery methods with guarantees assume the failure is detected instantly, but real detectors take tens to hundreds of milliseconds. We therefore also ask for a guaranteed bound on that delay, using Lyapunov and LMI tools from this course. The two parts connect: whichever controller catches the vehicle after detection, we can compare them by the delay they tolerate. Nothing from the proposal was dropped.</a:t>
+              <a:t>First, the problem. A quadrotor has no spare actuator: its four thrusts control exactly four things, height, roll, pitch and yaw. The propellers also twist the body with small reaction torques, and in normal flight these cancel because two propellers spin each way. When one rotor fails, they no longer cancel, so the drone cannot avoid spinning. Mueller and D'Andrea showed that this is not the end. If we give up the heading, the remaining three rotors can hold the drone in a steady spin of about 19 radians per second about an axis tilted 16 degrees, like a spinning top. They called it the relaxed hover, proved it is controllable and flew it on a real drone.</a:t>
             </a:r>
             <a:endParaRPr lang="en-US" dirty="0"/>
           </a:p>
@@ -1624,7 +1350,7 @@
           <a:p>
             <a:r>
               <a:rPr lang="en-US" dirty="0"/>
-              <a:t>When one rotor dies, a quadrotor cannot hover level any more. Mueller and D'Andrea showed it can still fly by spinning steadily about a tilted axis, called the relaxed hover. But there is a gap in time: the fault detector needs some time tau to notice the failure. During that time the normal controller keeps flying a vehicle that has lost a rotor. Only after detection does the failure controller take over and try to capture the vehicle into the spinning state. Most guarantee-based papers assume tau equals zero. Başak and Prempain proved stability for a linear model with a fixed delay, but without thrust limits and without finding the largest tolerable delay. Fast detectors take 30 to 130 milliseconds.</a:t>
+              <a:t>So why is there still a problem? A controller is only as good as its model. The Mueller and D'Andrea model captures the main spinning motion, but it misses real effects: in their flights the drone produced less thrust than expected while spinning fast and spun 20 to 27 percent slower than predicted, inertias are never known exactly, and motor speed varies. A controller built on the model then settles with a steady error. Our research question is therefore: can a model that learns only this mismatch, on top of the physics model, predict the drone more accurately and give a smaller steady error in MPC than the physics model alone, or than a Koopman model that learns everything? Koopman methods describe the state by many nonlinear features, here all pairwise products, and fit a linear model on them by least squares. We use the same tools to learn the one-step error of the physics model. The learned correction is evaluated outside the MPC optimization, so the MPC stays a convex quadratic program. Residual Koopman models exist for healthy drones and other robots, but we did not find them for the spinning regime after complete rotor loss.</a:t>
             </a:r>
             <a:endParaRPr lang="en-US" dirty="0"/>
           </a:p>
@@ -1800,7 +1526,7 @@
           <a:p>
             <a:r>
               <a:rPr lang="en-US" dirty="0"/>
-              <a:t>Before trusting any result we checked the simulator against published numbers. The two-rotor and three-rotor-loss equilibria from Mueller and D'Andrea's ICRA paper match every digit they published. The three-rotor case is a strong check because it uses all the gyroscopic terms. For the one-rotor case, thrust, spin rate and tilt match within half a percent, but the pitch rate is six percent lower; we found that the paper's own published values leave a residual in its own equation 12, so that one published case is slightly inconsistent. We also wrote an independent implementation of their more detailed IJRR model and reproduced all five failure cases within 4 percent, and matched a second drone, the Bebop 2, from Sun et al. Finally, against flight data: with the thrust the flight actually used, read from their Figure 4, our model spins up to 10 radians per second in 0.65 seconds, against 0.62 in flight. The spin-up time depends strongly on that thrust, so the delay results later are shown for two thrust values.</a:t>
+              <a:t>Before trusting any result we checked the simulator against published numbers. The two-rotor and three-rotor-loss equilibria from Mueller and D'Andrea's ICRA paper match every digit they published. The three-rotor case is a strong check because it uses all the gyroscopic terms. For the one-rotor case, thrusts, yaw rate and the vertical component of the axis match within half a percent, but the pitch rate and tilt are about six and five percent lower; we found that the paper's own published values leave a residual in its own equation 12, so that one published case is slightly inconsistent. We also wrote an independent implementation of their more detailed IJRR model and reproduced all five published hover cases within 4 percent, and matched a second drone, the Bebop 2, from Sun et al. Finally, against flight data: with the thrust the flight actually used, read from their Figure 4, our model spins up to 10 radians per second in 0.65 seconds, against 0.62 in flight. The spin-up time depends strongly on that thrust, which is why we read it from the flight data rather than assuming half the weight per rotor.</a:t>
             </a:r>
             <a:endParaRPr lang="en-US" dirty="0"/>
           </a:p>
@@ -2152,7 +1878,7 @@
           <a:p>
             <a:r>
               <a:rPr lang="en-US" dirty="0"/>
-              <a:t>Now the first part: learning only the mismatch of the physics model.</a:t>
+              <a:t>Now our approach: learn only the mismatch of the physics model, and use it inside MPC.</a:t>
             </a:r>
             <a:endParaRPr lang="en-US" dirty="0"/>
           </a:p>
@@ -3124,7 +2850,7 @@
                   <a:schemeClr val="accent3"/>
                 </a:solidFill>
               </a:rPr>
-              <a:t>Residual Koopman MPC, and certified limits on fault-detection delay</a:t>
+              <a:t>Physics-informed residual Koopman model predictive control</a:t>
             </a:r>
             <a:endParaRPr lang="en-US" sz="2000" dirty="0"/>
           </a:p>
@@ -3362,6 +3088,23 @@
             </a:r>
             <a:endParaRPr lang="en-US" sz="1600" dirty="0"/>
           </a:p>
+          <a:p>
+            <a:pPr indent="0" marL="0">
+              <a:spcBef>
+                <a:spcPts val="800"/>
+              </a:spcBef>
+              <a:buNone/>
+            </a:pPr>
+            <a:r>
+              <a:rPr lang="en-US" sz="1600" dirty="0">
+                <a:solidFill>
+                  <a:schemeClr val="tx1"/>
+                </a:solidFill>
+              </a:rPr>
+              <a:t>x⁺ = A_d x + B_d u</a:t>
+            </a:r>
+            <a:endParaRPr lang="en-US" sz="1600" dirty="0"/>
+          </a:p>
         </p:txBody>
       </p:sp>
       <p:sp>
@@ -3419,7 +3162,24 @@
                   <a:schemeClr val="tx1"/>
                 </a:solidFill>
               </a:rPr>
-              <a:t>Learns all the dynamics from data: 55 lifted states (quadratic dictionary).</a:t>
+              <a:t>Learns everything: 55 features of the state (constant, states, all pairwise products), linear model on them.</a:t>
+            </a:r>
+            <a:endParaRPr lang="en-US" sz="1600" dirty="0"/>
+          </a:p>
+          <a:p>
+            <a:pPr indent="0" marL="0">
+              <a:spcBef>
+                <a:spcPts val="800"/>
+              </a:spcBef>
+              <a:buNone/>
+            </a:pPr>
+            <a:r>
+              <a:rPr lang="en-US" sz="1600" dirty="0">
+                <a:solidFill>
+                  <a:schemeClr val="tx1"/>
+                </a:solidFill>
+              </a:rPr>
+              <a:t>ζ⁺ = A ζ + B u</a:t>
             </a:r>
             <a:endParaRPr lang="en-US" sz="1600" dirty="0"/>
           </a:p>
@@ -3463,7 +3223,7 @@
                   <a:schemeClr val="tx2"/>
                 </a:solidFill>
               </a:rPr>
-              <a:t>Residual EDMDc (proposed)</a:t>
+              <a:t>Residual (proposed)</a:t>
             </a:r>
             <a:endParaRPr lang="en-US" sz="1600" dirty="0"/>
           </a:p>
@@ -3480,7 +3240,24 @@
                   <a:schemeClr val="tx1"/>
                 </a:solidFill>
               </a:rPr>
-              <a:t>Physics model plus a learned one-step correction e = x_true − x_model, clipped at d_max.</a:t>
+              <a:t>Physics model plus a learned one-step correction, clipped at d_max (99.5th percentile of the training errors).</a:t>
+            </a:r>
+            <a:endParaRPr lang="en-US" sz="1600" dirty="0"/>
+          </a:p>
+          <a:p>
+            <a:pPr indent="0" marL="0">
+              <a:spcBef>
+                <a:spcPts val="800"/>
+              </a:spcBef>
+              <a:buNone/>
+            </a:pPr>
+            <a:r>
+              <a:rPr lang="en-US" sz="1600" dirty="0">
+                <a:solidFill>
+                  <a:schemeClr val="tx1"/>
+                </a:solidFill>
+              </a:rPr>
+              <a:t>x⁺ = A_d x + B_d u + clip(Wᵀψ(x, u))</a:t>
             </a:r>
             <a:endParaRPr lang="en-US" sz="1600" dirty="0"/>
           </a:p>
@@ -3695,7 +3472,7 @@
                   <a:schemeClr val="tx2"/>
                 </a:solidFill>
               </a:rPr>
-              <a:t>From 100 ms on, the residual model predicts best</a:t>
+              <a:t>From 100 ms to 1 s, the residual model predicts best</a:t>
             </a:r>
             <a:endParaRPr lang="en-US" sz="3000" dirty="0"/>
           </a:p>
@@ -3733,8 +3510,8 @@
         </p:nvSpPr>
         <p:spPr>
           <a:xfrm>
-            <a:off x="7818120" y="1554480"/>
-            <a:ext cx="3794760" cy="548640"/>
+            <a:off x="7818120" y="1463040"/>
+            <a:ext cx="3794760" cy="685800"/>
           </a:xfrm>
           <a:prstGeom prst="rect">
             <a:avLst/>
@@ -3750,14 +3527,14 @@
               <a:buNone/>
             </a:pPr>
             <a:r>
-              <a:rPr lang="en-US" sz="1500" dirty="0">
+              <a:rPr lang="en-US" sz="1300" dirty="0">
                 <a:solidFill>
                   <a:schemeClr val="accent6"/>
                 </a:solidFill>
               </a:rPr>
-              <a:t>Error at a 1 s horizon, test family A (normalized RMSE):</a:t>
-            </a:r>
-            <a:endParaRPr lang="en-US" sz="1500" dirty="0"/>
+              <a:t>Error at a 1 s horizon on new data from plant A (normalized RMSE: error ÷ each state's typical spread; 1 = as large as normal variation):</a:t>
+            </a:r>
+            <a:endParaRPr lang="en-US" sz="1300" dirty="0"/>
           </a:p>
         </p:txBody>
       </p:sp>
@@ -4423,7 +4200,7 @@
                   <a:schemeClr val="tx1"/>
                 </a:solidFill>
               </a:rPr>
-              <a:t>Below 100 ms the full-state model is slightly better. It has 4 of 55 eigenvalues outside the unit circle and falls behind "no change" by 2 s, as the proposal predicted.</a:t>
+              <a:t>Below 100 ms the full-state model is better (2.5× at 20 ms); it has 4 of 55 eigenvalues just outside the unit circle and falls behind "no change" by 2 s, as we hypothesised. Beyond about 2 s "no change" beats every model. The physics model drifts in open loop (undamped modes, unmodelled thrust loss) but works in closed loop.</a:t>
             </a:r>
             <a:endParaRPr lang="en-US" sz="1500" dirty="0"/>
           </a:p>
@@ -4699,7 +4476,7 @@
                   <a:schemeClr val="tx1"/>
                 </a:solidFill>
               </a:rPr>
-              <a:t>On the unseen plant B, both learned models are worse than the physics model alone. Training on randomized plants helps on B only up to about 100 ms and hurts on A: the unknown parameters cannot be read from one state sample.</a:t>
+              <a:t>On the unseen plant B, both learned models are worse than the physics model alone. Training on randomized plants helps on B only up to about 100 ms and hurts on A: a model that sees only the current state cannot tell which vehicle it is on.</a:t>
             </a:r>
             <a:endParaRPr lang="en-US" sz="1600" dirty="0"/>
           </a:p>
@@ -4972,7 +4749,7 @@
                   <a:schemeClr val="accent6"/>
                 </a:solidFill>
               </a:rPr>
-              <a:t>steady altitude error on plant A (−0.29 → −0.19 m)</a:t>
+              <a:t>settles 19 cm low instead of 29 cm (plant A)</a:t>
             </a:r>
             <a:endParaRPr lang="en-US" sz="1600" dirty="0"/>
           </a:p>
@@ -5022,7 +4799,7 @@
                   <a:schemeClr val="accent6"/>
                 </a:solidFill>
               </a:rPr>
-              <a:t>solver time per step (horizon 20 × 5 ms, OSQP)</a:t>
+              <a:t>QP solver per 5 ms step (4.4 ms including the Python modelling layer)</a:t>
             </a:r>
             <a:endParaRPr lang="en-US" sz="1600" dirty="0"/>
           </a:p>
@@ -5058,7 +4835,18 @@
                   <a:schemeClr val="tx1"/>
                 </a:solidFill>
               </a:rPr>
-              <a:t>The residual enters the QP as a measured disturbance, so the problem stays convex (as in Todde et al. 2026). It helps for every mismatch effect of plant A, but on plant B without its thrust loss the error grows by 47%. After a detection delay, LQR is safe up to 10 ms and both MPCs only without delay.</a:t>
+              <a:t>The residual is evaluated outside the QP and added as a known disturbance, so the problem stays convex (as in Todde et al. 2026). It helps for every mismatch effect of plant A; on held-out plant B the correction can push the wrong way (one variant: 47% larger error). </a:t>
+            </a:r>
+            <a:pPr indent="0" marL="0">
+              <a:buNone/>
+            </a:pPr>
+            <a:r>
+              <a:rPr lang="en-US" sz="1600" b="1" dirty="0">
+                <a:solidFill>
+                  <a:schemeClr val="tx1"/>
+                </a:solidFill>
+              </a:rPr>
+              <a:t>Missing baseline: integral action (offset-free MPC), which removes a constant bias completely in theory.</a:t>
             </a:r>
             <a:endParaRPr lang="en-US" sz="1600" dirty="0"/>
           </a:p>
@@ -5144,145 +4932,6 @@
         </p:nvSpPr>
         <p:spPr>
           <a:xfrm>
-            <a:off x="731520" y="1737360"/>
-            <a:ext cx="10515600" cy="365760"/>
-          </a:xfrm>
-          <a:prstGeom prst="rect">
-            <a:avLst/>
-          </a:prstGeom>
-          <a:noFill/>
-          <a:ln/>
-        </p:spPr>
-        <p:txBody>
-          <a:bodyPr wrap="square" lIns="0" tIns="0" rIns="0" bIns="0" rtlCol="0"/>
-          <a:lstStyle/>
-          <a:p>
-            <a:pPr indent="0" marL="0">
-              <a:buNone/>
-            </a:pPr>
-            <a:r>
-              <a:rPr lang="en-US" sz="1400" b="1" spc="100" kern="0" dirty="0">
-                <a:solidFill>
-                  <a:schemeClr val="accent5"/>
-                </a:solidFill>
-              </a:rPr>
-              <a:t>PART 2 · ADDED AFTER THE PROPOSAL</a:t>
-            </a:r>
-            <a:endParaRPr lang="en-US" sz="1400" dirty="0"/>
-          </a:p>
-        </p:txBody>
-      </p:sp>
-      <p:sp>
-        <p:nvSpPr>
-          <p:cNvPr id="3" name="Text 0"/>
-          <p:cNvSpPr/>
-          <p:nvPr>
-            <p:ph idx="101" type="title" hasCustomPrompt="1"/>
-          </p:nvPr>
-        </p:nvSpPr>
-        <p:spPr>
-          <a:xfrm>
-            <a:off x="731520" y="2240280"/>
-            <a:ext cx="10698480" cy="1737360"/>
-          </a:xfrm>
-          <a:prstGeom prst="rect">
-            <a:avLst/>
-          </a:prstGeom>
-          <a:noFill/>
-          <a:ln/>
-        </p:spPr>
-        <p:txBody>
-          <a:bodyPr wrap="square" lIns="0" tIns="0" rIns="0" bIns="0" rtlCol="0" anchor="t"/>
-          <a:lstStyle/>
-          <a:p>
-            <a:pPr algn="l" indent="0" marL="0">
-              <a:buNone/>
-            </a:pPr>
-            <a:r>
-              <a:rPr lang="en-US" sz="4000" b="1" dirty="0">
-                <a:solidFill>
-                  <a:schemeClr val="bg1"/>
-                </a:solidFill>
-              </a:rPr>
-              <a:t>How long can fault detection take?</a:t>
-            </a:r>
-            <a:endParaRPr lang="en-US" sz="4000" dirty="0"/>
-          </a:p>
-        </p:txBody>
-      </p:sp>
-      <p:sp>
-        <p:nvSpPr>
-          <p:cNvPr id="4" name="Text 0"/>
-          <p:cNvSpPr/>
-          <p:nvPr>
-            <p:ph idx="102" type="body" hasCustomPrompt="1"/>
-          </p:nvPr>
-        </p:nvSpPr>
-        <p:spPr>
-          <a:xfrm>
-            <a:off x="731520" y="4069080"/>
-            <a:ext cx="10515600" cy="914400"/>
-          </a:xfrm>
-          <a:prstGeom prst="rect">
-            <a:avLst/>
-          </a:prstGeom>
-          <a:noFill/>
-          <a:ln/>
-        </p:spPr>
-        <p:txBody>
-          <a:bodyPr wrap="square" lIns="0" tIns="0" rIns="0" bIns="0" rtlCol="0" anchor="t"/>
-          <a:lstStyle/>
-          <a:p>
-            <a:pPr indent="0" marL="0">
-              <a:buNone/>
-            </a:pPr>
-            <a:r>
-              <a:rPr lang="en-US" sz="2000" dirty="0">
-                <a:solidFill>
-                  <a:schemeClr val="accent3"/>
-                </a:solidFill>
-              </a:rPr>
-              <a:t>Most recovery methods assume instant detection. Fast detectors take 30–130 ms.</a:t>
-            </a:r>
-            <a:endParaRPr lang="en-US" sz="2000" dirty="0"/>
-          </a:p>
-        </p:txBody>
-      </p:sp>
-    </p:spTree>
-  </p:cSld>
-  <p:clrMapOvr>
-    <a:masterClrMapping/>
-  </p:clrMapOvr>
-</p:sld>
-</file>
-
-<file path=ppt/slides/slide15.xml><?xml version="1.0" encoding="utf-8"?>
-<p:sld xmlns:a="http://schemas.openxmlformats.org/drawingml/2006/main" xmlns:r="http://schemas.openxmlformats.org/officeDocument/2006/relationships" xmlns:p="http://schemas.openxmlformats.org/presentationml/2006/main">
-  <p:cSld name="Slide 15">
-    <p:spTree>
-      <p:nvGrpSpPr>
-        <p:cNvPr id="1" name=""/>
-        <p:cNvGrpSpPr/>
-        <p:nvPr/>
-      </p:nvGrpSpPr>
-      <p:grpSpPr>
-        <a:xfrm>
-          <a:off x="0" y="0"/>
-          <a:ext cx="0" cy="0"/>
-          <a:chOff x="0" y="0"/>
-          <a:chExt cx="0" cy="0"/>
-        </a:xfrm>
-      </p:grpSpPr>
-      <p:sp>
-        <p:nvSpPr>
-          <p:cNvPr id="2" name="Text 0"/>
-          <p:cNvSpPr/>
-          <p:nvPr>
-            <p:ph idx="100" type="body" hasCustomPrompt="1"/>
-          </p:nvPr>
-        </p:nvSpPr>
-        <p:spPr>
-          <a:xfrm>
             <a:off x="548640" y="292608"/>
             <a:ext cx="8229600" cy="329184"/>
           </a:xfrm>
@@ -5302,10 +4951,10 @@
             <a:r>
               <a:rPr lang="en-US" sz="1200" b="1" spc="100" kern="0" dirty="0">
                 <a:solidFill>
-                  <a:schemeClr val="accent2"/>
-                </a:solidFill>
-              </a:rPr>
-              <a:t>WHY DELAY MATTERS</a:t>
+                  <a:schemeClr val="accent1"/>
+                </a:solidFill>
+              </a:rPr>
+              <a:t>NEXT STEPS</a:t>
             </a:r>
             <a:endParaRPr lang="en-US" sz="1200" dirty="0"/>
           </a:p>
@@ -5343,1968 +4992,15 @@
                   <a:schemeClr val="tx2"/>
                 </a:solidFill>
               </a:rPr>
-              <a:t>Before detection, nothing stops the roll</a:t>
+              <a:t>Plan for the remaining weeks</a:t>
             </a:r>
             <a:endParaRPr lang="en-US" sz="3000" dirty="0"/>
-          </a:p>
-        </p:txBody>
-      </p:sp>
-      <p:pic>
-        <p:nvPicPr>
-          <p:cNvPr id="5" name="e4_undetected_phase.png" descr="Tilt during the undetected phase and thrust of rotor 2">    </p:cNvPr>
-          <p:cNvPicPr>
-            <a:picLocks noChangeAspect="1"/>
-          </p:cNvPicPr>
-          <p:nvPr/>
-        </p:nvPicPr>
-        <p:blipFill>
-          <a:blip r:embed="rId1"/>
-          <a:stretch>
-            <a:fillRect/>
-          </a:stretch>
-        </p:blipFill>
-        <p:spPr>
-          <a:xfrm>
-            <a:off x="1280160" y="1463040"/>
-            <a:ext cx="9601200" cy="3538420"/>
-          </a:xfrm>
-          <a:prstGeom prst="rect">
-            <a:avLst/>
-          </a:prstGeom>
-        </p:spPr>
-      </p:pic>
-      <p:sp>
-        <p:nvSpPr>
-          <p:cNvPr id="6" name="bound statement"/>
-          <p:cNvSpPr txBox="1"/>
-          <p:nvPr/>
-        </p:nvSpPr>
-        <p:spPr>
-          <a:xfrm>
-            <a:off x="548640" y="5120640"/>
-            <a:ext cx="11064240" cy="822960"/>
-          </a:xfrm>
-          <a:prstGeom prst="rect">
-            <a:avLst/>
-          </a:prstGeom>
-          <a:noFill/>
-          <a:ln/>
-        </p:spPr>
-        <p:txBody>
-          <a:bodyPr wrap="square" lIns="0" tIns="0" rIns="0" bIns="0" rtlCol="0" anchor="t"/>
-          <a:lstStyle/>
-          <a:p>
-            <a:pPr indent="0" marL="0">
-              <a:buNone/>
-            </a:pPr>
-            <a:r>
-              <a:rPr lang="en-US" sz="1700" dirty="0">
-                <a:solidFill>
-                  <a:schemeClr val="tx1"/>
-                </a:solidFill>
-              </a:rPr>
-              <a:t>Rotor 2 cannot go below its idle thrust (0.2 N), so the roll acceleration is at least </a:t>
-            </a:r>
-            <a:pPr indent="0" marL="0">
-              <a:buNone/>
-            </a:pPr>
-            <a:r>
-              <a:rPr lang="en-US" sz="1700" b="1" dirty="0">
-                <a:solidFill>
-                  <a:schemeClr val="tx1"/>
-                </a:solidFill>
-              </a:rPr>
-              <a:t>l·f_min / I_xx = 10.6 rad/s²</a:t>
-            </a:r>
-            <a:pPr indent="0" marL="0">
-              <a:buNone/>
-            </a:pPr>
-            <a:r>
-              <a:rPr lang="en-US" sz="1700" dirty="0">
-                <a:solidFill>
-                  <a:schemeClr val="tx1"/>
-                </a:solidFill>
-              </a:rPr>
-              <a:t> for any healthy-controller tuning. Tilt reaches about 13° at 100 ms and 37° at 200 ms.</a:t>
-            </a:r>
-            <a:endParaRPr lang="en-US" sz="1700" dirty="0"/>
-          </a:p>
-        </p:txBody>
-      </p:sp>
-      <p:sp>
-        <p:nvSpPr>
-          <p:cNvPr id="25" name="Slide Number Placeholder 0"/>
-          <p:cNvSpPr>
-            <a:spLocks noGrp="1"/>
-          </p:cNvSpPr>
-          <p:nvPr>
-            <p:ph type="sldNum" sz="quarter" idx="4294967295"/>
-          </p:nvPr>
-        </p:nvSpPr>
-        <p:spPr>
-          <a:xfrm>
-            <a:off x="11064240" y="6400800"/>
-            <a:ext cx="548640" cy="274320"/>
-          </a:xfrm>
-          <a:prstGeom prst="rect">
-            <a:avLst/>
-          </a:prstGeom>
-          <a:extLst>
-            <a:ext uri="{C572A759-6A51-4108-AA02-DFA0A04FC94B}">
-              <ma14:wrappingTextBoxFlag xmlns:ma14="http://schemas.microsoft.com/office/mac/drawingml/2011/main" val="0"/>
-            </a:ext>
-          </a:extLst>
-        </p:spPr>
-        <p:txBody>
-          <a:bodyPr/>
-          <a:lstStyle>
-            <a:lvl1pPr>
-              <a:defRPr sz="1000">
-                <a:solidFill>
-                  <a:schemeClr val="accent6"/>
-                </a:solidFill>
-              </a:defRPr>
-            </a:lvl1pPr>
-          </a:lstStyle>
-          <a:p>
-            <a:pPr algn="r"/>
-            <a:fld id="{F7021451-1387-4CA6-816F-3879F97B5CBC}" type="slidenum">
-              <a:rPr b="0" lang="en-US"/>
-              <a:t>15</a:t>
-            </a:fld>
-            <a:endParaRPr lang="en-US"/>
-          </a:p>
-        </p:txBody>
-      </p:sp>
-    </p:spTree>
-  </p:cSld>
-  <p:clrMapOvr>
-    <a:masterClrMapping/>
-  </p:clrMapOvr>
-</p:sld>
-</file>
-
-<file path=ppt/slides/slide16.xml><?xml version="1.0" encoding="utf-8"?>
-<p:sld xmlns:a="http://schemas.openxmlformats.org/drawingml/2006/main" xmlns:r="http://schemas.openxmlformats.org/officeDocument/2006/relationships" xmlns:p="http://schemas.openxmlformats.org/presentationml/2006/main">
-  <p:cSld name="Slide 16">
-    <p:spTree>
-      <p:nvGrpSpPr>
-        <p:cNvPr id="1" name=""/>
-        <p:cNvGrpSpPr/>
-        <p:nvPr/>
-      </p:nvGrpSpPr>
-      <p:grpSpPr>
-        <a:xfrm>
-          <a:off x="0" y="0"/>
-          <a:ext cx="0" cy="0"/>
-          <a:chOff x="0" y="0"/>
-          <a:chExt cx="0" cy="0"/>
-        </a:xfrm>
-      </p:grpSpPr>
-      <p:sp>
-        <p:nvSpPr>
-          <p:cNvPr id="2" name="Text 0"/>
-          <p:cNvSpPr/>
-          <p:nvPr>
-            <p:ph idx="100" type="body" hasCustomPrompt="1"/>
-          </p:nvPr>
-        </p:nvSpPr>
-        <p:spPr>
-          <a:xfrm>
-            <a:off x="548640" y="292608"/>
-            <a:ext cx="8229600" cy="329184"/>
-          </a:xfrm>
-          <a:prstGeom prst="rect">
-            <a:avLst/>
-          </a:prstGeom>
-          <a:noFill/>
-          <a:ln/>
-        </p:spPr>
-        <p:txBody>
-          <a:bodyPr wrap="square" lIns="0" tIns="0" rIns="0" bIns="0" rtlCol="0"/>
-          <a:lstStyle/>
-          <a:p>
-            <a:pPr indent="0" marL="0">
-              <a:buNone/>
-            </a:pPr>
-            <a:r>
-              <a:rPr lang="en-US" sz="1200" b="1" spc="100" kern="0" dirty="0">
-                <a:solidFill>
-                  <a:schemeClr val="accent2"/>
-                </a:solidFill>
-              </a:rPr>
-              <a:t>KEY RESULT</a:t>
-            </a:r>
-            <a:endParaRPr lang="en-US" sz="1200" dirty="0"/>
-          </a:p>
-        </p:txBody>
-      </p:sp>
-      <p:sp>
-        <p:nvSpPr>
-          <p:cNvPr id="3" name="Text 0"/>
-          <p:cNvSpPr/>
-          <p:nvPr>
-            <p:ph idx="101" type="title" hasCustomPrompt="1"/>
-          </p:nvPr>
-        </p:nvSpPr>
-        <p:spPr>
-          <a:xfrm>
-            <a:off x="548640" y="603504"/>
-            <a:ext cx="11064240" cy="713232"/>
-          </a:xfrm>
-          <a:prstGeom prst="rect">
-            <a:avLst/>
-          </a:prstGeom>
-          <a:noFill/>
-          <a:ln/>
-        </p:spPr>
-        <p:txBody>
-          <a:bodyPr wrap="square" lIns="0" tIns="0" rIns="0" bIns="0" rtlCol="0" anchor="t"/>
-          <a:lstStyle/>
-          <a:p>
-            <a:pPr algn="l" indent="0" marL="0">
-              <a:buNone/>
-            </a:pPr>
-            <a:r>
-              <a:rPr lang="en-US" sz="3000" b="1" dirty="0">
-                <a:solidFill>
-                  <a:schemeClr val="tx2"/>
-                </a:solidFill>
-              </a:rPr>
-              <a:t>Safe recovery is likely only below about 12 ms</a:t>
-            </a:r>
-            <a:endParaRPr lang="en-US" sz="3000" dirty="0"/>
-          </a:p>
-        </p:txBody>
-      </p:sp>
-      <p:pic>
-        <p:nvPicPr>
-          <p:cNvPr id="5" name="e4_p_safe.png" descr="Probability of a safe recovery versus detection delay for two spin-up thrusts, with 95% Wilson bands and the fast-detector range shaded">    </p:cNvPr>
-          <p:cNvPicPr>
-            <a:picLocks noChangeAspect="1"/>
-          </p:cNvPicPr>
-          <p:nvPr/>
-        </p:nvPicPr>
-        <p:blipFill>
-          <a:blip r:embed="rId1"/>
-          <a:stretch>
-            <a:fillRect/>
-          </a:stretch>
-        </p:blipFill>
-        <p:spPr>
-          <a:xfrm>
-            <a:off x="548640" y="1463040"/>
-            <a:ext cx="7498080" cy="3479180"/>
-          </a:xfrm>
-          <a:prstGeom prst="rect">
-            <a:avLst/>
-          </a:prstGeom>
-        </p:spPr>
-      </p:pic>
-      <p:sp>
-        <p:nvSpPr>
-          <p:cNvPr id="6" name="mc caption"/>
-          <p:cNvSpPr txBox="1"/>
-          <p:nvPr/>
-        </p:nvSpPr>
-        <p:spPr>
-          <a:xfrm>
-            <a:off x="8412480" y="1554480"/>
-            <a:ext cx="3200400" cy="365760"/>
-          </a:xfrm>
-          <a:prstGeom prst="rect">
-            <a:avLst/>
-          </a:prstGeom>
-          <a:noFill/>
-          <a:ln/>
-        </p:spPr>
-        <p:txBody>
-          <a:bodyPr wrap="square" lIns="0" tIns="0" rIns="0" bIns="0" rtlCol="0" anchor="t"/>
-          <a:lstStyle/>
-          <a:p>
-            <a:pPr indent="0" marL="0">
-              <a:buNone/>
-            </a:pPr>
-            <a:r>
-              <a:rPr lang="en-US" sz="1500" dirty="0">
-                <a:solidFill>
-                  <a:schemeClr val="accent6"/>
-                </a:solidFill>
-              </a:rPr>
-              <a:t>P(safe), 40 random starts per delay:</a:t>
-            </a:r>
-            <a:endParaRPr lang="en-US" sz="1500" dirty="0"/>
           </a:p>
         </p:txBody>
       </p:sp>
       <p:graphicFrame>
         <p:nvGraphicFramePr>
-          <p:cNvPr id="17" name="monte carlo table"/>
-          <p:cNvGraphicFramePr>
-            <a:graphicFrameLocks noGrp="1"/>
-          </p:cNvGraphicFramePr>
-          <p:nvPr>
-            <p:extLst>
-              <p:ext uri="{D42A27DB-BD31-4B8C-83A1-F6EECF244321}">
-                <p14:modId xmlns:p14="http://schemas.microsoft.com/office/powerpoint/2010/main" val="1579011935"/>
-              </p:ext>
-            </p:extLst>
-          </p:nvPr>
-        </p:nvGraphicFramePr>
-        <p:xfrm>
-          <a:off x="8412480" y="1965960"/>
-          <a:ext cx="3200400" cy="914400"/>
-        </p:xfrm>
-        <a:graphic>
-          <a:graphicData uri="http://schemas.openxmlformats.org/drawingml/2006/table">
-            <a:tbl>
-              <a:tblPr/>
-              <a:tblGrid>
-                <a:gridCol w="1188720"/>
-                <a:gridCol w="1005840"/>
-                <a:gridCol w="1005840"/>
-              </a:tblGrid>
-              <a:tr h="365760">
-                <a:tc>
-                  <a:txBody>
-                    <a:bodyPr/>
-                    <a:lstStyle/>
-                    <a:p>
-                      <a:pPr indent="0" marL="0">
-                        <a:buNone/>
-                      </a:pPr>
-                      <a:r>
-                        <a:rPr lang="en-US" sz="1400" b="1" dirty="0">
-                          <a:solidFill>
-                            <a:schemeClr val="tx1"/>
-                          </a:solidFill>
-                        </a:rPr>
-                        <a:t>Delay</a:t>
-                      </a:r>
-                      <a:endParaRPr lang="en-US" sz="1400" dirty="0"/>
-                    </a:p>
-                  </a:txBody>
-                  <a:tcPr marL="76200" marR="76200" marT="38100" marB="38100" anchor="ctr">
-                    <a:lnL w="9525" cap="flat" cmpd="sng" algn="ctr">
-                      <a:solidFill>
-                        <a:srgbClr val="D5D9E0"/>
-                      </a:solidFill>
-                      <a:prstDash val="solid"/>
-                      <a:round/>
-                      <a:headEnd type="none" w="med" len="med"/>
-                      <a:tailEnd type="none" w="med" len="med"/>
-                    </a:lnL>
-                    <a:lnR w="9525" cap="flat" cmpd="sng" algn="ctr">
-                      <a:solidFill>
-                        <a:srgbClr val="D5D9E0"/>
-                      </a:solidFill>
-                      <a:prstDash val="solid"/>
-                      <a:round/>
-                      <a:headEnd type="none" w="med" len="med"/>
-                      <a:tailEnd type="none" w="med" len="med"/>
-                    </a:lnR>
-                    <a:lnT w="9525" cap="flat" cmpd="sng" algn="ctr">
-                      <a:solidFill>
-                        <a:srgbClr val="D5D9E0"/>
-                      </a:solidFill>
-                      <a:prstDash val="solid"/>
-                      <a:round/>
-                      <a:headEnd type="none" w="med" len="med"/>
-                      <a:tailEnd type="none" w="med" len="med"/>
-                    </a:lnT>
-                    <a:lnB w="9525" cap="flat" cmpd="sng" algn="ctr">
-                      <a:solidFill>
-                        <a:srgbClr val="D5D9E0"/>
-                      </a:solidFill>
-                      <a:prstDash val="solid"/>
-                      <a:round/>
-                      <a:headEnd type="none" w="med" len="med"/>
-                      <a:tailEnd type="none" w="med" len="med"/>
-                    </a:lnB>
-                    <a:solidFill>
-                      <a:schemeClr val="accent4"/>
-                    </a:solidFill>
-                  </a:tcPr>
-                </a:tc>
-                <a:tc>
-                  <a:txBody>
-                    <a:bodyPr/>
-                    <a:lstStyle/>
-                    <a:p>
-                      <a:pPr algn="r" indent="0" marL="0">
-                        <a:buNone/>
-                      </a:pPr>
-                      <a:r>
-                        <a:rPr lang="en-US" sz="1400" b="1" dirty="0">
-                          <a:solidFill>
-                            <a:schemeClr val="tx1"/>
-                          </a:solidFill>
-                        </a:rPr>
-                        <a:t>2.95 N</a:t>
-                      </a:r>
-                      <a:endParaRPr lang="en-US" sz="1400" dirty="0"/>
-                    </a:p>
-                  </a:txBody>
-                  <a:tcPr marL="76200" marR="76200" marT="38100" marB="38100" anchor="ctr">
-                    <a:lnL w="9525" cap="flat" cmpd="sng" algn="ctr">
-                      <a:solidFill>
-                        <a:srgbClr val="D5D9E0"/>
-                      </a:solidFill>
-                      <a:prstDash val="solid"/>
-                      <a:round/>
-                      <a:headEnd type="none" w="med" len="med"/>
-                      <a:tailEnd type="none" w="med" len="med"/>
-                    </a:lnL>
-                    <a:lnR w="9525" cap="flat" cmpd="sng" algn="ctr">
-                      <a:solidFill>
-                        <a:srgbClr val="D5D9E0"/>
-                      </a:solidFill>
-                      <a:prstDash val="solid"/>
-                      <a:round/>
-                      <a:headEnd type="none" w="med" len="med"/>
-                      <a:tailEnd type="none" w="med" len="med"/>
-                    </a:lnR>
-                    <a:lnT w="9525" cap="flat" cmpd="sng" algn="ctr">
-                      <a:solidFill>
-                        <a:srgbClr val="D5D9E0"/>
-                      </a:solidFill>
-                      <a:prstDash val="solid"/>
-                      <a:round/>
-                      <a:headEnd type="none" w="med" len="med"/>
-                      <a:tailEnd type="none" w="med" len="med"/>
-                    </a:lnT>
-                    <a:lnB w="9525" cap="flat" cmpd="sng" algn="ctr">
-                      <a:solidFill>
-                        <a:srgbClr val="D5D9E0"/>
-                      </a:solidFill>
-                      <a:prstDash val="solid"/>
-                      <a:round/>
-                      <a:headEnd type="none" w="med" len="med"/>
-                      <a:tailEnd type="none" w="med" len="med"/>
-                    </a:lnB>
-                    <a:solidFill>
-                      <a:schemeClr val="accent4"/>
-                    </a:solidFill>
-                  </a:tcPr>
-                </a:tc>
-                <a:tc>
-                  <a:txBody>
-                    <a:bodyPr/>
-                    <a:lstStyle/>
-                    <a:p>
-                      <a:pPr algn="r" indent="0" marL="0">
-                        <a:buNone/>
-                      </a:pPr>
-                      <a:r>
-                        <a:rPr lang="en-US" sz="1400" b="1" dirty="0">
-                          <a:solidFill>
-                            <a:schemeClr val="tx1"/>
-                          </a:solidFill>
-                        </a:rPr>
-                        <a:t>2.45 N</a:t>
-                      </a:r>
-                      <a:endParaRPr lang="en-US" sz="1400" dirty="0"/>
-                    </a:p>
-                  </a:txBody>
-                  <a:tcPr marL="76200" marR="76200" marT="38100" marB="38100" anchor="ctr">
-                    <a:lnL w="9525" cap="flat" cmpd="sng" algn="ctr">
-                      <a:solidFill>
-                        <a:srgbClr val="D5D9E0"/>
-                      </a:solidFill>
-                      <a:prstDash val="solid"/>
-                      <a:round/>
-                      <a:headEnd type="none" w="med" len="med"/>
-                      <a:tailEnd type="none" w="med" len="med"/>
-                    </a:lnL>
-                    <a:lnR w="9525" cap="flat" cmpd="sng" algn="ctr">
-                      <a:solidFill>
-                        <a:srgbClr val="D5D9E0"/>
-                      </a:solidFill>
-                      <a:prstDash val="solid"/>
-                      <a:round/>
-                      <a:headEnd type="none" w="med" len="med"/>
-                      <a:tailEnd type="none" w="med" len="med"/>
-                    </a:lnR>
-                    <a:lnT w="9525" cap="flat" cmpd="sng" algn="ctr">
-                      <a:solidFill>
-                        <a:srgbClr val="D5D9E0"/>
-                      </a:solidFill>
-                      <a:prstDash val="solid"/>
-                      <a:round/>
-                      <a:headEnd type="none" w="med" len="med"/>
-                      <a:tailEnd type="none" w="med" len="med"/>
-                    </a:lnT>
-                    <a:lnB w="9525" cap="flat" cmpd="sng" algn="ctr">
-                      <a:solidFill>
-                        <a:srgbClr val="D5D9E0"/>
-                      </a:solidFill>
-                      <a:prstDash val="solid"/>
-                      <a:round/>
-                      <a:headEnd type="none" w="med" len="med"/>
-                      <a:tailEnd type="none" w="med" len="med"/>
-                    </a:lnB>
-                    <a:solidFill>
-                      <a:schemeClr val="accent4"/>
-                    </a:solidFill>
-                  </a:tcPr>
-                </a:tc>
-              </a:tr>
-              <a:tr h="365760">
-                <a:tc>
-                  <a:txBody>
-                    <a:bodyPr/>
-                    <a:lstStyle/>
-                    <a:p>
-                      <a:pPr indent="0" marL="0">
-                        <a:buNone/>
-                      </a:pPr>
-                      <a:r>
-                        <a:rPr lang="en-US" sz="1400" dirty="0">
-                          <a:solidFill>
-                            <a:schemeClr val="tx1"/>
-                          </a:solidFill>
-                        </a:rPr>
-                        <a:t>0 ms</a:t>
-                      </a:r>
-                      <a:endParaRPr lang="en-US" sz="1400" dirty="0"/>
-                    </a:p>
-                  </a:txBody>
-                  <a:tcPr marL="76200" marR="76200" marT="38100" marB="38100" anchor="ctr">
-                    <a:lnL w="9525" cap="flat" cmpd="sng" algn="ctr">
-                      <a:solidFill>
-                        <a:srgbClr val="D5D9E0"/>
-                      </a:solidFill>
-                      <a:prstDash val="solid"/>
-                      <a:round/>
-                      <a:headEnd type="none" w="med" len="med"/>
-                      <a:tailEnd type="none" w="med" len="med"/>
-                    </a:lnL>
-                    <a:lnR w="9525" cap="flat" cmpd="sng" algn="ctr">
-                      <a:solidFill>
-                        <a:srgbClr val="D5D9E0"/>
-                      </a:solidFill>
-                      <a:prstDash val="solid"/>
-                      <a:round/>
-                      <a:headEnd type="none" w="med" len="med"/>
-                      <a:tailEnd type="none" w="med" len="med"/>
-                    </a:lnR>
-                    <a:lnT w="9525" cap="flat" cmpd="sng" algn="ctr">
-                      <a:solidFill>
-                        <a:srgbClr val="D5D9E0"/>
-                      </a:solidFill>
-                      <a:prstDash val="solid"/>
-                      <a:round/>
-                      <a:headEnd type="none" w="med" len="med"/>
-                      <a:tailEnd type="none" w="med" len="med"/>
-                    </a:lnT>
-                    <a:lnB w="9525" cap="flat" cmpd="sng" algn="ctr">
-                      <a:solidFill>
-                        <a:srgbClr val="D5D9E0"/>
-                      </a:solidFill>
-                      <a:prstDash val="solid"/>
-                      <a:round/>
-                      <a:headEnd type="none" w="med" len="med"/>
-                      <a:tailEnd type="none" w="med" len="med"/>
-                    </a:lnB>
-                  </a:tcPr>
-                </a:tc>
-                <a:tc>
-                  <a:txBody>
-                    <a:bodyPr/>
-                    <a:lstStyle/>
-                    <a:p>
-                      <a:pPr algn="r" indent="0" marL="0">
-                        <a:buNone/>
-                      </a:pPr>
-                      <a:r>
-                        <a:rPr lang="en-US" sz="1400" dirty="0">
-                          <a:solidFill>
-                            <a:schemeClr val="tx1"/>
-                          </a:solidFill>
-                        </a:rPr>
-                        <a:t>1.00</a:t>
-                      </a:r>
-                      <a:endParaRPr lang="en-US" sz="1400" dirty="0"/>
-                    </a:p>
-                  </a:txBody>
-                  <a:tcPr marL="76200" marR="76200" marT="38100" marB="38100" anchor="ctr">
-                    <a:lnL w="9525" cap="flat" cmpd="sng" algn="ctr">
-                      <a:solidFill>
-                        <a:srgbClr val="D5D9E0"/>
-                      </a:solidFill>
-                      <a:prstDash val="solid"/>
-                      <a:round/>
-                      <a:headEnd type="none" w="med" len="med"/>
-                      <a:tailEnd type="none" w="med" len="med"/>
-                    </a:lnL>
-                    <a:lnR w="9525" cap="flat" cmpd="sng" algn="ctr">
-                      <a:solidFill>
-                        <a:srgbClr val="D5D9E0"/>
-                      </a:solidFill>
-                      <a:prstDash val="solid"/>
-                      <a:round/>
-                      <a:headEnd type="none" w="med" len="med"/>
-                      <a:tailEnd type="none" w="med" len="med"/>
-                    </a:lnR>
-                    <a:lnT w="9525" cap="flat" cmpd="sng" algn="ctr">
-                      <a:solidFill>
-                        <a:srgbClr val="D5D9E0"/>
-                      </a:solidFill>
-                      <a:prstDash val="solid"/>
-                      <a:round/>
-                      <a:headEnd type="none" w="med" len="med"/>
-                      <a:tailEnd type="none" w="med" len="med"/>
-                    </a:lnT>
-                    <a:lnB w="9525" cap="flat" cmpd="sng" algn="ctr">
-                      <a:solidFill>
-                        <a:srgbClr val="D5D9E0"/>
-                      </a:solidFill>
-                      <a:prstDash val="solid"/>
-                      <a:round/>
-                      <a:headEnd type="none" w="med" len="med"/>
-                      <a:tailEnd type="none" w="med" len="med"/>
-                    </a:lnB>
-                  </a:tcPr>
-                </a:tc>
-                <a:tc>
-                  <a:txBody>
-                    <a:bodyPr/>
-                    <a:lstStyle/>
-                    <a:p>
-                      <a:pPr algn="r" indent="0" marL="0">
-                        <a:buNone/>
-                      </a:pPr>
-                      <a:r>
-                        <a:rPr lang="en-US" sz="1400" dirty="0">
-                          <a:solidFill>
-                            <a:schemeClr val="tx1"/>
-                          </a:solidFill>
-                        </a:rPr>
-                        <a:t>1.00</a:t>
-                      </a:r>
-                      <a:endParaRPr lang="en-US" sz="1400" dirty="0"/>
-                    </a:p>
-                  </a:txBody>
-                  <a:tcPr marL="76200" marR="76200" marT="38100" marB="38100" anchor="ctr">
-                    <a:lnL w="9525" cap="flat" cmpd="sng" algn="ctr">
-                      <a:solidFill>
-                        <a:srgbClr val="D5D9E0"/>
-                      </a:solidFill>
-                      <a:prstDash val="solid"/>
-                      <a:round/>
-                      <a:headEnd type="none" w="med" len="med"/>
-                      <a:tailEnd type="none" w="med" len="med"/>
-                    </a:lnL>
-                    <a:lnR w="9525" cap="flat" cmpd="sng" algn="ctr">
-                      <a:solidFill>
-                        <a:srgbClr val="D5D9E0"/>
-                      </a:solidFill>
-                      <a:prstDash val="solid"/>
-                      <a:round/>
-                      <a:headEnd type="none" w="med" len="med"/>
-                      <a:tailEnd type="none" w="med" len="med"/>
-                    </a:lnR>
-                    <a:lnT w="9525" cap="flat" cmpd="sng" algn="ctr">
-                      <a:solidFill>
-                        <a:srgbClr val="D5D9E0"/>
-                      </a:solidFill>
-                      <a:prstDash val="solid"/>
-                      <a:round/>
-                      <a:headEnd type="none" w="med" len="med"/>
-                      <a:tailEnd type="none" w="med" len="med"/>
-                    </a:lnT>
-                    <a:lnB w="9525" cap="flat" cmpd="sng" algn="ctr">
-                      <a:solidFill>
-                        <a:srgbClr val="D5D9E0"/>
-                      </a:solidFill>
-                      <a:prstDash val="solid"/>
-                      <a:round/>
-                      <a:headEnd type="none" w="med" len="med"/>
-                      <a:tailEnd type="none" w="med" len="med"/>
-                    </a:lnB>
-                  </a:tcPr>
-                </a:tc>
-              </a:tr>
-              <a:tr h="365760">
-                <a:tc>
-                  <a:txBody>
-                    <a:bodyPr/>
-                    <a:lstStyle/>
-                    <a:p>
-                      <a:pPr indent="0" marL="0">
-                        <a:buNone/>
-                      </a:pPr>
-                      <a:r>
-                        <a:rPr lang="en-US" sz="1400" dirty="0">
-                          <a:solidFill>
-                            <a:schemeClr val="tx1"/>
-                          </a:solidFill>
-                        </a:rPr>
-                        <a:t>10 ms</a:t>
-                      </a:r>
-                      <a:endParaRPr lang="en-US" sz="1400" dirty="0"/>
-                    </a:p>
-                  </a:txBody>
-                  <a:tcPr marL="76200" marR="76200" marT="38100" marB="38100" anchor="ctr">
-                    <a:lnL w="9525" cap="flat" cmpd="sng" algn="ctr">
-                      <a:solidFill>
-                        <a:srgbClr val="D5D9E0"/>
-                      </a:solidFill>
-                      <a:prstDash val="solid"/>
-                      <a:round/>
-                      <a:headEnd type="none" w="med" len="med"/>
-                      <a:tailEnd type="none" w="med" len="med"/>
-                    </a:lnL>
-                    <a:lnR w="9525" cap="flat" cmpd="sng" algn="ctr">
-                      <a:solidFill>
-                        <a:srgbClr val="D5D9E0"/>
-                      </a:solidFill>
-                      <a:prstDash val="solid"/>
-                      <a:round/>
-                      <a:headEnd type="none" w="med" len="med"/>
-                      <a:tailEnd type="none" w="med" len="med"/>
-                    </a:lnR>
-                    <a:lnT w="9525" cap="flat" cmpd="sng" algn="ctr">
-                      <a:solidFill>
-                        <a:srgbClr val="D5D9E0"/>
-                      </a:solidFill>
-                      <a:prstDash val="solid"/>
-                      <a:round/>
-                      <a:headEnd type="none" w="med" len="med"/>
-                      <a:tailEnd type="none" w="med" len="med"/>
-                    </a:lnT>
-                    <a:lnB w="9525" cap="flat" cmpd="sng" algn="ctr">
-                      <a:solidFill>
-                        <a:srgbClr val="D5D9E0"/>
-                      </a:solidFill>
-                      <a:prstDash val="solid"/>
-                      <a:round/>
-                      <a:headEnd type="none" w="med" len="med"/>
-                      <a:tailEnd type="none" w="med" len="med"/>
-                    </a:lnB>
-                  </a:tcPr>
-                </a:tc>
-                <a:tc>
-                  <a:txBody>
-                    <a:bodyPr/>
-                    <a:lstStyle/>
-                    <a:p>
-                      <a:pPr algn="r" indent="0" marL="0">
-                        <a:buNone/>
-                      </a:pPr>
-                      <a:r>
-                        <a:rPr lang="en-US" sz="1400" dirty="0">
-                          <a:solidFill>
-                            <a:schemeClr val="tx1"/>
-                          </a:solidFill>
-                        </a:rPr>
-                        <a:t>0.97</a:t>
-                      </a:r>
-                      <a:endParaRPr lang="en-US" sz="1400" dirty="0"/>
-                    </a:p>
-                  </a:txBody>
-                  <a:tcPr marL="76200" marR="76200" marT="38100" marB="38100" anchor="ctr">
-                    <a:lnL w="9525" cap="flat" cmpd="sng" algn="ctr">
-                      <a:solidFill>
-                        <a:srgbClr val="D5D9E0"/>
-                      </a:solidFill>
-                      <a:prstDash val="solid"/>
-                      <a:round/>
-                      <a:headEnd type="none" w="med" len="med"/>
-                      <a:tailEnd type="none" w="med" len="med"/>
-                    </a:lnL>
-                    <a:lnR w="9525" cap="flat" cmpd="sng" algn="ctr">
-                      <a:solidFill>
-                        <a:srgbClr val="D5D9E0"/>
-                      </a:solidFill>
-                      <a:prstDash val="solid"/>
-                      <a:round/>
-                      <a:headEnd type="none" w="med" len="med"/>
-                      <a:tailEnd type="none" w="med" len="med"/>
-                    </a:lnR>
-                    <a:lnT w="9525" cap="flat" cmpd="sng" algn="ctr">
-                      <a:solidFill>
-                        <a:srgbClr val="D5D9E0"/>
-                      </a:solidFill>
-                      <a:prstDash val="solid"/>
-                      <a:round/>
-                      <a:headEnd type="none" w="med" len="med"/>
-                      <a:tailEnd type="none" w="med" len="med"/>
-                    </a:lnT>
-                    <a:lnB w="9525" cap="flat" cmpd="sng" algn="ctr">
-                      <a:solidFill>
-                        <a:srgbClr val="D5D9E0"/>
-                      </a:solidFill>
-                      <a:prstDash val="solid"/>
-                      <a:round/>
-                      <a:headEnd type="none" w="med" len="med"/>
-                      <a:tailEnd type="none" w="med" len="med"/>
-                    </a:lnB>
-                  </a:tcPr>
-                </a:tc>
-                <a:tc>
-                  <a:txBody>
-                    <a:bodyPr/>
-                    <a:lstStyle/>
-                    <a:p>
-                      <a:pPr algn="r" indent="0" marL="0">
-                        <a:buNone/>
-                      </a:pPr>
-                      <a:r>
-                        <a:rPr lang="en-US" sz="1400" dirty="0">
-                          <a:solidFill>
-                            <a:schemeClr val="tx1"/>
-                          </a:solidFill>
-                        </a:rPr>
-                        <a:t>0.82</a:t>
-                      </a:r>
-                      <a:endParaRPr lang="en-US" sz="1400" dirty="0"/>
-                    </a:p>
-                  </a:txBody>
-                  <a:tcPr marL="76200" marR="76200" marT="38100" marB="38100" anchor="ctr">
-                    <a:lnL w="9525" cap="flat" cmpd="sng" algn="ctr">
-                      <a:solidFill>
-                        <a:srgbClr val="D5D9E0"/>
-                      </a:solidFill>
-                      <a:prstDash val="solid"/>
-                      <a:round/>
-                      <a:headEnd type="none" w="med" len="med"/>
-                      <a:tailEnd type="none" w="med" len="med"/>
-                    </a:lnL>
-                    <a:lnR w="9525" cap="flat" cmpd="sng" algn="ctr">
-                      <a:solidFill>
-                        <a:srgbClr val="D5D9E0"/>
-                      </a:solidFill>
-                      <a:prstDash val="solid"/>
-                      <a:round/>
-                      <a:headEnd type="none" w="med" len="med"/>
-                      <a:tailEnd type="none" w="med" len="med"/>
-                    </a:lnR>
-                    <a:lnT w="9525" cap="flat" cmpd="sng" algn="ctr">
-                      <a:solidFill>
-                        <a:srgbClr val="D5D9E0"/>
-                      </a:solidFill>
-                      <a:prstDash val="solid"/>
-                      <a:round/>
-                      <a:headEnd type="none" w="med" len="med"/>
-                      <a:tailEnd type="none" w="med" len="med"/>
-                    </a:lnT>
-                    <a:lnB w="9525" cap="flat" cmpd="sng" algn="ctr">
-                      <a:solidFill>
-                        <a:srgbClr val="D5D9E0"/>
-                      </a:solidFill>
-                      <a:prstDash val="solid"/>
-                      <a:round/>
-                      <a:headEnd type="none" w="med" len="med"/>
-                      <a:tailEnd type="none" w="med" len="med"/>
-                    </a:lnB>
-                  </a:tcPr>
-                </a:tc>
-              </a:tr>
-              <a:tr h="365760">
-                <a:tc>
-                  <a:txBody>
-                    <a:bodyPr/>
-                    <a:lstStyle/>
-                    <a:p>
-                      <a:pPr indent="0" marL="0">
-                        <a:buNone/>
-                      </a:pPr>
-                      <a:r>
-                        <a:rPr lang="en-US" sz="1400" dirty="0">
-                          <a:solidFill>
-                            <a:schemeClr val="tx1"/>
-                          </a:solidFill>
-                        </a:rPr>
-                        <a:t>15 ms</a:t>
-                      </a:r>
-                      <a:endParaRPr lang="en-US" sz="1400" dirty="0"/>
-                    </a:p>
-                  </a:txBody>
-                  <a:tcPr marL="76200" marR="76200" marT="38100" marB="38100" anchor="ctr">
-                    <a:lnL w="9525" cap="flat" cmpd="sng" algn="ctr">
-                      <a:solidFill>
-                        <a:srgbClr val="D5D9E0"/>
-                      </a:solidFill>
-                      <a:prstDash val="solid"/>
-                      <a:round/>
-                      <a:headEnd type="none" w="med" len="med"/>
-                      <a:tailEnd type="none" w="med" len="med"/>
-                    </a:lnL>
-                    <a:lnR w="9525" cap="flat" cmpd="sng" algn="ctr">
-                      <a:solidFill>
-                        <a:srgbClr val="D5D9E0"/>
-                      </a:solidFill>
-                      <a:prstDash val="solid"/>
-                      <a:round/>
-                      <a:headEnd type="none" w="med" len="med"/>
-                      <a:tailEnd type="none" w="med" len="med"/>
-                    </a:lnR>
-                    <a:lnT w="9525" cap="flat" cmpd="sng" algn="ctr">
-                      <a:solidFill>
-                        <a:srgbClr val="D5D9E0"/>
-                      </a:solidFill>
-                      <a:prstDash val="solid"/>
-                      <a:round/>
-                      <a:headEnd type="none" w="med" len="med"/>
-                      <a:tailEnd type="none" w="med" len="med"/>
-                    </a:lnT>
-                    <a:lnB w="9525" cap="flat" cmpd="sng" algn="ctr">
-                      <a:solidFill>
-                        <a:srgbClr val="D5D9E0"/>
-                      </a:solidFill>
-                      <a:prstDash val="solid"/>
-                      <a:round/>
-                      <a:headEnd type="none" w="med" len="med"/>
-                      <a:tailEnd type="none" w="med" len="med"/>
-                    </a:lnB>
-                  </a:tcPr>
-                </a:tc>
-                <a:tc>
-                  <a:txBody>
-                    <a:bodyPr/>
-                    <a:lstStyle/>
-                    <a:p>
-                      <a:pPr algn="r" indent="0" marL="0">
-                        <a:buNone/>
-                      </a:pPr>
-                      <a:r>
-                        <a:rPr lang="en-US" sz="1400" dirty="0">
-                          <a:solidFill>
-                            <a:schemeClr val="tx1"/>
-                          </a:solidFill>
-                        </a:rPr>
-                        <a:t>0.80</a:t>
-                      </a:r>
-                      <a:endParaRPr lang="en-US" sz="1400" dirty="0"/>
-                    </a:p>
-                  </a:txBody>
-                  <a:tcPr marL="76200" marR="76200" marT="38100" marB="38100" anchor="ctr">
-                    <a:lnL w="9525" cap="flat" cmpd="sng" algn="ctr">
-                      <a:solidFill>
-                        <a:srgbClr val="D5D9E0"/>
-                      </a:solidFill>
-                      <a:prstDash val="solid"/>
-                      <a:round/>
-                      <a:headEnd type="none" w="med" len="med"/>
-                      <a:tailEnd type="none" w="med" len="med"/>
-                    </a:lnL>
-                    <a:lnR w="9525" cap="flat" cmpd="sng" algn="ctr">
-                      <a:solidFill>
-                        <a:srgbClr val="D5D9E0"/>
-                      </a:solidFill>
-                      <a:prstDash val="solid"/>
-                      <a:round/>
-                      <a:headEnd type="none" w="med" len="med"/>
-                      <a:tailEnd type="none" w="med" len="med"/>
-                    </a:lnR>
-                    <a:lnT w="9525" cap="flat" cmpd="sng" algn="ctr">
-                      <a:solidFill>
-                        <a:srgbClr val="D5D9E0"/>
-                      </a:solidFill>
-                      <a:prstDash val="solid"/>
-                      <a:round/>
-                      <a:headEnd type="none" w="med" len="med"/>
-                      <a:tailEnd type="none" w="med" len="med"/>
-                    </a:lnT>
-                    <a:lnB w="9525" cap="flat" cmpd="sng" algn="ctr">
-                      <a:solidFill>
-                        <a:srgbClr val="D5D9E0"/>
-                      </a:solidFill>
-                      <a:prstDash val="solid"/>
-                      <a:round/>
-                      <a:headEnd type="none" w="med" len="med"/>
-                      <a:tailEnd type="none" w="med" len="med"/>
-                    </a:lnB>
-                  </a:tcPr>
-                </a:tc>
-                <a:tc>
-                  <a:txBody>
-                    <a:bodyPr/>
-                    <a:lstStyle/>
-                    <a:p>
-                      <a:pPr algn="r" indent="0" marL="0">
-                        <a:buNone/>
-                      </a:pPr>
-                      <a:r>
-                        <a:rPr lang="en-US" sz="1400" dirty="0">
-                          <a:solidFill>
-                            <a:schemeClr val="tx1"/>
-                          </a:solidFill>
-                        </a:rPr>
-                        <a:t>0.45</a:t>
-                      </a:r>
-                      <a:endParaRPr lang="en-US" sz="1400" dirty="0"/>
-                    </a:p>
-                  </a:txBody>
-                  <a:tcPr marL="76200" marR="76200" marT="38100" marB="38100" anchor="ctr">
-                    <a:lnL w="9525" cap="flat" cmpd="sng" algn="ctr">
-                      <a:solidFill>
-                        <a:srgbClr val="D5D9E0"/>
-                      </a:solidFill>
-                      <a:prstDash val="solid"/>
-                      <a:round/>
-                      <a:headEnd type="none" w="med" len="med"/>
-                      <a:tailEnd type="none" w="med" len="med"/>
-                    </a:lnL>
-                    <a:lnR w="9525" cap="flat" cmpd="sng" algn="ctr">
-                      <a:solidFill>
-                        <a:srgbClr val="D5D9E0"/>
-                      </a:solidFill>
-                      <a:prstDash val="solid"/>
-                      <a:round/>
-                      <a:headEnd type="none" w="med" len="med"/>
-                      <a:tailEnd type="none" w="med" len="med"/>
-                    </a:lnR>
-                    <a:lnT w="9525" cap="flat" cmpd="sng" algn="ctr">
-                      <a:solidFill>
-                        <a:srgbClr val="D5D9E0"/>
-                      </a:solidFill>
-                      <a:prstDash val="solid"/>
-                      <a:round/>
-                      <a:headEnd type="none" w="med" len="med"/>
-                      <a:tailEnd type="none" w="med" len="med"/>
-                    </a:lnT>
-                    <a:lnB w="9525" cap="flat" cmpd="sng" algn="ctr">
-                      <a:solidFill>
-                        <a:srgbClr val="D5D9E0"/>
-                      </a:solidFill>
-                      <a:prstDash val="solid"/>
-                      <a:round/>
-                      <a:headEnd type="none" w="med" len="med"/>
-                      <a:tailEnd type="none" w="med" len="med"/>
-                    </a:lnB>
-                  </a:tcPr>
-                </a:tc>
-              </a:tr>
-              <a:tr h="365760">
-                <a:tc>
-                  <a:txBody>
-                    <a:bodyPr/>
-                    <a:lstStyle/>
-                    <a:p>
-                      <a:pPr indent="0" marL="0">
-                        <a:buNone/>
-                      </a:pPr>
-                      <a:r>
-                        <a:rPr lang="en-US" sz="1400" dirty="0">
-                          <a:solidFill>
-                            <a:schemeClr val="tx1"/>
-                          </a:solidFill>
-                        </a:rPr>
-                        <a:t>20 ms</a:t>
-                      </a:r>
-                      <a:endParaRPr lang="en-US" sz="1400" dirty="0"/>
-                    </a:p>
-                  </a:txBody>
-                  <a:tcPr marL="76200" marR="76200" marT="38100" marB="38100" anchor="ctr">
-                    <a:lnL w="9525" cap="flat" cmpd="sng" algn="ctr">
-                      <a:solidFill>
-                        <a:srgbClr val="D5D9E0"/>
-                      </a:solidFill>
-                      <a:prstDash val="solid"/>
-                      <a:round/>
-                      <a:headEnd type="none" w="med" len="med"/>
-                      <a:tailEnd type="none" w="med" len="med"/>
-                    </a:lnL>
-                    <a:lnR w="9525" cap="flat" cmpd="sng" algn="ctr">
-                      <a:solidFill>
-                        <a:srgbClr val="D5D9E0"/>
-                      </a:solidFill>
-                      <a:prstDash val="solid"/>
-                      <a:round/>
-                      <a:headEnd type="none" w="med" len="med"/>
-                      <a:tailEnd type="none" w="med" len="med"/>
-                    </a:lnR>
-                    <a:lnT w="9525" cap="flat" cmpd="sng" algn="ctr">
-                      <a:solidFill>
-                        <a:srgbClr val="D5D9E0"/>
-                      </a:solidFill>
-                      <a:prstDash val="solid"/>
-                      <a:round/>
-                      <a:headEnd type="none" w="med" len="med"/>
-                      <a:tailEnd type="none" w="med" len="med"/>
-                    </a:lnT>
-                    <a:lnB w="9525" cap="flat" cmpd="sng" algn="ctr">
-                      <a:solidFill>
-                        <a:srgbClr val="D5D9E0"/>
-                      </a:solidFill>
-                      <a:prstDash val="solid"/>
-                      <a:round/>
-                      <a:headEnd type="none" w="med" len="med"/>
-                      <a:tailEnd type="none" w="med" len="med"/>
-                    </a:lnB>
-                  </a:tcPr>
-                </a:tc>
-                <a:tc>
-                  <a:txBody>
-                    <a:bodyPr/>
-                    <a:lstStyle/>
-                    <a:p>
-                      <a:pPr algn="r" indent="0" marL="0">
-                        <a:buNone/>
-                      </a:pPr>
-                      <a:r>
-                        <a:rPr lang="en-US" sz="1400" dirty="0">
-                          <a:solidFill>
-                            <a:schemeClr val="tx1"/>
-                          </a:solidFill>
-                        </a:rPr>
-                        <a:t>0.42</a:t>
-                      </a:r>
-                      <a:endParaRPr lang="en-US" sz="1400" dirty="0"/>
-                    </a:p>
-                  </a:txBody>
-                  <a:tcPr marL="76200" marR="76200" marT="38100" marB="38100" anchor="ctr">
-                    <a:lnL w="9525" cap="flat" cmpd="sng" algn="ctr">
-                      <a:solidFill>
-                        <a:srgbClr val="D5D9E0"/>
-                      </a:solidFill>
-                      <a:prstDash val="solid"/>
-                      <a:round/>
-                      <a:headEnd type="none" w="med" len="med"/>
-                      <a:tailEnd type="none" w="med" len="med"/>
-                    </a:lnL>
-                    <a:lnR w="9525" cap="flat" cmpd="sng" algn="ctr">
-                      <a:solidFill>
-                        <a:srgbClr val="D5D9E0"/>
-                      </a:solidFill>
-                      <a:prstDash val="solid"/>
-                      <a:round/>
-                      <a:headEnd type="none" w="med" len="med"/>
-                      <a:tailEnd type="none" w="med" len="med"/>
-                    </a:lnR>
-                    <a:lnT w="9525" cap="flat" cmpd="sng" algn="ctr">
-                      <a:solidFill>
-                        <a:srgbClr val="D5D9E0"/>
-                      </a:solidFill>
-                      <a:prstDash val="solid"/>
-                      <a:round/>
-                      <a:headEnd type="none" w="med" len="med"/>
-                      <a:tailEnd type="none" w="med" len="med"/>
-                    </a:lnT>
-                    <a:lnB w="9525" cap="flat" cmpd="sng" algn="ctr">
-                      <a:solidFill>
-                        <a:srgbClr val="D5D9E0"/>
-                      </a:solidFill>
-                      <a:prstDash val="solid"/>
-                      <a:round/>
-                      <a:headEnd type="none" w="med" len="med"/>
-                      <a:tailEnd type="none" w="med" len="med"/>
-                    </a:lnB>
-                  </a:tcPr>
-                </a:tc>
-                <a:tc>
-                  <a:txBody>
-                    <a:bodyPr/>
-                    <a:lstStyle/>
-                    <a:p>
-                      <a:pPr algn="r" indent="0" marL="0">
-                        <a:buNone/>
-                      </a:pPr>
-                      <a:r>
-                        <a:rPr lang="en-US" sz="1400" dirty="0">
-                          <a:solidFill>
-                            <a:schemeClr val="tx1"/>
-                          </a:solidFill>
-                        </a:rPr>
-                        <a:t>0.28</a:t>
-                      </a:r>
-                      <a:endParaRPr lang="en-US" sz="1400" dirty="0"/>
-                    </a:p>
-                  </a:txBody>
-                  <a:tcPr marL="76200" marR="76200" marT="38100" marB="38100" anchor="ctr">
-                    <a:lnL w="9525" cap="flat" cmpd="sng" algn="ctr">
-                      <a:solidFill>
-                        <a:srgbClr val="D5D9E0"/>
-                      </a:solidFill>
-                      <a:prstDash val="solid"/>
-                      <a:round/>
-                      <a:headEnd type="none" w="med" len="med"/>
-                      <a:tailEnd type="none" w="med" len="med"/>
-                    </a:lnL>
-                    <a:lnR w="9525" cap="flat" cmpd="sng" algn="ctr">
-                      <a:solidFill>
-                        <a:srgbClr val="D5D9E0"/>
-                      </a:solidFill>
-                      <a:prstDash val="solid"/>
-                      <a:round/>
-                      <a:headEnd type="none" w="med" len="med"/>
-                      <a:tailEnd type="none" w="med" len="med"/>
-                    </a:lnR>
-                    <a:lnT w="9525" cap="flat" cmpd="sng" algn="ctr">
-                      <a:solidFill>
-                        <a:srgbClr val="D5D9E0"/>
-                      </a:solidFill>
-                      <a:prstDash val="solid"/>
-                      <a:round/>
-                      <a:headEnd type="none" w="med" len="med"/>
-                      <a:tailEnd type="none" w="med" len="med"/>
-                    </a:lnT>
-                    <a:lnB w="9525" cap="flat" cmpd="sng" algn="ctr">
-                      <a:solidFill>
-                        <a:srgbClr val="D5D9E0"/>
-                      </a:solidFill>
-                      <a:prstDash val="solid"/>
-                      <a:round/>
-                      <a:headEnd type="none" w="med" len="med"/>
-                      <a:tailEnd type="none" w="med" len="med"/>
-                    </a:lnB>
-                  </a:tcPr>
-                </a:tc>
-              </a:tr>
-              <a:tr h="365760">
-                <a:tc>
-                  <a:txBody>
-                    <a:bodyPr/>
-                    <a:lstStyle/>
-                    <a:p>
-                      <a:pPr indent="0" marL="0">
-                        <a:buNone/>
-                      </a:pPr>
-                      <a:r>
-                        <a:rPr lang="en-US" sz="1400" dirty="0">
-                          <a:solidFill>
-                            <a:schemeClr val="tx1"/>
-                          </a:solidFill>
-                        </a:rPr>
-                        <a:t>30 ms</a:t>
-                      </a:r>
-                      <a:endParaRPr lang="en-US" sz="1400" dirty="0"/>
-                    </a:p>
-                  </a:txBody>
-                  <a:tcPr marL="76200" marR="76200" marT="38100" marB="38100" anchor="ctr">
-                    <a:lnL w="9525" cap="flat" cmpd="sng" algn="ctr">
-                      <a:solidFill>
-                        <a:srgbClr val="D5D9E0"/>
-                      </a:solidFill>
-                      <a:prstDash val="solid"/>
-                      <a:round/>
-                      <a:headEnd type="none" w="med" len="med"/>
-                      <a:tailEnd type="none" w="med" len="med"/>
-                    </a:lnL>
-                    <a:lnR w="9525" cap="flat" cmpd="sng" algn="ctr">
-                      <a:solidFill>
-                        <a:srgbClr val="D5D9E0"/>
-                      </a:solidFill>
-                      <a:prstDash val="solid"/>
-                      <a:round/>
-                      <a:headEnd type="none" w="med" len="med"/>
-                      <a:tailEnd type="none" w="med" len="med"/>
-                    </a:lnR>
-                    <a:lnT w="9525" cap="flat" cmpd="sng" algn="ctr">
-                      <a:solidFill>
-                        <a:srgbClr val="D5D9E0"/>
-                      </a:solidFill>
-                      <a:prstDash val="solid"/>
-                      <a:round/>
-                      <a:headEnd type="none" w="med" len="med"/>
-                      <a:tailEnd type="none" w="med" len="med"/>
-                    </a:lnT>
-                    <a:lnB w="9525" cap="flat" cmpd="sng" algn="ctr">
-                      <a:solidFill>
-                        <a:srgbClr val="D5D9E0"/>
-                      </a:solidFill>
-                      <a:prstDash val="solid"/>
-                      <a:round/>
-                      <a:headEnd type="none" w="med" len="med"/>
-                      <a:tailEnd type="none" w="med" len="med"/>
-                    </a:lnB>
-                    <a:solidFill>
-                      <a:schemeClr val="accent5"/>
-                    </a:solidFill>
-                  </a:tcPr>
-                </a:tc>
-                <a:tc>
-                  <a:txBody>
-                    <a:bodyPr/>
-                    <a:lstStyle/>
-                    <a:p>
-                      <a:pPr algn="r" indent="0" marL="0">
-                        <a:buNone/>
-                      </a:pPr>
-                      <a:r>
-                        <a:rPr lang="en-US" sz="1400" b="1" dirty="0">
-                          <a:solidFill>
-                            <a:schemeClr val="tx1"/>
-                          </a:solidFill>
-                        </a:rPr>
-                        <a:t>0.17</a:t>
-                      </a:r>
-                      <a:endParaRPr lang="en-US" sz="1400" dirty="0"/>
-                    </a:p>
-                  </a:txBody>
-                  <a:tcPr marL="76200" marR="76200" marT="38100" marB="38100" anchor="ctr">
-                    <a:lnL w="9525" cap="flat" cmpd="sng" algn="ctr">
-                      <a:solidFill>
-                        <a:srgbClr val="D5D9E0"/>
-                      </a:solidFill>
-                      <a:prstDash val="solid"/>
-                      <a:round/>
-                      <a:headEnd type="none" w="med" len="med"/>
-                      <a:tailEnd type="none" w="med" len="med"/>
-                    </a:lnL>
-                    <a:lnR w="9525" cap="flat" cmpd="sng" algn="ctr">
-                      <a:solidFill>
-                        <a:srgbClr val="D5D9E0"/>
-                      </a:solidFill>
-                      <a:prstDash val="solid"/>
-                      <a:round/>
-                      <a:headEnd type="none" w="med" len="med"/>
-                      <a:tailEnd type="none" w="med" len="med"/>
-                    </a:lnR>
-                    <a:lnT w="9525" cap="flat" cmpd="sng" algn="ctr">
-                      <a:solidFill>
-                        <a:srgbClr val="D5D9E0"/>
-                      </a:solidFill>
-                      <a:prstDash val="solid"/>
-                      <a:round/>
-                      <a:headEnd type="none" w="med" len="med"/>
-                      <a:tailEnd type="none" w="med" len="med"/>
-                    </a:lnT>
-                    <a:lnB w="9525" cap="flat" cmpd="sng" algn="ctr">
-                      <a:solidFill>
-                        <a:srgbClr val="D5D9E0"/>
-                      </a:solidFill>
-                      <a:prstDash val="solid"/>
-                      <a:round/>
-                      <a:headEnd type="none" w="med" len="med"/>
-                      <a:tailEnd type="none" w="med" len="med"/>
-                    </a:lnB>
-                    <a:solidFill>
-                      <a:schemeClr val="accent5"/>
-                    </a:solidFill>
-                  </a:tcPr>
-                </a:tc>
-                <a:tc>
-                  <a:txBody>
-                    <a:bodyPr/>
-                    <a:lstStyle/>
-                    <a:p>
-                      <a:pPr algn="r" indent="0" marL="0">
-                        <a:buNone/>
-                      </a:pPr>
-                      <a:r>
-                        <a:rPr lang="en-US" sz="1400" b="1" dirty="0">
-                          <a:solidFill>
-                            <a:schemeClr val="tx1"/>
-                          </a:solidFill>
-                        </a:rPr>
-                        <a:t>0.07</a:t>
-                      </a:r>
-                      <a:endParaRPr lang="en-US" sz="1400" dirty="0"/>
-                    </a:p>
-                  </a:txBody>
-                  <a:tcPr marL="76200" marR="76200" marT="38100" marB="38100" anchor="ctr">
-                    <a:lnL w="9525" cap="flat" cmpd="sng" algn="ctr">
-                      <a:solidFill>
-                        <a:srgbClr val="D5D9E0"/>
-                      </a:solidFill>
-                      <a:prstDash val="solid"/>
-                      <a:round/>
-                      <a:headEnd type="none" w="med" len="med"/>
-                      <a:tailEnd type="none" w="med" len="med"/>
-                    </a:lnL>
-                    <a:lnR w="9525" cap="flat" cmpd="sng" algn="ctr">
-                      <a:solidFill>
-                        <a:srgbClr val="D5D9E0"/>
-                      </a:solidFill>
-                      <a:prstDash val="solid"/>
-                      <a:round/>
-                      <a:headEnd type="none" w="med" len="med"/>
-                      <a:tailEnd type="none" w="med" len="med"/>
-                    </a:lnR>
-                    <a:lnT w="9525" cap="flat" cmpd="sng" algn="ctr">
-                      <a:solidFill>
-                        <a:srgbClr val="D5D9E0"/>
-                      </a:solidFill>
-                      <a:prstDash val="solid"/>
-                      <a:round/>
-                      <a:headEnd type="none" w="med" len="med"/>
-                      <a:tailEnd type="none" w="med" len="med"/>
-                    </a:lnT>
-                    <a:lnB w="9525" cap="flat" cmpd="sng" algn="ctr">
-                      <a:solidFill>
-                        <a:srgbClr val="D5D9E0"/>
-                      </a:solidFill>
-                      <a:prstDash val="solid"/>
-                      <a:round/>
-                      <a:headEnd type="none" w="med" len="med"/>
-                      <a:tailEnd type="none" w="med" len="med"/>
-                    </a:lnB>
-                    <a:solidFill>
-                      <a:schemeClr val="accent5"/>
-                    </a:solidFill>
-                  </a:tcPr>
-                </a:tc>
-              </a:tr>
-            </a:tbl>
-          </a:graphicData>
-        </a:graphic>
-      </p:graphicFrame>
-      <p:sp>
-        <p:nvSpPr>
-          <p:cNvPr id="8" name="thrust note"/>
-          <p:cNvSpPr txBox="1"/>
-          <p:nvPr/>
-        </p:nvSpPr>
-        <p:spPr>
-          <a:xfrm>
-            <a:off x="8412480" y="4297680"/>
-            <a:ext cx="3200400" cy="640080"/>
-          </a:xfrm>
-          <a:prstGeom prst="rect">
-            <a:avLst/>
-          </a:prstGeom>
-          <a:noFill/>
-          <a:ln/>
-        </p:spPr>
-        <p:txBody>
-          <a:bodyPr wrap="square" lIns="0" tIns="0" rIns="0" bIns="0" rtlCol="0" anchor="t"/>
-          <a:lstStyle/>
-          <a:p>
-            <a:pPr indent="0" marL="0">
-              <a:buNone/>
-            </a:pPr>
-            <a:r>
-              <a:rPr lang="en-US" sz="1300" dirty="0">
-                <a:solidFill>
-                  <a:schemeClr val="accent6"/>
-                </a:solidFill>
-              </a:rPr>
-              <a:t>2.95 N: flight spin-up thrust (Fig. 4 of the paper); 2.45 N = mg/2.</a:t>
-            </a:r>
-            <a:endParaRPr lang="en-US" sz="1300" dirty="0"/>
-          </a:p>
-        </p:txBody>
-      </p:sp>
-      <p:sp>
-        <p:nvSpPr>
-          <p:cNvPr id="9" name="delay note"/>
-          <p:cNvSpPr txBox="1"/>
-          <p:nvPr/>
-        </p:nvSpPr>
-        <p:spPr>
-          <a:xfrm>
-            <a:off x="548640" y="5074920"/>
-            <a:ext cx="11064240" cy="1097280"/>
-          </a:xfrm>
-          <a:prstGeom prst="rect">
-            <a:avLst/>
-          </a:prstGeom>
-          <a:noFill/>
-          <a:ln/>
-        </p:spPr>
-        <p:txBody>
-          <a:bodyPr wrap="square" lIns="0" tIns="0" rIns="0" bIns="0" rtlCol="0" anchor="t"/>
-          <a:lstStyle/>
-          <a:p>
-            <a:pPr indent="0" marL="0">
-              <a:buNone/>
-            </a:pPr>
-            <a:r>
-              <a:rPr lang="en-US" sz="1500" dirty="0">
-                <a:solidFill>
-                  <a:schemeClr val="tx1"/>
-                </a:solidFill>
-              </a:rPr>
-              <a:t>Safe = attitude recovered, altitude loss under 2 m, never upside down (fixed before the runs). With no delay the vehicle climbs 0.40 m and loses only 0.03 m, like the flight. P(safe) falls below 0.5 at 19 ms (14 ms at mg/2); for attitude capture alone, at 52 ms. Fast detectors need 30–130 ms.</a:t>
-            </a:r>
-            <a:endParaRPr lang="en-US" sz="1500" dirty="0"/>
-          </a:p>
-        </p:txBody>
-      </p:sp>
-      <p:sp>
-        <p:nvSpPr>
-          <p:cNvPr id="25" name="Slide Number Placeholder 0"/>
-          <p:cNvSpPr>
-            <a:spLocks noGrp="1"/>
-          </p:cNvSpPr>
-          <p:nvPr>
-            <p:ph type="sldNum" sz="quarter" idx="4294967295"/>
-          </p:nvPr>
-        </p:nvSpPr>
-        <p:spPr>
-          <a:xfrm>
-            <a:off x="11064240" y="6400800"/>
-            <a:ext cx="548640" cy="274320"/>
-          </a:xfrm>
-          <a:prstGeom prst="rect">
-            <a:avLst/>
-          </a:prstGeom>
-          <a:extLst>
-            <a:ext uri="{C572A759-6A51-4108-AA02-DFA0A04FC94B}">
-              <ma14:wrappingTextBoxFlag xmlns:ma14="http://schemas.microsoft.com/office/mac/drawingml/2011/main" val="0"/>
-            </a:ext>
-          </a:extLst>
-        </p:spPr>
-        <p:txBody>
-          <a:bodyPr/>
-          <a:lstStyle>
-            <a:lvl1pPr>
-              <a:defRPr sz="1000">
-                <a:solidFill>
-                  <a:schemeClr val="accent6"/>
-                </a:solidFill>
-              </a:defRPr>
-            </a:lvl1pPr>
-          </a:lstStyle>
-          <a:p>
-            <a:pPr algn="r"/>
-            <a:fld id="{F7021451-1387-4CA6-816F-3879F97B5CBC}" type="slidenum">
-              <a:rPr b="0" lang="en-US"/>
-              <a:t>16</a:t>
-            </a:fld>
-            <a:endParaRPr lang="en-US"/>
-          </a:p>
-        </p:txBody>
-      </p:sp>
-    </p:spTree>
-  </p:cSld>
-  <p:clrMapOvr>
-    <a:masterClrMapping/>
-  </p:clrMapOvr>
-</p:sld>
-</file>
-
-<file path=ppt/slides/slide17.xml><?xml version="1.0" encoding="utf-8"?>
-<p:sld xmlns:a="http://schemas.openxmlformats.org/drawingml/2006/main" xmlns:r="http://schemas.openxmlformats.org/officeDocument/2006/relationships" xmlns:p="http://schemas.openxmlformats.org/presentationml/2006/main">
-  <p:cSld name="Slide 17">
-    <p:spTree>
-      <p:nvGrpSpPr>
-        <p:cNvPr id="1" name=""/>
-        <p:cNvGrpSpPr/>
-        <p:nvPr/>
-      </p:nvGrpSpPr>
-      <p:grpSpPr>
-        <a:xfrm>
-          <a:off x="0" y="0"/>
-          <a:ext cx="0" cy="0"/>
-          <a:chOff x="0" y="0"/>
-          <a:chExt cx="0" cy="0"/>
-        </a:xfrm>
-      </p:grpSpPr>
-      <p:sp>
-        <p:nvSpPr>
-          <p:cNvPr id="2" name="Text 0"/>
-          <p:cNvSpPr/>
-          <p:nvPr>
-            <p:ph idx="100" type="body" hasCustomPrompt="1"/>
-          </p:nvPr>
-        </p:nvSpPr>
-        <p:spPr>
-          <a:xfrm>
-            <a:off x="548640" y="292608"/>
-            <a:ext cx="8229600" cy="329184"/>
-          </a:xfrm>
-          <a:prstGeom prst="rect">
-            <a:avLst/>
-          </a:prstGeom>
-          <a:noFill/>
-          <a:ln/>
-        </p:spPr>
-        <p:txBody>
-          <a:bodyPr wrap="square" lIns="0" tIns="0" rIns="0" bIns="0" rtlCol="0"/>
-          <a:lstStyle/>
-          <a:p>
-            <a:pPr indent="0" marL="0">
-              <a:buNone/>
-            </a:pPr>
-            <a:r>
-              <a:rPr lang="en-US" sz="1200" b="1" spc="100" kern="0" dirty="0">
-                <a:solidFill>
-                  <a:schemeClr val="accent2"/>
-                </a:solidFill>
-              </a:rPr>
-              <a:t>FIRST CERTIFICATE</a:t>
-            </a:r>
-            <a:endParaRPr lang="en-US" sz="1200" dirty="0"/>
-          </a:p>
-        </p:txBody>
-      </p:sp>
-      <p:sp>
-        <p:nvSpPr>
-          <p:cNvPr id="3" name="Text 0"/>
-          <p:cNvSpPr/>
-          <p:nvPr>
-            <p:ph idx="101" type="title" hasCustomPrompt="1"/>
-          </p:nvPr>
-        </p:nvSpPr>
-        <p:spPr>
-          <a:xfrm>
-            <a:off x="548640" y="603504"/>
-            <a:ext cx="11064240" cy="713232"/>
-          </a:xfrm>
-          <a:prstGeom prst="rect">
-            <a:avLst/>
-          </a:prstGeom>
-          <a:noFill/>
-          <a:ln/>
-        </p:spPr>
-        <p:txBody>
-          <a:bodyPr wrap="square" lIns="0" tIns="0" rIns="0" bIns="0" rtlCol="0" anchor="t"/>
-          <a:lstStyle/>
-          <a:p>
-            <a:pPr algn="l" indent="0" marL="0">
-              <a:buNone/>
-            </a:pPr>
-            <a:r>
-              <a:rPr lang="en-US" sz="3000" b="1" dirty="0">
-                <a:solidFill>
-                  <a:schemeClr val="tx2"/>
-                </a:solidFill>
-              </a:rPr>
-              <a:t>A first LMI certificate, and its limit</a:t>
-            </a:r>
-            <a:endParaRPr lang="en-US" sz="3000" dirty="0"/>
-          </a:p>
-        </p:txBody>
-      </p:sp>
-      <p:pic>
-        <p:nvPicPr>
-          <p:cNvPr id="5" name="e5_certificate_slice.png" descr="Certified ellipse slice versus nonlinear simulation grid">    </p:cNvPr>
-          <p:cNvPicPr>
-            <a:picLocks noChangeAspect="1"/>
-          </p:cNvPicPr>
-          <p:nvPr/>
-        </p:nvPicPr>
-        <p:blipFill>
-          <a:blip r:embed="rId1"/>
-          <a:stretch>
-            <a:fillRect/>
-          </a:stretch>
-        </p:blipFill>
-        <p:spPr>
-          <a:xfrm>
-            <a:off x="548640" y="1463040"/>
-            <a:ext cx="6217920" cy="3952068"/>
-          </a:xfrm>
-          <a:prstGeom prst="rect">
-            <a:avLst/>
-          </a:prstGeom>
-        </p:spPr>
-      </p:pic>
-      <p:sp>
-        <p:nvSpPr>
-          <p:cNvPr id="6" name="certificate intro"/>
-          <p:cNvSpPr txBox="1"/>
-          <p:nvPr/>
-        </p:nvSpPr>
-        <p:spPr>
-          <a:xfrm>
-            <a:off x="7132320" y="1554480"/>
-            <a:ext cx="4480560" cy="914400"/>
-          </a:xfrm>
-          <a:prstGeom prst="rect">
-            <a:avLst/>
-          </a:prstGeom>
-          <a:noFill/>
-          <a:ln/>
-        </p:spPr>
-        <p:txBody>
-          <a:bodyPr wrap="square" lIns="0" tIns="0" rIns="0" bIns="0" rtlCol="0" anchor="t"/>
-          <a:lstStyle/>
-          <a:p>
-            <a:pPr indent="0" marL="0">
-              <a:buNone/>
-            </a:pPr>
-            <a:r>
-              <a:rPr lang="en-US" sz="1500" dirty="0">
-                <a:solidFill>
-                  <a:schemeClr val="tx1"/>
-                </a:solidFill>
-              </a:rPr>
-              <a:t>Saturation-aware invariant ellipsoid (Hu–Lin LMIs) for the LQR on the linear model at the spinning equilibrium.</a:t>
-            </a:r>
-            <a:endParaRPr lang="en-US" sz="1500" dirty="0"/>
-          </a:p>
-        </p:txBody>
-      </p:sp>
-      <p:sp>
-        <p:nvSpPr>
-          <p:cNvPr id="7" name="stat 22%"/>
-          <p:cNvSpPr txBox="1"/>
-          <p:nvPr/>
-        </p:nvSpPr>
-        <p:spPr>
-          <a:xfrm>
-            <a:off x="7132320" y="2606040"/>
-            <a:ext cx="2148840" cy="1005840"/>
-          </a:xfrm>
-          <a:prstGeom prst="rect">
-            <a:avLst/>
-          </a:prstGeom>
-          <a:noFill/>
-          <a:ln/>
-        </p:spPr>
-        <p:txBody>
-          <a:bodyPr wrap="square" lIns="0" tIns="0" rIns="0" bIns="0" rtlCol="0" anchor="t"/>
-          <a:lstStyle/>
-          <a:p>
-            <a:pPr indent="0" marL="0">
-              <a:buNone/>
-            </a:pPr>
-            <a:r>
-              <a:rPr lang="en-US" sz="3600" b="1" dirty="0">
-                <a:solidFill>
-                  <a:schemeClr val="tx2"/>
-                </a:solidFill>
-              </a:rPr>
-              <a:t>22%</a:t>
-            </a:r>
-            <a:endParaRPr lang="en-US" sz="1600" dirty="0"/>
-          </a:p>
-          <a:p>
-            <a:pPr indent="0" marL="0">
-              <a:buNone/>
-            </a:pPr>
-            <a:r>
-              <a:rPr lang="en-US" sz="1300" dirty="0">
-                <a:solidFill>
-                  <a:schemeClr val="accent6"/>
-                </a:solidFill>
-              </a:rPr>
-              <a:t>of the way to hover onset, certified</a:t>
-            </a:r>
-            <a:endParaRPr lang="en-US" sz="1600" dirty="0"/>
-          </a:p>
-        </p:txBody>
-      </p:sp>
-      <p:sp>
-        <p:nvSpPr>
-          <p:cNvPr id="8" name="stat 70%"/>
-          <p:cNvSpPr txBox="1"/>
-          <p:nvPr/>
-        </p:nvSpPr>
-        <p:spPr>
-          <a:xfrm>
-            <a:off x="9464040" y="2606040"/>
-            <a:ext cx="2148840" cy="1005840"/>
-          </a:xfrm>
-          <a:prstGeom prst="rect">
-            <a:avLst/>
-          </a:prstGeom>
-          <a:noFill/>
-          <a:ln/>
-        </p:spPr>
-        <p:txBody>
-          <a:bodyPr wrap="square" lIns="0" tIns="0" rIns="0" bIns="0" rtlCol="0" anchor="t"/>
-          <a:lstStyle/>
-          <a:p>
-            <a:pPr indent="0" marL="0">
-              <a:buNone/>
-            </a:pPr>
-            <a:r>
-              <a:rPr lang="en-US" sz="3600" b="1" dirty="0">
-                <a:solidFill>
-                  <a:schemeClr val="accent2"/>
-                </a:solidFill>
-              </a:rPr>
-              <a:t>70%</a:t>
-            </a:r>
-            <a:endParaRPr lang="en-US" sz="1600" dirty="0"/>
-          </a:p>
-          <a:p>
-            <a:pPr indent="0" marL="0">
-              <a:buNone/>
-            </a:pPr>
-            <a:r>
-              <a:rPr lang="en-US" sz="1300" dirty="0">
-                <a:solidFill>
-                  <a:schemeClr val="accent6"/>
-                </a:solidFill>
-              </a:rPr>
-              <a:t>recovers in simulation</a:t>
-            </a:r>
-            <a:endParaRPr lang="en-US" sz="1600" dirty="0"/>
-          </a:p>
-        </p:txBody>
-      </p:sp>
-      <p:sp>
-        <p:nvSpPr>
-          <p:cNvPr id="9" name="certificate note"/>
-          <p:cNvSpPr txBox="1"/>
-          <p:nvPr/>
-        </p:nvSpPr>
-        <p:spPr>
-          <a:xfrm>
-            <a:off x="7132320" y="3886200"/>
-            <a:ext cx="4480560" cy="1737360"/>
-          </a:xfrm>
-          <a:prstGeom prst="rect">
-            <a:avLst/>
-          </a:prstGeom>
-          <a:noFill/>
-          <a:ln/>
-        </p:spPr>
-        <p:txBody>
-          <a:bodyPr wrap="square" lIns="0" tIns="0" rIns="0" bIns="0" rtlCol="0" anchor="t"/>
-          <a:lstStyle/>
-          <a:p>
-            <a:pPr indent="0" marL="0">
-              <a:buNone/>
-            </a:pPr>
-            <a:r>
-              <a:rPr lang="en-US" sz="1500" dirty="0">
-                <a:solidFill>
-                  <a:schemeClr val="tx1"/>
-                </a:solidFill>
-              </a:rPr>
-              <a:t>The LQR fails only at spin rates of 4.8 rad/s or less, which is where the hover-onset state lies. Next: a certificate valid over the whole spin-up, treating the yaw rate r as a varying parameter (LPV).</a:t>
-            </a:r>
-            <a:endParaRPr lang="en-US" sz="1500" dirty="0"/>
-          </a:p>
-        </p:txBody>
-      </p:sp>
-      <p:sp>
-        <p:nvSpPr>
-          <p:cNvPr id="25" name="Slide Number Placeholder 0"/>
-          <p:cNvSpPr>
-            <a:spLocks noGrp="1"/>
-          </p:cNvSpPr>
-          <p:nvPr>
-            <p:ph type="sldNum" sz="quarter" idx="4294967295"/>
-          </p:nvPr>
-        </p:nvSpPr>
-        <p:spPr>
-          <a:xfrm>
-            <a:off x="11064240" y="6400800"/>
-            <a:ext cx="548640" cy="274320"/>
-          </a:xfrm>
-          <a:prstGeom prst="rect">
-            <a:avLst/>
-          </a:prstGeom>
-          <a:extLst>
-            <a:ext uri="{C572A759-6A51-4108-AA02-DFA0A04FC94B}">
-              <ma14:wrappingTextBoxFlag xmlns:ma14="http://schemas.microsoft.com/office/mac/drawingml/2011/main" val="0"/>
-            </a:ext>
-          </a:extLst>
-        </p:spPr>
-        <p:txBody>
-          <a:bodyPr/>
-          <a:lstStyle>
-            <a:lvl1pPr>
-              <a:defRPr sz="1000">
-                <a:solidFill>
-                  <a:schemeClr val="accent6"/>
-                </a:solidFill>
-              </a:defRPr>
-            </a:lvl1pPr>
-          </a:lstStyle>
-          <a:p>
-            <a:pPr algn="r"/>
-            <a:fld id="{F7021451-1387-4CA6-816F-3879F97B5CBC}" type="slidenum">
-              <a:rPr b="0" lang="en-US"/>
-              <a:t>17</a:t>
-            </a:fld>
-            <a:endParaRPr lang="en-US"/>
-          </a:p>
-        </p:txBody>
-      </p:sp>
-    </p:spTree>
-  </p:cSld>
-  <p:clrMapOvr>
-    <a:masterClrMapping/>
-  </p:clrMapOvr>
-</p:sld>
-</file>
-
-<file path=ppt/slides/slide18.xml><?xml version="1.0" encoding="utf-8"?>
-<p:sld xmlns:a="http://schemas.openxmlformats.org/drawingml/2006/main" xmlns:r="http://schemas.openxmlformats.org/officeDocument/2006/relationships" xmlns:p="http://schemas.openxmlformats.org/presentationml/2006/main">
-  <p:cSld name="Slide 18">
-    <p:spTree>
-      <p:nvGrpSpPr>
-        <p:cNvPr id="1" name=""/>
-        <p:cNvGrpSpPr/>
-        <p:nvPr/>
-      </p:nvGrpSpPr>
-      <p:grpSpPr>
-        <a:xfrm>
-          <a:off x="0" y="0"/>
-          <a:ext cx="0" cy="0"/>
-          <a:chOff x="0" y="0"/>
-          <a:chExt cx="0" cy="0"/>
-        </a:xfrm>
-      </p:grpSpPr>
-      <p:sp>
-        <p:nvSpPr>
-          <p:cNvPr id="2" name="Text 0"/>
-          <p:cNvSpPr/>
-          <p:nvPr>
-            <p:ph idx="100" type="body" hasCustomPrompt="1"/>
-          </p:nvPr>
-        </p:nvSpPr>
-        <p:spPr>
-          <a:xfrm>
-            <a:off x="548640" y="292608"/>
-            <a:ext cx="8229600" cy="329184"/>
-          </a:xfrm>
-          <a:prstGeom prst="rect">
-            <a:avLst/>
-          </a:prstGeom>
-          <a:noFill/>
-          <a:ln/>
-        </p:spPr>
-        <p:txBody>
-          <a:bodyPr wrap="square" lIns="0" tIns="0" rIns="0" bIns="0" rtlCol="0"/>
-          <a:lstStyle/>
-          <a:p>
-            <a:pPr indent="0" marL="0">
-              <a:buNone/>
-            </a:pPr>
-            <a:r>
-              <a:rPr lang="en-US" sz="1200" b="1" spc="100" kern="0" dirty="0">
-                <a:solidFill>
-                  <a:schemeClr val="accent1"/>
-                </a:solidFill>
-              </a:rPr>
-              <a:t>NEXT STEPS</a:t>
-            </a:r>
-            <a:endParaRPr lang="en-US" sz="1200" dirty="0"/>
-          </a:p>
-        </p:txBody>
-      </p:sp>
-      <p:sp>
-        <p:nvSpPr>
-          <p:cNvPr id="3" name="Text 0"/>
-          <p:cNvSpPr/>
-          <p:nvPr>
-            <p:ph idx="101" type="title" hasCustomPrompt="1"/>
-          </p:nvPr>
-        </p:nvSpPr>
-        <p:spPr>
-          <a:xfrm>
-            <a:off x="548640" y="603504"/>
-            <a:ext cx="11064240" cy="713232"/>
-          </a:xfrm>
-          <a:prstGeom prst="rect">
-            <a:avLst/>
-          </a:prstGeom>
-          <a:noFill/>
-          <a:ln/>
-        </p:spPr>
-        <p:txBody>
-          <a:bodyPr wrap="square" lIns="0" tIns="0" rIns="0" bIns="0" rtlCol="0" anchor="t"/>
-          <a:lstStyle/>
-          <a:p>
-            <a:pPr algn="l" indent="0" marL="0">
-              <a:buNone/>
-            </a:pPr>
-            <a:r>
-              <a:rPr lang="en-US" sz="3000" b="1" dirty="0">
-                <a:solidFill>
-                  <a:schemeClr val="tx2"/>
-                </a:solidFill>
-              </a:rPr>
-              <a:t>Plan for the remaining weeks</a:t>
-            </a:r>
-            <a:endParaRPr lang="en-US" sz="3000" dirty="0"/>
-          </a:p>
-        </p:txBody>
-      </p:sp>
-      <p:graphicFrame>
-        <p:nvGraphicFramePr>
-          <p:cNvPr id="19" name="plan table"/>
+          <p:cNvPr id="15" name="plan table"/>
           <p:cNvGraphicFramePr>
             <a:graphicFrameLocks noGrp="1"/>
           </p:cNvGraphicFramePr>
@@ -7325,9 +5021,8 @@
             <a:tbl>
               <a:tblPr/>
               <a:tblGrid>
-                <a:gridCol w="1463040"/>
-                <a:gridCol w="4800600"/>
-                <a:gridCol w="4800600"/>
+                <a:gridCol w="1645920"/>
+                <a:gridCol w="9418320"/>
               </a:tblGrid>
               <a:tr h="566928">
                 <a:tc>
@@ -7405,68 +5100,7 @@
                             <a:schemeClr val="tx1"/>
                           </a:solidFill>
                         </a:rPr>
-                        <a:t>Learning the mismatch</a:t>
-                      </a:r>
-                      <a:endParaRPr lang="en-US" sz="1400" dirty="0"/>
-                    </a:p>
-                  </a:txBody>
-                  <a:tcPr marL="76200" marR="76200" marT="38100" marB="38100" anchor="ctr">
-                    <a:lnL w="9525" cap="flat" cmpd="sng" algn="ctr">
-                      <a:solidFill>
-                        <a:srgbClr val="D5D9E0"/>
-                      </a:solidFill>
-                      <a:prstDash val="solid"/>
-                      <a:round/>
-                      <a:headEnd type="none" w="med" len="med"/>
-                      <a:tailEnd type="none" w="med" len="med"/>
-                    </a:lnL>
-                    <a:lnR w="9525" cap="flat" cmpd="sng" algn="ctr">
-                      <a:solidFill>
-                        <a:srgbClr val="D5D9E0"/>
-                      </a:solidFill>
-                      <a:prstDash val="solid"/>
-                      <a:round/>
-                      <a:headEnd type="none" w="med" len="med"/>
-                      <a:tailEnd type="none" w="med" len="med"/>
-                    </a:lnR>
-                    <a:lnT w="9525" cap="flat" cmpd="sng" algn="ctr">
-                      <a:solidFill>
-                        <a:srgbClr val="D5D9E0"/>
-                      </a:solidFill>
-                      <a:prstDash val="solid"/>
-                      <a:round/>
-                      <a:headEnd type="none" w="med" len="med"/>
-                      <a:tailEnd type="none" w="med" len="med"/>
-                    </a:lnT>
-                    <a:lnB w="9525" cap="flat" cmpd="sng" algn="ctr">
-                      <a:solidFill>
-                        <a:srgbClr val="D5D9E0"/>
-                      </a:solidFill>
-                      <a:prstDash val="solid"/>
-                      <a:round/>
-                      <a:headEnd type="none" w="med" len="med"/>
-                      <a:tailEnd type="none" w="med" len="med"/>
-                    </a:lnB>
-                    <a:solidFill>
-                      <a:schemeClr val="accent4"/>
-                    </a:solidFill>
-                  </a:tcPr>
-                </a:tc>
-                <a:tc>
-                  <a:txBody>
-                    <a:bodyPr/>
-                    <a:lstStyle/>
-                    <a:p>
-                      <a:pPr indent="0" marL="0">
-                        <a:buNone/>
-                      </a:pPr>
-                      <a:r>
-                        <a:rPr lang="en-US" sz="1400" b="1" dirty="0">
-                          <a:solidFill>
-                            <a:schemeClr val="tx1"/>
-                          </a:solidFill>
-                        </a:rPr>
-                        <a:t>Detection-delay budget</a:t>
+                        <a:t>Work</a:t>
                       </a:r>
                       <a:endParaRPr lang="en-US" sz="1400" dirty="0"/>
                     </a:p>
@@ -7587,65 +5221,7 @@
                             <a:schemeClr val="tx1"/>
                           </a:solidFill>
                         </a:rPr>
-                        <a:t>MPC on the full-state Koopman model; integral-action MPC baseline</a:t>
-                      </a:r>
-                      <a:endParaRPr lang="en-US" sz="1400" dirty="0"/>
-                    </a:p>
-                  </a:txBody>
-                  <a:tcPr marL="76200" marR="76200" marT="38100" marB="38100" anchor="ctr">
-                    <a:lnL w="9525" cap="flat" cmpd="sng" algn="ctr">
-                      <a:solidFill>
-                        <a:srgbClr val="D5D9E0"/>
-                      </a:solidFill>
-                      <a:prstDash val="solid"/>
-                      <a:round/>
-                      <a:headEnd type="none" w="med" len="med"/>
-                      <a:tailEnd type="none" w="med" len="med"/>
-                    </a:lnL>
-                    <a:lnR w="9525" cap="flat" cmpd="sng" algn="ctr">
-                      <a:solidFill>
-                        <a:srgbClr val="D5D9E0"/>
-                      </a:solidFill>
-                      <a:prstDash val="solid"/>
-                      <a:round/>
-                      <a:headEnd type="none" w="med" len="med"/>
-                      <a:tailEnd type="none" w="med" len="med"/>
-                    </a:lnR>
-                    <a:lnT w="9525" cap="flat" cmpd="sng" algn="ctr">
-                      <a:solidFill>
-                        <a:srgbClr val="D5D9E0"/>
-                      </a:solidFill>
-                      <a:prstDash val="solid"/>
-                      <a:round/>
-                      <a:headEnd type="none" w="med" len="med"/>
-                      <a:tailEnd type="none" w="med" len="med"/>
-                    </a:lnT>
-                    <a:lnB w="9525" cap="flat" cmpd="sng" algn="ctr">
-                      <a:solidFill>
-                        <a:srgbClr val="D5D9E0"/>
-                      </a:solidFill>
-                      <a:prstDash val="solid"/>
-                      <a:round/>
-                      <a:headEnd type="none" w="med" len="med"/>
-                      <a:tailEnd type="none" w="med" len="med"/>
-                    </a:lnB>
-                  </a:tcPr>
-                </a:tc>
-                <a:tc>
-                  <a:txBody>
-                    <a:bodyPr/>
-                    <a:lstStyle/>
-                    <a:p>
-                      <a:pPr indent="0" marL="0">
-                        <a:buNone/>
-                      </a:pPr>
-                      <a:r>
-                        <a:rPr lang="en-US" sz="1400" dirty="0">
-                          <a:solidFill>
-                            <a:schemeClr val="tx1"/>
-                          </a:solidFill>
-                        </a:rPr>
-                        <a:t>Read the remaining key papers; certificate over the spin-up (LPV in r)</a:t>
+                        <a:t>MPC on the full-state Koopman model (the second controller of the proposal); integral-action (offset-free) MPC baseline</a:t>
                       </a:r>
                       <a:endParaRPr lang="en-US" sz="1400" dirty="0"/>
                     </a:p>
@@ -7763,65 +5339,7 @@
                             <a:schemeClr val="tx1"/>
                           </a:solidFill>
                         </a:rPr>
-                        <a:t>Online residual adaptation (recursive least squares)</a:t>
-                      </a:r>
-                      <a:endParaRPr lang="en-US" sz="1400" dirty="0"/>
-                    </a:p>
-                  </a:txBody>
-                  <a:tcPr marL="76200" marR="76200" marT="38100" marB="38100" anchor="ctr">
-                    <a:lnL w="9525" cap="flat" cmpd="sng" algn="ctr">
-                      <a:solidFill>
-                        <a:srgbClr val="D5D9E0"/>
-                      </a:solidFill>
-                      <a:prstDash val="solid"/>
-                      <a:round/>
-                      <a:headEnd type="none" w="med" len="med"/>
-                      <a:tailEnd type="none" w="med" len="med"/>
-                    </a:lnL>
-                    <a:lnR w="9525" cap="flat" cmpd="sng" algn="ctr">
-                      <a:solidFill>
-                        <a:srgbClr val="D5D9E0"/>
-                      </a:solidFill>
-                      <a:prstDash val="solid"/>
-                      <a:round/>
-                      <a:headEnd type="none" w="med" len="med"/>
-                      <a:tailEnd type="none" w="med" len="med"/>
-                    </a:lnR>
-                    <a:lnT w="9525" cap="flat" cmpd="sng" algn="ctr">
-                      <a:solidFill>
-                        <a:srgbClr val="D5D9E0"/>
-                      </a:solidFill>
-                      <a:prstDash val="solid"/>
-                      <a:round/>
-                      <a:headEnd type="none" w="med" len="med"/>
-                      <a:tailEnd type="none" w="med" len="med"/>
-                    </a:lnT>
-                    <a:lnB w="9525" cap="flat" cmpd="sng" algn="ctr">
-                      <a:solidFill>
-                        <a:srgbClr val="D5D9E0"/>
-                      </a:solidFill>
-                      <a:prstDash val="solid"/>
-                      <a:round/>
-                      <a:headEnd type="none" w="med" len="med"/>
-                      <a:tailEnd type="none" w="med" len="med"/>
-                    </a:lnB>
-                  </a:tcPr>
-                </a:tc>
-                <a:tc>
-                  <a:txBody>
-                    <a:bodyPr/>
-                    <a:lstStyle/>
-                    <a:p>
-                      <a:pPr indent="0" marL="0">
-                        <a:buNone/>
-                      </a:pPr>
-                      <a:r>
-                        <a:rPr lang="en-US" sz="1400" dirty="0">
-                          <a:solidFill>
-                            <a:schemeClr val="tx1"/>
-                          </a:solidFill>
-                        </a:rPr>
-                        <a:t>Reachable set of the undetected phase; first certified delay budget τ*</a:t>
+                        <a:t>Online adaptation of the residual by recursive least squares, to fix generalization</a:t>
                       </a:r>
                       <a:endParaRPr lang="en-US" sz="1400" dirty="0"/>
                     </a:p>
@@ -7939,65 +5457,7 @@
                             <a:schemeClr val="tx1"/>
                           </a:solidFill>
                         </a:rPr>
-                        <a:t>Air-relative thrust in the truth plant</a:t>
-                      </a:r>
-                      <a:endParaRPr lang="en-US" sz="1400" dirty="0"/>
-                    </a:p>
-                  </a:txBody>
-                  <a:tcPr marL="76200" marR="76200" marT="38100" marB="38100" anchor="ctr">
-                    <a:lnL w="9525" cap="flat" cmpd="sng" algn="ctr">
-                      <a:solidFill>
-                        <a:srgbClr val="D5D9E0"/>
-                      </a:solidFill>
-                      <a:prstDash val="solid"/>
-                      <a:round/>
-                      <a:headEnd type="none" w="med" len="med"/>
-                      <a:tailEnd type="none" w="med" len="med"/>
-                    </a:lnL>
-                    <a:lnR w="9525" cap="flat" cmpd="sng" algn="ctr">
-                      <a:solidFill>
-                        <a:srgbClr val="D5D9E0"/>
-                      </a:solidFill>
-                      <a:prstDash val="solid"/>
-                      <a:round/>
-                      <a:headEnd type="none" w="med" len="med"/>
-                      <a:tailEnd type="none" w="med" len="med"/>
-                    </a:lnR>
-                    <a:lnT w="9525" cap="flat" cmpd="sng" algn="ctr">
-                      <a:solidFill>
-                        <a:srgbClr val="D5D9E0"/>
-                      </a:solidFill>
-                      <a:prstDash val="solid"/>
-                      <a:round/>
-                      <a:headEnd type="none" w="med" len="med"/>
-                      <a:tailEnd type="none" w="med" len="med"/>
-                    </a:lnT>
-                    <a:lnB w="9525" cap="flat" cmpd="sng" algn="ctr">
-                      <a:solidFill>
-                        <a:srgbClr val="D5D9E0"/>
-                      </a:solidFill>
-                      <a:prstDash val="solid"/>
-                      <a:round/>
-                      <a:headEnd type="none" w="med" len="med"/>
-                      <a:tailEnd type="none" w="med" len="med"/>
-                    </a:lnB>
-                  </a:tcPr>
-                </a:tc>
-                <a:tc>
-                  <a:txBody>
-                    <a:bodyPr/>
-                    <a:lstStyle/>
-                    <a:p>
-                      <a:pPr indent="0" marL="0">
-                        <a:buNone/>
-                      </a:pPr>
-                      <a:r>
-                        <a:rPr lang="en-US" sz="1400" dirty="0">
-                          <a:solidFill>
-                            <a:schemeClr val="tx1"/>
-                          </a:solidFill>
-                        </a:rPr>
-                        <a:t>Sensitivity of τ* to spin-up thrust, idle thrust and motor lag; presentation 31 Oct</a:t>
+                        <a:t>Air-relative thrust in the truth plant; residual trained on spin-up transients; presentation 31 Oct</a:t>
                       </a:r>
                       <a:endParaRPr lang="en-US" sz="1400" dirty="0"/>
                     </a:p>
@@ -8115,65 +5575,7 @@
                             <a:schemeClr val="tx1"/>
                           </a:solidFill>
                         </a:rPr>
-                        <a:t>Certificate for the residual-Koopman loop if time allows</a:t>
-                      </a:r>
-                      <a:endParaRPr lang="en-US" sz="1400" dirty="0"/>
-                    </a:p>
-                  </a:txBody>
-                  <a:tcPr marL="76200" marR="76200" marT="38100" marB="38100" anchor="ctr">
-                    <a:lnL w="9525" cap="flat" cmpd="sng" algn="ctr">
-                      <a:solidFill>
-                        <a:srgbClr val="D5D9E0"/>
-                      </a:solidFill>
-                      <a:prstDash val="solid"/>
-                      <a:round/>
-                      <a:headEnd type="none" w="med" len="med"/>
-                      <a:tailEnd type="none" w="med" len="med"/>
-                    </a:lnL>
-                    <a:lnR w="9525" cap="flat" cmpd="sng" algn="ctr">
-                      <a:solidFill>
-                        <a:srgbClr val="D5D9E0"/>
-                      </a:solidFill>
-                      <a:prstDash val="solid"/>
-                      <a:round/>
-                      <a:headEnd type="none" w="med" len="med"/>
-                      <a:tailEnd type="none" w="med" len="med"/>
-                    </a:lnR>
-                    <a:lnT w="9525" cap="flat" cmpd="sng" algn="ctr">
-                      <a:solidFill>
-                        <a:srgbClr val="D5D9E0"/>
-                      </a:solidFill>
-                      <a:prstDash val="solid"/>
-                      <a:round/>
-                      <a:headEnd type="none" w="med" len="med"/>
-                      <a:tailEnd type="none" w="med" len="med"/>
-                    </a:lnT>
-                    <a:lnB w="9525" cap="flat" cmpd="sng" algn="ctr">
-                      <a:solidFill>
-                        <a:srgbClr val="D5D9E0"/>
-                      </a:solidFill>
-                      <a:prstDash val="solid"/>
-                      <a:round/>
-                      <a:headEnd type="none" w="med" len="med"/>
-                      <a:tailEnd type="none" w="med" len="med"/>
-                    </a:lnB>
-                  </a:tcPr>
-                </a:tc>
-                <a:tc>
-                  <a:txBody>
-                    <a:bodyPr/>
-                    <a:lstStyle/>
-                    <a:p>
-                      <a:pPr indent="0" marL="0">
-                        <a:buNone/>
-                      </a:pPr>
-                      <a:r>
-                        <a:rPr lang="en-US" sz="1400" dirty="0">
-                          <a:solidFill>
-                            <a:schemeClr val="tx1"/>
-                          </a:solidFill>
-                        </a:rPr>
-                        <a:t>Final simulations; journal-style report due 13 Nov</a:t>
+                        <a:t>Final simulations and the journal-style report, due 13 Nov</a:t>
                       </a:r>
                       <a:endParaRPr lang="en-US" sz="1400" dirty="0"/>
                     </a:p>
@@ -8263,7 +5665,7 @@
                   <a:schemeClr val="tx1"/>
                 </a:solidFill>
               </a:rPr>
-              <a:t>a certificate over the whole spin-up may be infeasible or too conservative. Fallbacks: a parameter-dependent Lyapunov function, or a chain of nested ellipsoids.</a:t>
+              <a:t>online adaptation may need richer data than one flight provides. Fallback: a residual that also uses a short history of states.</a:t>
             </a:r>
             <a:endParaRPr lang="en-US" sz="1600" dirty="0"/>
           </a:p>
@@ -8308,7 +5710,7 @@
             <a:pPr algn="r"/>
             <a:fld id="{F7021451-1387-4CA6-816F-3879F97B5CBC}" type="slidenum">
               <a:rPr b="0" lang="en-US"/>
-              <a:t>18</a:t>
+              <a:t>14</a:t>
             </a:fld>
             <a:endParaRPr lang="en-US"/>
           </a:p>
@@ -8322,9 +5724,9 @@
 </p:sld>
 </file>
 
-<file path=ppt/slides/slide19.xml><?xml version="1.0" encoding="utf-8"?>
+<file path=ppt/slides/slide15.xml><?xml version="1.0" encoding="utf-8"?>
 <p:sld xmlns:a="http://schemas.openxmlformats.org/drawingml/2006/main" xmlns:r="http://schemas.openxmlformats.org/officeDocument/2006/relationships" xmlns:p="http://schemas.openxmlformats.org/presentationml/2006/main">
-  <p:cSld name="Slide 19">
+  <p:cSld name="Slide 15">
     <p:spTree>
       <p:nvGrpSpPr>
         <p:cNvPr id="1" name=""/>
@@ -8553,7 +5955,7 @@
                   <a:schemeClr val="bg1"/>
                 </a:solidFill>
               </a:rPr>
-              <a:t>The residual Koopman model predicts best from 100 ms on, needs less data and cuts the MPC altitude bias by a third, but does not yet generalize to an unseen vehicle.</a:t>
+              <a:t>Learning only the error of the physics model predicts best from 100 ms to 1 s; with 10 training episodes it beats a full Koopman model trained on 40.</a:t>
             </a:r>
             <a:endParaRPr lang="en-US" sz="1900" dirty="0"/>
           </a:p>
@@ -8625,7 +6027,7 @@
                   <a:schemeClr val="bg1"/>
                 </a:solidFill>
               </a:rPr>
-              <a:t>The published recovery is safe with probability above 0.9 only up to about 12 ms of detection delay; detectors need 30–130 ms. Certifying the spin-up is next.</a:t>
+              <a:t>Inside MPC it cuts the altitude bias by a third, but does not yet generalize to an unseen vehicle. Online adaptation is next.</a:t>
             </a:r>
             <a:endParaRPr lang="en-US" sz="1900" dirty="0"/>
           </a:p>
@@ -8664,6 +6066,372 @@
               <a:t>Questions?</a:t>
             </a:r>
             <a:endParaRPr lang="en-US" sz="2000" dirty="0"/>
+          </a:p>
+        </p:txBody>
+      </p:sp>
+    </p:spTree>
+  </p:cSld>
+  <p:clrMapOvr>
+    <a:masterClrMapping/>
+  </p:clrMapOvr>
+</p:sld>
+</file>
+
+<file path=ppt/slides/slide16.xml><?xml version="1.0" encoding="utf-8"?>
+<p:sld xmlns:a="http://schemas.openxmlformats.org/drawingml/2006/main" xmlns:r="http://schemas.openxmlformats.org/officeDocument/2006/relationships" xmlns:p="http://schemas.openxmlformats.org/presentationml/2006/main">
+  <p:cSld name="Slide 16">
+    <p:spTree>
+      <p:nvGrpSpPr>
+        <p:cNvPr id="1" name=""/>
+        <p:cNvGrpSpPr/>
+        <p:nvPr/>
+      </p:nvGrpSpPr>
+      <p:grpSpPr>
+        <a:xfrm>
+          <a:off x="0" y="0"/>
+          <a:ext cx="0" cy="0"/>
+          <a:chOff x="0" y="0"/>
+          <a:chExt cx="0" cy="0"/>
+        </a:xfrm>
+      </p:grpSpPr>
+      <p:sp>
+        <p:nvSpPr>
+          <p:cNvPr id="2" name="Text 0"/>
+          <p:cNvSpPr/>
+          <p:nvPr>
+            <p:ph idx="100" type="body" hasCustomPrompt="1"/>
+          </p:nvPr>
+        </p:nvSpPr>
+        <p:spPr>
+          <a:xfrm>
+            <a:off x="548640" y="292608"/>
+            <a:ext cx="8229600" cy="329184"/>
+          </a:xfrm>
+          <a:prstGeom prst="rect">
+            <a:avLst/>
+          </a:prstGeom>
+          <a:noFill/>
+          <a:ln/>
+        </p:spPr>
+        <p:txBody>
+          <a:bodyPr wrap="square" lIns="0" tIns="0" rIns="0" bIns="0" rtlCol="0"/>
+          <a:lstStyle/>
+          <a:p>
+            <a:pPr indent="0" marL="0">
+              <a:buNone/>
+            </a:pPr>
+            <a:r>
+              <a:rPr lang="en-US" sz="1200" b="1" spc="100" kern="0" dirty="0">
+                <a:solidFill>
+                  <a:schemeClr val="accent1"/>
+                </a:solidFill>
+              </a:rPr>
+              <a:t>BACKUP</a:t>
+            </a:r>
+            <a:endParaRPr lang="en-US" sz="1200" dirty="0"/>
+          </a:p>
+        </p:txBody>
+      </p:sp>
+      <p:sp>
+        <p:nvSpPr>
+          <p:cNvPr id="3" name="Text 0"/>
+          <p:cNvSpPr/>
+          <p:nvPr>
+            <p:ph idx="101" type="title" hasCustomPrompt="1"/>
+          </p:nvPr>
+        </p:nvSpPr>
+        <p:spPr>
+          <a:xfrm>
+            <a:off x="548640" y="603504"/>
+            <a:ext cx="11064240" cy="713232"/>
+          </a:xfrm>
+          <a:prstGeom prst="rect">
+            <a:avLst/>
+          </a:prstGeom>
+          <a:noFill/>
+          <a:ln/>
+        </p:spPr>
+        <p:txBody>
+          <a:bodyPr wrap="square" lIns="0" tIns="0" rIns="0" bIns="0" rtlCol="0" anchor="t"/>
+          <a:lstStyle/>
+          <a:p>
+            <a:pPr algn="l" indent="0" marL="0">
+              <a:buNone/>
+            </a:pPr>
+            <a:r>
+              <a:rPr lang="en-US" sz="3000" b="1" dirty="0">
+                <a:solidFill>
+                  <a:schemeClr val="tx2"/>
+                </a:solidFill>
+              </a:rPr>
+              <a:t>Key references</a:t>
+            </a:r>
+            <a:endParaRPr lang="en-US" sz="3000" dirty="0"/>
+          </a:p>
+        </p:txBody>
+      </p:sp>
+      <p:sp>
+        <p:nvSpPr>
+          <p:cNvPr id="5" name="reference list"/>
+          <p:cNvSpPr txBox="1"/>
+          <p:nvPr/>
+        </p:nvSpPr>
+        <p:spPr>
+          <a:xfrm>
+            <a:off x="548640" y="1508760"/>
+            <a:ext cx="11064240" cy="4572000"/>
+          </a:xfrm>
+          <a:prstGeom prst="rect">
+            <a:avLst/>
+          </a:prstGeom>
+          <a:noFill/>
+          <a:ln/>
+        </p:spPr>
+        <p:txBody>
+          <a:bodyPr wrap="square" lIns="0" tIns="0" rIns="0" bIns="0" rtlCol="0" anchor="t"/>
+          <a:lstStyle/>
+          <a:p>
+            <a:pPr marL="342900" indent="-342900">
+              <a:spcAft>
+                <a:spcPts val="600"/>
+              </a:spcAft>
+              <a:buSzPct val="100000"/>
+              <a:buChar char="•"/>
+            </a:pPr>
+            <a:r>
+              <a:rPr lang="en-US" sz="1400" dirty="0">
+                <a:solidFill>
+                  <a:schemeClr val="tx1"/>
+                </a:solidFill>
+              </a:rPr>
+              <a:t>M. W. Mueller, R. D'Andrea. Stability and control of a quadrocopter despite the complete loss of one, two, or three propellers. ICRA 2014.</a:t>
+            </a:r>
+            <a:endParaRPr lang="en-US" sz="1400" dirty="0"/>
+          </a:p>
+          <a:p>
+            <a:pPr marL="342900" indent="-342900">
+              <a:spcAft>
+                <a:spcPts val="600"/>
+              </a:spcAft>
+              <a:buSzPct val="100000"/>
+              <a:buChar char="•"/>
+            </a:pPr>
+            <a:r>
+              <a:rPr lang="en-US" sz="1400" dirty="0">
+                <a:solidFill>
+                  <a:schemeClr val="tx1"/>
+                </a:solidFill>
+              </a:rPr>
+              <a:t>M. W. Mueller, R. D'Andrea. Relaxed hover solutions for multicopters. IJRR 35(8), 2016.</a:t>
+            </a:r>
+            <a:endParaRPr lang="en-US" sz="1400" dirty="0"/>
+          </a:p>
+          <a:p>
+            <a:pPr marL="342900" indent="-342900">
+              <a:spcAft>
+                <a:spcPts val="600"/>
+              </a:spcAft>
+              <a:buSzPct val="100000"/>
+              <a:buChar char="•"/>
+            </a:pPr>
+            <a:r>
+              <a:rPr lang="en-US" sz="1400" dirty="0">
+                <a:solidFill>
+                  <a:schemeClr val="tx1"/>
+                </a:solidFill>
+              </a:rPr>
+              <a:t>S. Sun, X. Wang, Q. Chu, C. de Visser. Incremental nonlinear fault-tolerant control of a quadrotor with complete loss of two opposing rotors. IEEE T-RO 37(1), 2021.</a:t>
+            </a:r>
+            <a:endParaRPr lang="en-US" sz="1400" dirty="0"/>
+          </a:p>
+          <a:p>
+            <a:pPr marL="342900" indent="-342900">
+              <a:spcAft>
+                <a:spcPts val="600"/>
+              </a:spcAft>
+              <a:buSzPct val="100000"/>
+              <a:buChar char="•"/>
+            </a:pPr>
+            <a:r>
+              <a:rPr lang="en-US" sz="1400" dirty="0">
+                <a:solidFill>
+                  <a:schemeClr val="tx1"/>
+                </a:solidFill>
+              </a:rPr>
+              <a:t>M. Korda, I. Mezić. Linear predictors for nonlinear dynamical systems: Koopman operator meets model predictive control. Automatica 93, 2018.</a:t>
+            </a:r>
+            <a:endParaRPr lang="en-US" sz="1400" dirty="0"/>
+          </a:p>
+          <a:p>
+            <a:pPr marL="342900" indent="-342900">
+              <a:spcAft>
+                <a:spcPts val="600"/>
+              </a:spcAft>
+              <a:buSzPct val="100000"/>
+              <a:buChar char="•"/>
+            </a:pPr>
+            <a:r>
+              <a:rPr lang="en-US" sz="1400" dirty="0">
+                <a:solidFill>
+                  <a:schemeClr val="tx1"/>
+                </a:solidFill>
+              </a:rPr>
+              <a:t>M. O. Williams, I. G. Kevrekidis, C. W. Rowley. A data-driven approximation of the Koopman operator: extending dynamic mode decomposition. J. Nonlinear Sci. 25, 2015.</a:t>
+            </a:r>
+            <a:endParaRPr lang="en-US" sz="1400" dirty="0"/>
+          </a:p>
+          <a:p>
+            <a:pPr marL="342900" indent="-342900">
+              <a:spcAft>
+                <a:spcPts val="600"/>
+              </a:spcAft>
+              <a:buSzPct val="100000"/>
+              <a:buChar char="•"/>
+            </a:pPr>
+            <a:r>
+              <a:rPr lang="en-US" sz="1400" dirty="0">
+                <a:solidFill>
+                  <a:schemeClr val="tx1"/>
+                </a:solidFill>
+              </a:rPr>
+              <a:t>E. Todde, S. Martini, A. Rizzo, K. P. Valavanis. Residual Koopman-based model predictive control of quadrotors. ICUAS 2026.</a:t>
+            </a:r>
+            <a:endParaRPr lang="en-US" sz="1400" dirty="0"/>
+          </a:p>
+          <a:p>
+            <a:pPr marL="342900" indent="-342900">
+              <a:spcAft>
+                <a:spcPts val="600"/>
+              </a:spcAft>
+              <a:buSzPct val="100000"/>
+              <a:buChar char="•"/>
+            </a:pPr>
+            <a:r>
+              <a:rPr lang="en-US" sz="1400" dirty="0">
+                <a:solidFill>
+                  <a:schemeClr val="tx1"/>
+                </a:solidFill>
+              </a:rPr>
+              <a:t>D. Bruder, D. Bombara, R. J. Wood. A Koopman-based residual modeling approach for the control of a soft robot arm. IJRR 44(3), 2025.</a:t>
+            </a:r>
+            <a:endParaRPr lang="en-US" sz="1400" dirty="0"/>
+          </a:p>
+          <a:p>
+            <a:pPr marL="342900" indent="-342900">
+              <a:spcAft>
+                <a:spcPts val="600"/>
+              </a:spcAft>
+              <a:buSzPct val="100000"/>
+              <a:buChar char="•"/>
+            </a:pPr>
+            <a:r>
+              <a:rPr lang="en-US" sz="1400" dirty="0">
+                <a:solidFill>
+                  <a:schemeClr val="tx1"/>
+                </a:solidFill>
+              </a:rPr>
+              <a:t>S. S. K. S. Narayanan, U. Vaidya. RK-MPC: residual Koopman MPC for quadruped locomotion in offroad environments. arXiv:2604.04221, 2026.</a:t>
+            </a:r>
+            <a:endParaRPr lang="en-US" sz="1400" dirty="0"/>
+          </a:p>
+          <a:p>
+            <a:pPr marL="342900" indent="-342900">
+              <a:spcAft>
+                <a:spcPts val="600"/>
+              </a:spcAft>
+              <a:buSzPct val="100000"/>
+              <a:buChar char="•"/>
+            </a:pPr>
+            <a:r>
+              <a:rPr lang="en-US" sz="1400" dirty="0">
+                <a:solidFill>
+                  <a:schemeClr val="tx1"/>
+                </a:solidFill>
+              </a:rPr>
+              <a:t>B. Stellato et al. OSQP: an operator splitting solver for quadratic programs. Math. Prog. Comp. 12, 2020.</a:t>
+            </a:r>
+            <a:endParaRPr lang="en-US" sz="1400" dirty="0"/>
+          </a:p>
+        </p:txBody>
+      </p:sp>
+      <p:sp>
+        <p:nvSpPr>
+          <p:cNvPr id="6" name="bib note"/>
+          <p:cNvSpPr txBox="1"/>
+          <p:nvPr/>
+        </p:nvSpPr>
+        <p:spPr>
+          <a:xfrm>
+            <a:off x="548640" y="6035040"/>
+            <a:ext cx="11064240" cy="274320"/>
+          </a:xfrm>
+          <a:prstGeom prst="rect">
+            <a:avLst/>
+          </a:prstGeom>
+          <a:noFill/>
+          <a:ln/>
+        </p:spPr>
+        <p:txBody>
+          <a:bodyPr wrap="square" lIns="0" tIns="0" rIns="0" bIns="0" rtlCol="0" anchor="t"/>
+          <a:lstStyle/>
+          <a:p>
+            <a:pPr indent="0" marL="0">
+              <a:buNone/>
+            </a:pPr>
+            <a:r>
+              <a:rPr lang="en-US" sz="1200" dirty="0">
+                <a:solidFill>
+                  <a:schemeClr val="accent6"/>
+                </a:solidFill>
+              </a:rPr>
+              <a:t>Full bibliography: the project report.</a:t>
+            </a:r>
+            <a:endParaRPr lang="en-US" sz="1200" dirty="0"/>
+          </a:p>
+        </p:txBody>
+      </p:sp>
+      <p:sp>
+        <p:nvSpPr>
+          <p:cNvPr id="25" name="Slide Number Placeholder 0"/>
+          <p:cNvSpPr>
+            <a:spLocks noGrp="1"/>
+          </p:cNvSpPr>
+          <p:nvPr>
+            <p:ph type="sldNum" sz="quarter" idx="4294967295"/>
+          </p:nvPr>
+        </p:nvSpPr>
+        <p:spPr>
+          <a:xfrm>
+            <a:off x="11064240" y="6400800"/>
+            <a:ext cx="548640" cy="274320"/>
+          </a:xfrm>
+          <a:prstGeom prst="rect">
+            <a:avLst/>
+          </a:prstGeom>
+          <a:extLst>
+            <a:ext uri="{C572A759-6A51-4108-AA02-DFA0A04FC94B}">
+              <ma14:wrappingTextBoxFlag xmlns:ma14="http://schemas.microsoft.com/office/mac/drawingml/2011/main" val="0"/>
+            </a:ext>
+          </a:extLst>
+        </p:spPr>
+        <p:txBody>
+          <a:bodyPr/>
+          <a:lstStyle>
+            <a:lvl1pPr>
+              <a:defRPr sz="1000">
+                <a:solidFill>
+                  <a:schemeClr val="accent6"/>
+                </a:solidFill>
+              </a:defRPr>
+            </a:lvl1pPr>
+          </a:lstStyle>
+          <a:p>
+            <a:pPr algn="r"/>
+            <a:fld id="{F7021451-1387-4CA6-816F-3879F97B5CBC}" type="slidenum">
+              <a:rPr b="0" lang="en-US"/>
+              <a:t>16</a:t>
+            </a:fld>
+            <a:endParaRPr lang="en-US"/>
           </a:p>
         </p:txBody>
       </p:sp>
@@ -8724,7 +6492,7 @@
                   <a:schemeClr val="accent1"/>
                 </a:solidFill>
               </a:rPr>
-              <a:t>AIM</a:t>
+              <a:t>THE PROBLEM</a:t>
             </a:r>
             <a:endParaRPr lang="en-US" sz="1200" dirty="0"/>
           </a:p>
@@ -8762,7 +6530,7 @@
                   <a:schemeClr val="tx2"/>
                 </a:solidFill>
               </a:rPr>
-              <a:t>One aim, two connected parts</a:t>
+              <a:t>What happens when a rotor fails</a:t>
             </a:r>
             <a:endParaRPr lang="en-US" sz="3000" dirty="0"/>
           </a:p>
@@ -8770,18 +6538,398 @@
       </p:sp>
       <p:sp>
         <p:nvSpPr>
-          <p:cNvPr id="5" name="model card"/>
+          <p:cNvPr id="5" name="intro"/>
           <p:cNvSpPr txBox="1"/>
           <p:nvPr/>
         </p:nvSpPr>
         <p:spPr>
           <a:xfrm>
-            <a:off x="548640" y="1554480"/>
-            <a:ext cx="5394960" cy="2468880"/>
+            <a:off x="548640" y="1508760"/>
+            <a:ext cx="11064240" cy="822960"/>
+          </a:xfrm>
+          <a:prstGeom prst="rect">
+            <a:avLst/>
+          </a:prstGeom>
+          <a:noFill/>
+          <a:ln/>
+        </p:spPr>
+        <p:txBody>
+          <a:bodyPr wrap="square" lIns="0" tIns="0" rIns="0" bIns="0" rtlCol="0" anchor="t"/>
+          <a:lstStyle/>
+          <a:p>
+            <a:pPr indent="0" marL="0">
+              <a:buNone/>
+            </a:pPr>
+            <a:r>
+              <a:rPr lang="en-US" sz="1700" dirty="0">
+                <a:solidFill>
+                  <a:schemeClr val="tx1"/>
+                </a:solidFill>
+              </a:rPr>
+              <a:t>A quadrotor uses its four thrusts to control four things: height, roll, pitch and yaw. With one rotor gone, the twisting (reaction) torques of the propellers no longer cancel, so the drone cannot avoid spinning.</a:t>
+            </a:r>
+            <a:endParaRPr lang="en-US" sz="1700" dirty="0"/>
+          </a:p>
+        </p:txBody>
+      </p:sp>
+      <p:sp>
+        <p:nvSpPr>
+          <p:cNvPr id="6" name="step 1"/>
+          <p:cNvSpPr txBox="1"/>
+          <p:nvPr/>
+        </p:nvSpPr>
+        <p:spPr>
+          <a:xfrm>
+            <a:off x="548640" y="2514600"/>
+            <a:ext cx="1920240" cy="1554480"/>
           </a:xfrm>
           <a:prstGeom prst="roundRect">
             <a:avLst>
-              <a:gd name="adj" fmla="val 2963"/>
+              <a:gd name="adj" fmla="val 4706"/>
+            </a:avLst>
+          </a:prstGeom>
+          <a:solidFill>
+            <a:schemeClr val="bg2"/>
+          </a:solidFill>
+          <a:ln>
+            <a:solidFill>
+              <a:schemeClr val="bg2"/>
+            </a:solidFill>
+          </a:ln>
+        </p:spPr>
+        <p:txBody>
+          <a:bodyPr wrap="square" lIns="152400" tIns="152400" rIns="152400" bIns="152400" rtlCol="0" anchor="t"/>
+          <a:lstStyle/>
+          <a:p>
+            <a:pPr indent="0" marL="0">
+              <a:buNone/>
+            </a:pPr>
+            <a:r>
+              <a:rPr lang="en-US" sz="1800" b="1" dirty="0">
+                <a:solidFill>
+                  <a:schemeClr val="tx2"/>
+                </a:solidFill>
+              </a:rPr>
+              <a:t>Healthy flight</a:t>
+            </a:r>
+            <a:endParaRPr lang="en-US" sz="1600" dirty="0"/>
+          </a:p>
+          <a:p>
+            <a:pPr indent="0" marL="0">
+              <a:spcBef>
+                <a:spcPts val="600"/>
+              </a:spcBef>
+              <a:buNone/>
+            </a:pPr>
+            <a:r>
+              <a:rPr lang="en-US" sz="1400" dirty="0">
+                <a:solidFill>
+                  <a:schemeClr val="accent6"/>
+                </a:solidFill>
+              </a:rPr>
+              <a:t>Four rotors, normal controller</a:t>
+            </a:r>
+            <a:endParaRPr lang="en-US" sz="1600" dirty="0"/>
+          </a:p>
+        </p:txBody>
+      </p:sp>
+      <p:sp>
+        <p:nvSpPr>
+          <p:cNvPr id="7" name="arrow 1"/>
+          <p:cNvSpPr/>
+          <p:nvPr/>
+        </p:nvSpPr>
+        <p:spPr>
+          <a:xfrm>
+            <a:off x="2523744" y="3154680"/>
+            <a:ext cx="256032" cy="274320"/>
+          </a:xfrm>
+          <a:prstGeom prst="rightArrow">
+            <a:avLst/>
+          </a:prstGeom>
+          <a:solidFill>
+            <a:schemeClr val="accent6"/>
+          </a:solidFill>
+          <a:ln w="12700">
+            <a:solidFill>
+              <a:schemeClr val="accent6"/>
+            </a:solidFill>
+            <a:prstDash val="solid"/>
+          </a:ln>
+        </p:spPr>
+      </p:sp>
+      <p:sp>
+        <p:nvSpPr>
+          <p:cNvPr id="8" name="step 2"/>
+          <p:cNvSpPr txBox="1"/>
+          <p:nvPr/>
+        </p:nvSpPr>
+        <p:spPr>
+          <a:xfrm>
+            <a:off x="2834640" y="2514600"/>
+            <a:ext cx="1920240" cy="1554480"/>
+          </a:xfrm>
+          <a:prstGeom prst="roundRect">
+            <a:avLst>
+              <a:gd name="adj" fmla="val 4706"/>
+            </a:avLst>
+          </a:prstGeom>
+          <a:solidFill>
+            <a:schemeClr val="accent5"/>
+          </a:solidFill>
+          <a:ln>
+            <a:solidFill>
+              <a:schemeClr val="accent5"/>
+            </a:solidFill>
+          </a:ln>
+        </p:spPr>
+        <p:txBody>
+          <a:bodyPr wrap="square" lIns="152400" tIns="152400" rIns="152400" bIns="152400" rtlCol="0" anchor="t"/>
+          <a:lstStyle/>
+          <a:p>
+            <a:pPr indent="0" marL="0">
+              <a:buNone/>
+            </a:pPr>
+            <a:r>
+              <a:rPr lang="en-US" sz="1800" b="1" dirty="0">
+                <a:solidFill>
+                  <a:schemeClr val="tx2"/>
+                </a:solidFill>
+              </a:rPr>
+              <a:t>Rotor fails</a:t>
+            </a:r>
+            <a:endParaRPr lang="en-US" sz="1600" dirty="0"/>
+          </a:p>
+          <a:p>
+            <a:pPr indent="0" marL="0">
+              <a:spcBef>
+                <a:spcPts val="600"/>
+              </a:spcBef>
+              <a:buNone/>
+            </a:pPr>
+            <a:r>
+              <a:rPr lang="en-US" sz="1400" dirty="0">
+                <a:solidFill>
+                  <a:schemeClr val="accent6"/>
+                </a:solidFill>
+              </a:rPr>
+              <a:t>One thrust lost; yaw torque no longer balanced</a:t>
+            </a:r>
+            <a:endParaRPr lang="en-US" sz="1600" dirty="0"/>
+          </a:p>
+        </p:txBody>
+      </p:sp>
+      <p:sp>
+        <p:nvSpPr>
+          <p:cNvPr id="9" name="arrow 2"/>
+          <p:cNvSpPr/>
+          <p:nvPr/>
+        </p:nvSpPr>
+        <p:spPr>
+          <a:xfrm>
+            <a:off x="4809744" y="3154680"/>
+            <a:ext cx="256032" cy="274320"/>
+          </a:xfrm>
+          <a:prstGeom prst="rightArrow">
+            <a:avLst/>
+          </a:prstGeom>
+          <a:solidFill>
+            <a:schemeClr val="accent6"/>
+          </a:solidFill>
+          <a:ln w="12700">
+            <a:solidFill>
+              <a:schemeClr val="accent6"/>
+            </a:solidFill>
+            <a:prstDash val="solid"/>
+          </a:ln>
+        </p:spPr>
+      </p:sp>
+      <p:sp>
+        <p:nvSpPr>
+          <p:cNvPr id="10" name="step 3"/>
+          <p:cNvSpPr txBox="1"/>
+          <p:nvPr/>
+        </p:nvSpPr>
+        <p:spPr>
+          <a:xfrm>
+            <a:off x="5120640" y="2514600"/>
+            <a:ext cx="1920240" cy="1554480"/>
+          </a:xfrm>
+          <a:prstGeom prst="roundRect">
+            <a:avLst>
+              <a:gd name="adj" fmla="val 4706"/>
+            </a:avLst>
+          </a:prstGeom>
+          <a:solidFill>
+            <a:schemeClr val="bg2"/>
+          </a:solidFill>
+          <a:ln>
+            <a:solidFill>
+              <a:schemeClr val="bg2"/>
+            </a:solidFill>
+          </a:ln>
+        </p:spPr>
+        <p:txBody>
+          <a:bodyPr wrap="square" lIns="152400" tIns="152400" rIns="152400" bIns="152400" rtlCol="0" anchor="t"/>
+          <a:lstStyle/>
+          <a:p>
+            <a:pPr indent="0" marL="0">
+              <a:buNone/>
+            </a:pPr>
+            <a:r>
+              <a:rPr lang="en-US" sz="1800" b="1" dirty="0">
+                <a:solidFill>
+                  <a:schemeClr val="tx2"/>
+                </a:solidFill>
+              </a:rPr>
+              <a:t>Drone spins up</a:t>
+            </a:r>
+            <a:endParaRPr lang="en-US" sz="1600" dirty="0"/>
+          </a:p>
+          <a:p>
+            <a:pPr indent="0" marL="0">
+              <a:spcBef>
+                <a:spcPts val="600"/>
+              </a:spcBef>
+              <a:buNone/>
+            </a:pPr>
+            <a:r>
+              <a:rPr lang="en-US" sz="1400" dirty="0">
+                <a:solidFill>
+                  <a:schemeClr val="accent6"/>
+                </a:solidFill>
+              </a:rPr>
+              <a:t>Spin rate grows towards ≈ 19 rad/s</a:t>
+            </a:r>
+            <a:endParaRPr lang="en-US" sz="1600" dirty="0"/>
+          </a:p>
+        </p:txBody>
+      </p:sp>
+      <p:sp>
+        <p:nvSpPr>
+          <p:cNvPr id="11" name="arrow 3"/>
+          <p:cNvSpPr/>
+          <p:nvPr/>
+        </p:nvSpPr>
+        <p:spPr>
+          <a:xfrm>
+            <a:off x="7095744" y="3154680"/>
+            <a:ext cx="256032" cy="274320"/>
+          </a:xfrm>
+          <a:prstGeom prst="rightArrow">
+            <a:avLst/>
+          </a:prstGeom>
+          <a:solidFill>
+            <a:schemeClr val="accent6"/>
+          </a:solidFill>
+          <a:ln w="12700">
+            <a:solidFill>
+              <a:schemeClr val="accent6"/>
+            </a:solidFill>
+            <a:prstDash val="solid"/>
+          </a:ln>
+        </p:spPr>
+      </p:sp>
+      <p:sp>
+        <p:nvSpPr>
+          <p:cNvPr id="12" name="step 4"/>
+          <p:cNvSpPr txBox="1"/>
+          <p:nvPr/>
+        </p:nvSpPr>
+        <p:spPr>
+          <a:xfrm>
+            <a:off x="7406640" y="2514600"/>
+            <a:ext cx="1920240" cy="1554480"/>
+          </a:xfrm>
+          <a:prstGeom prst="roundRect">
+            <a:avLst>
+              <a:gd name="adj" fmla="val 4706"/>
+            </a:avLst>
+          </a:prstGeom>
+          <a:solidFill>
+            <a:schemeClr val="bg2"/>
+          </a:solidFill>
+          <a:ln>
+            <a:solidFill>
+              <a:schemeClr val="bg2"/>
+            </a:solidFill>
+          </a:ln>
+        </p:spPr>
+        <p:txBody>
+          <a:bodyPr wrap="square" lIns="152400" tIns="152400" rIns="152400" bIns="152400" rtlCol="0" anchor="t"/>
+          <a:lstStyle/>
+          <a:p>
+            <a:pPr indent="0" marL="0">
+              <a:buNone/>
+            </a:pPr>
+            <a:r>
+              <a:rPr lang="en-US" sz="1800" b="1" dirty="0">
+                <a:solidFill>
+                  <a:schemeClr val="tx2"/>
+                </a:solidFill>
+              </a:rPr>
+              <a:t>Failure controller</a:t>
+            </a:r>
+            <a:endParaRPr lang="en-US" sz="1600" dirty="0"/>
+          </a:p>
+          <a:p>
+            <a:pPr indent="0" marL="0">
+              <a:spcBef>
+                <a:spcPts val="600"/>
+              </a:spcBef>
+              <a:buNone/>
+            </a:pPr>
+            <a:r>
+              <a:rPr lang="en-US" sz="1400" dirty="0">
+                <a:solidFill>
+                  <a:schemeClr val="accent6"/>
+                </a:solidFill>
+              </a:rPr>
+              <a:t>Holds the spin axis and the height</a:t>
+            </a:r>
+            <a:endParaRPr lang="en-US" sz="1600" dirty="0"/>
+          </a:p>
+        </p:txBody>
+      </p:sp>
+      <p:sp>
+        <p:nvSpPr>
+          <p:cNvPr id="13" name="arrow 4"/>
+          <p:cNvSpPr/>
+          <p:nvPr/>
+        </p:nvSpPr>
+        <p:spPr>
+          <a:xfrm>
+            <a:off x="9381744" y="3154680"/>
+            <a:ext cx="256032" cy="274320"/>
+          </a:xfrm>
+          <a:prstGeom prst="rightArrow">
+            <a:avLst/>
+          </a:prstGeom>
+          <a:solidFill>
+            <a:schemeClr val="accent6"/>
+          </a:solidFill>
+          <a:ln w="12700">
+            <a:solidFill>
+              <a:schemeClr val="accent6"/>
+            </a:solidFill>
+            <a:prstDash val="solid"/>
+          </a:ln>
+        </p:spPr>
+      </p:sp>
+      <p:sp>
+        <p:nvSpPr>
+          <p:cNvPr id="14" name="step 5"/>
+          <p:cNvSpPr txBox="1"/>
+          <p:nvPr/>
+        </p:nvSpPr>
+        <p:spPr>
+          <a:xfrm>
+            <a:off x="9692640" y="2514600"/>
+            <a:ext cx="1920240" cy="1554480"/>
+          </a:xfrm>
+          <a:prstGeom prst="roundRect">
+            <a:avLst>
+              <a:gd name="adj" fmla="val 4706"/>
             </a:avLst>
           </a:prstGeom>
           <a:solidFill>
@@ -8801,12 +6949,12 @@
               <a:buNone/>
             </a:pPr>
             <a:r>
-              <a:rPr lang="en-US" sz="1300" b="1" dirty="0">
-                <a:solidFill>
-                  <a:schemeClr val="accent1"/>
-                </a:solidFill>
-              </a:rPr>
-              <a:t>MODEL AND CONTROL · AS PROPOSED</a:t>
+              <a:rPr lang="en-US" sz="1800" b="1" dirty="0">
+                <a:solidFill>
+                  <a:schemeClr val="tx2"/>
+                </a:solidFill>
+              </a:rPr>
+              <a:t>Relaxed hover</a:t>
             </a:r>
             <a:endParaRPr lang="en-US" sz="1600" dirty="0"/>
           </a:p>
@@ -8818,12 +6966,56 @@
               <a:buNone/>
             </a:pPr>
             <a:r>
-              <a:rPr lang="en-US" sz="2200" b="1" dirty="0">
+              <a:rPr lang="en-US" sz="1400" dirty="0">
+                <a:solidFill>
+                  <a:schemeClr val="accent6"/>
+                </a:solidFill>
+              </a:rPr>
+              <a:t>Steady spin, axis tilted 16°</a:t>
+            </a:r>
+            <a:endParaRPr lang="en-US" sz="1600" dirty="0"/>
+          </a:p>
+        </p:txBody>
+      </p:sp>
+      <p:sp>
+        <p:nvSpPr>
+          <p:cNvPr id="15" name="relaxed hover statement"/>
+          <p:cNvSpPr txBox="1"/>
+          <p:nvPr/>
+        </p:nvSpPr>
+        <p:spPr>
+          <a:xfrm>
+            <a:off x="548640" y="4434840"/>
+            <a:ext cx="11064240" cy="1234440"/>
+          </a:xfrm>
+          <a:prstGeom prst="roundRect">
+            <a:avLst>
+              <a:gd name="adj" fmla="val 5926"/>
+            </a:avLst>
+          </a:prstGeom>
+          <a:solidFill>
+            <a:schemeClr val="bg2"/>
+          </a:solidFill>
+          <a:ln>
+            <a:solidFill>
+              <a:schemeClr val="bg2"/>
+            </a:solidFill>
+          </a:ln>
+        </p:spPr>
+        <p:txBody>
+          <a:bodyPr wrap="square" lIns="152400" tIns="152400" rIns="152400" bIns="152400" rtlCol="0" anchor="t"/>
+          <a:lstStyle/>
+          <a:p>
+            <a:pPr indent="0" marL="0">
+              <a:buNone/>
+            </a:pPr>
+            <a:r>
+              <a:rPr lang="en-US" sz="2000" b="1" dirty="0">
                 <a:solidFill>
                   <a:schemeClr val="tx2"/>
                 </a:solidFill>
               </a:rPr>
-              <a:t>Residual Koopman MPC</a:t>
+              <a:t>Giving up yaw keeps the drone flying.</a:t>
             </a:r>
             <a:endParaRPr lang="en-US" sz="1600" dirty="0"/>
           </a:p>
@@ -8840,134 +7032,9 @@
                   <a:schemeClr val="tx1"/>
                 </a:solidFill>
               </a:rPr>
-              <a:t>Can a Koopman (EDMDc) model of only the mismatch, built on the known spinning-equilibrium model of Mueller &amp; D'Andrea, predict and control better than the physics model alone or a full-state Koopman model?</a:t>
+              <a:t>It hovers like a spinning top and moves by tilting its spin axis. Mueller &amp; D'Andrea (2014) derived this "relaxed hover", showed that it is controllable and flew it.</a:t>
             </a:r>
             <a:endParaRPr lang="en-US" sz="1600" dirty="0"/>
-          </a:p>
-        </p:txBody>
-      </p:sp>
-      <p:sp>
-        <p:nvSpPr>
-          <p:cNvPr id="6" name="timing card"/>
-          <p:cNvSpPr txBox="1"/>
-          <p:nvPr/>
-        </p:nvSpPr>
-        <p:spPr>
-          <a:xfrm>
-            <a:off x="6217920" y="1554480"/>
-            <a:ext cx="5394960" cy="2468880"/>
-          </a:xfrm>
-          <a:prstGeom prst="roundRect">
-            <a:avLst>
-              <a:gd name="adj" fmla="val 2963"/>
-            </a:avLst>
-          </a:prstGeom>
-          <a:solidFill>
-            <a:schemeClr val="accent5"/>
-          </a:solidFill>
-          <a:ln>
-            <a:solidFill>
-              <a:schemeClr val="accent5"/>
-            </a:solidFill>
-          </a:ln>
-        </p:spPr>
-        <p:txBody>
-          <a:bodyPr wrap="square" lIns="152400" tIns="152400" rIns="152400" bIns="152400" rtlCol="0" anchor="t"/>
-          <a:lstStyle/>
-          <a:p>
-            <a:pPr indent="0" marL="0">
-              <a:buNone/>
-            </a:pPr>
-            <a:r>
-              <a:rPr lang="en-US" sz="1300" b="1" dirty="0">
-                <a:solidFill>
-                  <a:schemeClr val="accent2"/>
-                </a:solidFill>
-              </a:rPr>
-              <a:t>TIMING · ADDED AFTER THE PROPOSAL</a:t>
-            </a:r>
-            <a:endParaRPr lang="en-US" sz="1600" dirty="0"/>
-          </a:p>
-          <a:p>
-            <a:pPr indent="0" marL="0">
-              <a:spcBef>
-                <a:spcPts val="600"/>
-              </a:spcBef>
-              <a:buNone/>
-            </a:pPr>
-            <a:r>
-              <a:rPr lang="en-US" sz="2200" b="1" dirty="0">
-                <a:solidFill>
-                  <a:schemeClr val="tx2"/>
-                </a:solidFill>
-              </a:rPr>
-              <a:t>Certified detection-delay budget</a:t>
-            </a:r>
-            <a:endParaRPr lang="en-US" sz="1600" dirty="0"/>
-          </a:p>
-          <a:p>
-            <a:pPr indent="0" marL="0">
-              <a:spcBef>
-                <a:spcPts val="800"/>
-              </a:spcBef>
-              <a:buNone/>
-            </a:pPr>
-            <a:r>
-              <a:rPr lang="en-US" sz="1600" dirty="0">
-                <a:solidFill>
-                  <a:schemeClr val="tx1"/>
-                </a:solidFill>
-              </a:rPr>
-              <a:t>A fault detector needs 30–130 ms to notice a dead rotor. What is the largest delay for which recovery is guaranteed, and how does the capture controller change it?</a:t>
-            </a:r>
-            <a:endParaRPr lang="en-US" sz="1600" dirty="0"/>
-          </a:p>
-        </p:txBody>
-      </p:sp>
-      <p:sp>
-        <p:nvSpPr>
-          <p:cNvPr id="7" name="link"/>
-          <p:cNvSpPr txBox="1"/>
-          <p:nvPr/>
-        </p:nvSpPr>
-        <p:spPr>
-          <a:xfrm>
-            <a:off x="548640" y="4389120"/>
-            <a:ext cx="11064240" cy="731520"/>
-          </a:xfrm>
-          <a:prstGeom prst="rect">
-            <a:avLst/>
-          </a:prstGeom>
-          <a:noFill/>
-          <a:ln/>
-        </p:spPr>
-        <p:txBody>
-          <a:bodyPr wrap="square" lIns="0" tIns="0" rIns="0" bIns="0" rtlCol="0" anchor="t"/>
-          <a:lstStyle/>
-          <a:p>
-            <a:pPr indent="0" marL="0">
-              <a:buNone/>
-            </a:pPr>
-            <a:r>
-              <a:rPr lang="en-US" sz="1800" b="1" dirty="0">
-                <a:solidFill>
-                  <a:schemeClr val="tx1"/>
-                </a:solidFill>
-              </a:rPr>
-              <a:t>The link: </a:t>
-            </a:r>
-            <a:pPr indent="0" marL="0">
-              <a:buNone/>
-            </a:pPr>
-            <a:r>
-              <a:rPr lang="en-US" sz="1800" dirty="0">
-                <a:solidFill>
-                  <a:schemeClr val="tx1"/>
-                </a:solidFill>
-              </a:rPr>
-              <a:t>each capture controller (LQR, analytical MPC, residual Koopman MPC) is compared by the detection delay it can tolerate.</a:t>
-            </a:r>
-            <a:endParaRPr lang="en-US" sz="1800" dirty="0"/>
           </a:p>
         </p:txBody>
       </p:sp>
@@ -9073,7 +7140,7 @@
                   <a:schemeClr val="accent1"/>
                 </a:solidFill>
               </a:rPr>
-              <a:t>THE PROBLEM</a:t>
+              <a:t>PROBLEM STATEMENT</a:t>
             </a:r>
             <a:endParaRPr lang="en-US" sz="1200" dirty="0"/>
           </a:p>
@@ -9111,7 +7178,7 @@
                   <a:schemeClr val="tx2"/>
                 </a:solidFill>
               </a:rPr>
-              <a:t>What happens when a rotor fails</a:t>
+              <a:t>The physics model is good, but not perfect</a:t>
             </a:r>
             <a:endParaRPr lang="en-US" sz="3000" dirty="0"/>
           </a:p>
@@ -9119,26 +7186,26 @@
       </p:sp>
       <p:sp>
         <p:nvSpPr>
-          <p:cNvPr id="5" name="step 1"/>
+          <p:cNvPr id="5" name="relies card"/>
           <p:cNvSpPr txBox="1"/>
           <p:nvPr/>
         </p:nvSpPr>
         <p:spPr>
           <a:xfrm>
-            <a:off x="548640" y="1783080"/>
-            <a:ext cx="1920240" cy="1554480"/>
+            <a:off x="548640" y="1554480"/>
+            <a:ext cx="5394960" cy="1508760"/>
           </a:xfrm>
           <a:prstGeom prst="roundRect">
             <a:avLst>
-              <a:gd name="adj" fmla="val 4706"/>
+              <a:gd name="adj" fmla="val 4848"/>
             </a:avLst>
           </a:prstGeom>
           <a:solidFill>
-            <a:schemeClr val="bg2"/>
+            <a:schemeClr val="accent4"/>
           </a:solidFill>
-          <a:ln w="9525">
+          <a:ln>
             <a:solidFill>
-              <a:schemeClr val="bg2"/>
+              <a:schemeClr val="accent4"/>
             </a:solidFill>
           </a:ln>
         </p:spPr>
@@ -9150,29 +7217,29 @@
               <a:buNone/>
             </a:pPr>
             <a:r>
-              <a:rPr lang="en-US" sz="1800" b="1" dirty="0">
-                <a:solidFill>
-                  <a:schemeClr val="tx2"/>
-                </a:solidFill>
-              </a:rPr>
-              <a:t>Healthy flight</a:t>
+              <a:rPr lang="en-US" sz="1300" b="1" dirty="0">
+                <a:solidFill>
+                  <a:schemeClr val="accent1"/>
+                </a:solidFill>
+              </a:rPr>
+              <a:t>WHAT THE CONTROLLER RELIES ON</a:t>
             </a:r>
             <a:endParaRPr lang="en-US" sz="1600" dirty="0"/>
           </a:p>
           <a:p>
             <a:pPr indent="0" marL="0">
               <a:spcBef>
-                <a:spcPts val="600"/>
+                <a:spcPts val="800"/>
               </a:spcBef>
               <a:buNone/>
             </a:pPr>
             <a:r>
-              <a:rPr lang="en-US" sz="1400" dirty="0">
-                <a:solidFill>
-                  <a:schemeClr val="accent6"/>
-                </a:solidFill>
-              </a:rPr>
-              <a:t>Normal controller, four rotors</a:t>
+              <a:rPr lang="en-US" sz="1600" dirty="0">
+                <a:solidFill>
+                  <a:schemeClr val="tx1"/>
+                </a:solidFill>
+              </a:rPr>
+              <a:t>The spinning-drone model of Mueller &amp; D'Andrea: correct equilibrium, linear about the spin, spin-up time matched in flight.</a:t>
             </a:r>
             <a:endParaRPr lang="en-US" sz="1600" dirty="0"/>
           </a:p>
@@ -9180,137 +7247,26 @@
       </p:sp>
       <p:sp>
         <p:nvSpPr>
-          <p:cNvPr id="6" name="arrow 1"/>
-          <p:cNvSpPr/>
+          <p:cNvPr id="6" name="misses card"/>
+          <p:cNvSpPr txBox="1"/>
           <p:nvPr/>
         </p:nvSpPr>
         <p:spPr>
           <a:xfrm>
-            <a:off x="2523744" y="2423160"/>
-            <a:ext cx="256032" cy="274320"/>
-          </a:xfrm>
-          <a:prstGeom prst="rightArrow">
-            <a:avLst/>
-          </a:prstGeom>
-          <a:solidFill>
-            <a:schemeClr val="accent6"/>
-          </a:solidFill>
-          <a:ln w="12700">
-            <a:solidFill>
-              <a:schemeClr val="accent6"/>
-            </a:solidFill>
-            <a:prstDash val="solid"/>
-          </a:ln>
-        </p:spPr>
-      </p:sp>
-      <p:sp>
-        <p:nvSpPr>
-          <p:cNvPr id="7" name="step 2"/>
-          <p:cNvSpPr txBox="1"/>
-          <p:nvPr/>
-        </p:nvSpPr>
-        <p:spPr>
-          <a:xfrm>
-            <a:off x="2834640" y="1783080"/>
-            <a:ext cx="1920240" cy="1554480"/>
+            <a:off x="6217920" y="1554480"/>
+            <a:ext cx="5394960" cy="1508760"/>
           </a:xfrm>
           <a:prstGeom prst="roundRect">
             <a:avLst>
-              <a:gd name="adj" fmla="val 4706"/>
-            </a:avLst>
-          </a:prstGeom>
-          <a:solidFill>
-            <a:schemeClr val="bg2"/>
-          </a:solidFill>
-          <a:ln w="9525">
-            <a:solidFill>
-              <a:schemeClr val="bg2"/>
-            </a:solidFill>
-          </a:ln>
-        </p:spPr>
-        <p:txBody>
-          <a:bodyPr wrap="square" lIns="152400" tIns="152400" rIns="152400" bIns="152400" rtlCol="0" anchor="t"/>
-          <a:lstStyle/>
-          <a:p>
-            <a:pPr indent="0" marL="0">
-              <a:buNone/>
-            </a:pPr>
-            <a:r>
-              <a:rPr lang="en-US" sz="1800" b="1" dirty="0">
-                <a:solidFill>
-                  <a:schemeClr val="tx2"/>
-                </a:solidFill>
-              </a:rPr>
-              <a:t>Rotor fails</a:t>
-            </a:r>
-            <a:endParaRPr lang="en-US" sz="1600" dirty="0"/>
-          </a:p>
-          <a:p>
-            <a:pPr indent="0" marL="0">
-              <a:spcBef>
-                <a:spcPts val="600"/>
-              </a:spcBef>
-              <a:buNone/>
-            </a:pPr>
-            <a:r>
-              <a:rPr lang="en-US" sz="1400" dirty="0">
-                <a:solidFill>
-                  <a:schemeClr val="accent6"/>
-                </a:solidFill>
-              </a:rPr>
-              <a:t>t = 0, thrust of rotor 4 lost</a:t>
-            </a:r>
-            <a:endParaRPr lang="en-US" sz="1600" dirty="0"/>
-          </a:p>
-        </p:txBody>
-      </p:sp>
-      <p:sp>
-        <p:nvSpPr>
-          <p:cNvPr id="8" name="arrow 2"/>
-          <p:cNvSpPr/>
-          <p:nvPr/>
-        </p:nvSpPr>
-        <p:spPr>
-          <a:xfrm>
-            <a:off x="4809744" y="2423160"/>
-            <a:ext cx="256032" cy="274320"/>
-          </a:xfrm>
-          <a:prstGeom prst="rightArrow">
-            <a:avLst/>
-          </a:prstGeom>
-          <a:solidFill>
-            <a:schemeClr val="accent6"/>
-          </a:solidFill>
-          <a:ln w="12700">
-            <a:solidFill>
-              <a:schemeClr val="accent6"/>
-            </a:solidFill>
-            <a:prstDash val="solid"/>
-          </a:ln>
-        </p:spPr>
-      </p:sp>
-      <p:sp>
-        <p:nvSpPr>
-          <p:cNvPr id="9" name="step 3"/>
-          <p:cNvSpPr txBox="1"/>
-          <p:nvPr/>
-        </p:nvSpPr>
-        <p:spPr>
-          <a:xfrm>
-            <a:off x="5120640" y="1783080"/>
-            <a:ext cx="1920240" cy="1554480"/>
-          </a:xfrm>
-          <a:prstGeom prst="roundRect">
-            <a:avLst>
-              <a:gd name="adj" fmla="val 4706"/>
+              <a:gd name="adj" fmla="val 4848"/>
             </a:avLst>
           </a:prstGeom>
           <a:solidFill>
             <a:schemeClr val="accent5"/>
           </a:solidFill>
-          <a:ln w="19050">
+          <a:ln>
             <a:solidFill>
-              <a:schemeClr val="accent2"/>
+              <a:schemeClr val="accent5"/>
             </a:solidFill>
           </a:ln>
         </p:spPr>
@@ -9322,29 +7278,29 @@
               <a:buNone/>
             </a:pPr>
             <a:r>
-              <a:rPr lang="en-US" sz="1800" b="1" dirty="0">
+              <a:rPr lang="en-US" sz="1300" b="1" dirty="0">
                 <a:solidFill>
                   <a:schemeClr val="accent2"/>
                 </a:solidFill>
               </a:rPr>
-              <a:t>Undetected, τ</a:t>
+              <a:t>WHAT THE MODEL MISSES</a:t>
             </a:r>
             <a:endParaRPr lang="en-US" sz="1600" dirty="0"/>
           </a:p>
           <a:p>
             <a:pPr indent="0" marL="0">
               <a:spcBef>
-                <a:spcPts val="600"/>
+                <a:spcPts val="800"/>
               </a:spcBef>
               <a:buNone/>
             </a:pPr>
             <a:r>
-              <a:rPr lang="en-US" sz="1400" dirty="0">
-                <a:solidFill>
-                  <a:schemeClr val="accent6"/>
-                </a:solidFill>
-              </a:rPr>
-              <a:t>Healthy controller still flying a 3-rotor vehicle</a:t>
+              <a:rPr lang="en-US" sz="1600" dirty="0">
+                <a:solidFill>
+                  <a:schemeClr val="tx1"/>
+                </a:solidFill>
+              </a:rPr>
+              <a:t>In flight: less thrust while spinning fast, and a spin about 20–27% slower than predicted. Also inertia errors and motor speed. A controller built on it settles with a steady error.</a:t>
             </a:r>
             <a:endParaRPr lang="en-US" sz="1600" dirty="0"/>
           </a:p>
@@ -9352,190 +7308,18 @@
       </p:sp>
       <p:sp>
         <p:nvSpPr>
-          <p:cNvPr id="10" name="arrow 3"/>
-          <p:cNvSpPr/>
+          <p:cNvPr id="7" name="question card"/>
+          <p:cNvSpPr txBox="1"/>
           <p:nvPr/>
         </p:nvSpPr>
         <p:spPr>
           <a:xfrm>
-            <a:off x="7095744" y="2423160"/>
-            <a:ext cx="256032" cy="274320"/>
-          </a:xfrm>
-          <a:prstGeom prst="rightArrow">
-            <a:avLst/>
-          </a:prstGeom>
-          <a:solidFill>
-            <a:schemeClr val="accent6"/>
-          </a:solidFill>
-          <a:ln w="12700">
-            <a:solidFill>
-              <a:schemeClr val="accent6"/>
-            </a:solidFill>
-            <a:prstDash val="solid"/>
-          </a:ln>
-        </p:spPr>
-      </p:sp>
-      <p:sp>
-        <p:nvSpPr>
-          <p:cNvPr id="11" name="step 4"/>
-          <p:cNvSpPr txBox="1"/>
-          <p:nvPr/>
-        </p:nvSpPr>
-        <p:spPr>
-          <a:xfrm>
-            <a:off x="7406640" y="1783080"/>
-            <a:ext cx="1920240" cy="1554480"/>
+            <a:off x="548640" y="3291840"/>
+            <a:ext cx="11064240" cy="1554480"/>
           </a:xfrm>
           <a:prstGeom prst="roundRect">
             <a:avLst>
               <a:gd name="adj" fmla="val 4706"/>
-            </a:avLst>
-          </a:prstGeom>
-          <a:solidFill>
-            <a:schemeClr val="bg2"/>
-          </a:solidFill>
-          <a:ln w="9525">
-            <a:solidFill>
-              <a:schemeClr val="bg2"/>
-            </a:solidFill>
-          </a:ln>
-        </p:spPr>
-        <p:txBody>
-          <a:bodyPr wrap="square" lIns="152400" tIns="152400" rIns="152400" bIns="152400" rtlCol="0" anchor="t"/>
-          <a:lstStyle/>
-          <a:p>
-            <a:pPr indent="0" marL="0">
-              <a:buNone/>
-            </a:pPr>
-            <a:r>
-              <a:rPr lang="en-US" sz="1800" b="1" dirty="0">
-                <a:solidFill>
-                  <a:schemeClr val="tx2"/>
-                </a:solidFill>
-              </a:rPr>
-              <a:t>Capture</a:t>
-            </a:r>
-            <a:endParaRPr lang="en-US" sz="1600" dirty="0"/>
-          </a:p>
-          <a:p>
-            <a:pPr indent="0" marL="0">
-              <a:spcBef>
-                <a:spcPts val="600"/>
-              </a:spcBef>
-              <a:buNone/>
-            </a:pPr>
-            <a:r>
-              <a:rPr lang="en-US" sz="1400" dirty="0">
-                <a:solidFill>
-                  <a:schemeClr val="accent6"/>
-                </a:solidFill>
-              </a:rPr>
-              <a:t>Failure controller takes over</a:t>
-            </a:r>
-            <a:endParaRPr lang="en-US" sz="1600" dirty="0"/>
-          </a:p>
-        </p:txBody>
-      </p:sp>
-      <p:sp>
-        <p:nvSpPr>
-          <p:cNvPr id="12" name="arrow 4"/>
-          <p:cNvSpPr/>
-          <p:nvPr/>
-        </p:nvSpPr>
-        <p:spPr>
-          <a:xfrm>
-            <a:off x="9381744" y="2423160"/>
-            <a:ext cx="256032" cy="274320"/>
-          </a:xfrm>
-          <a:prstGeom prst="rightArrow">
-            <a:avLst/>
-          </a:prstGeom>
-          <a:solidFill>
-            <a:schemeClr val="accent6"/>
-          </a:solidFill>
-          <a:ln w="12700">
-            <a:solidFill>
-              <a:schemeClr val="accent6"/>
-            </a:solidFill>
-            <a:prstDash val="solid"/>
-          </a:ln>
-        </p:spPr>
-      </p:sp>
-      <p:sp>
-        <p:nvSpPr>
-          <p:cNvPr id="13" name="step 5"/>
-          <p:cNvSpPr txBox="1"/>
-          <p:nvPr/>
-        </p:nvSpPr>
-        <p:spPr>
-          <a:xfrm>
-            <a:off x="9692640" y="1783080"/>
-            <a:ext cx="1920240" cy="1554480"/>
-          </a:xfrm>
-          <a:prstGeom prst="roundRect">
-            <a:avLst>
-              <a:gd name="adj" fmla="val 4706"/>
-            </a:avLst>
-          </a:prstGeom>
-          <a:solidFill>
-            <a:schemeClr val="accent4"/>
-          </a:solidFill>
-          <a:ln w="9525">
-            <a:solidFill>
-              <a:schemeClr val="accent4"/>
-            </a:solidFill>
-          </a:ln>
-        </p:spPr>
-        <p:txBody>
-          <a:bodyPr wrap="square" lIns="152400" tIns="152400" rIns="152400" bIns="152400" rtlCol="0" anchor="t"/>
-          <a:lstStyle/>
-          <a:p>
-            <a:pPr indent="0" marL="0">
-              <a:buNone/>
-            </a:pPr>
-            <a:r>
-              <a:rPr lang="en-US" sz="1800" b="1" dirty="0">
-                <a:solidFill>
-                  <a:schemeClr val="tx2"/>
-                </a:solidFill>
-              </a:rPr>
-              <a:t>Relaxed hover</a:t>
-            </a:r>
-            <a:endParaRPr lang="en-US" sz="1600" dirty="0"/>
-          </a:p>
-          <a:p>
-            <a:pPr indent="0" marL="0">
-              <a:spcBef>
-                <a:spcPts val="600"/>
-              </a:spcBef>
-              <a:buNone/>
-            </a:pPr>
-            <a:r>
-              <a:rPr lang="en-US" sz="1400" dirty="0">
-                <a:solidFill>
-                  <a:schemeClr val="accent6"/>
-                </a:solidFill>
-              </a:rPr>
-              <a:t>Steady spin ≈ 19 rad/s, axis tilted</a:t>
-            </a:r>
-            <a:endParaRPr lang="en-US" sz="1600" dirty="0"/>
-          </a:p>
-        </p:txBody>
-      </p:sp>
-      <p:sp>
-        <p:nvSpPr>
-          <p:cNvPr id="14" name="gap statement"/>
-          <p:cNvSpPr txBox="1"/>
-          <p:nvPr/>
-        </p:nvSpPr>
-        <p:spPr>
-          <a:xfrm>
-            <a:off x="548640" y="3840480"/>
-            <a:ext cx="11064240" cy="1234440"/>
-          </a:xfrm>
-          <a:prstGeom prst="roundRect">
-            <a:avLst>
-              <a:gd name="adj" fmla="val 5926"/>
             </a:avLst>
           </a:prstGeom>
           <a:solidFill>
@@ -9555,12 +7339,12 @@
               <a:buNone/>
             </a:pPr>
             <a:r>
-              <a:rPr lang="en-US" sz="2000" b="1" dirty="0">
-                <a:solidFill>
-                  <a:schemeClr val="tx2"/>
-                </a:solidFill>
-              </a:rPr>
-              <a:t>Most recovery methods with a guarantee assume τ = 0.</a:t>
+              <a:rPr lang="en-US" sz="1300" b="1" dirty="0">
+                <a:solidFill>
+                  <a:schemeClr val="accent1"/>
+                </a:solidFill>
+              </a:rPr>
+              <a:t>RESEARCH QUESTION</a:t>
             </a:r>
             <a:endParaRPr lang="en-US" sz="1600" dirty="0"/>
           </a:p>
@@ -9572,12 +7356,12 @@
               <a:buNone/>
             </a:pPr>
             <a:r>
-              <a:rPr lang="en-US" sz="1600" dirty="0">
-                <a:solidFill>
-                  <a:schemeClr val="tx1"/>
-                </a:solidFill>
-              </a:rPr>
-              <a:t>Stability with a fixed delay is shown for a linear model; a certified maximum delay under thrust limits was not found.</a:t>
+              <a:rPr lang="en-US" sz="1900" b="1" dirty="0">
+                <a:solidFill>
+                  <a:schemeClr val="tx2"/>
+                </a:solidFill>
+              </a:rPr>
+              <a:t>Can a data-driven model of only the mismatch, built on top of the physics model, predict the failed drone more accurately and give a smaller steady error in MPC than the physics model alone or a Koopman model of the full dynamics?</a:t>
             </a:r>
             <a:endParaRPr lang="en-US" sz="1600" dirty="0"/>
           </a:p>
@@ -9585,14 +7369,14 @@
       </p:sp>
       <p:sp>
         <p:nvSpPr>
-          <p:cNvPr id="15" name="sources"/>
+          <p:cNvPr id="8" name="why and gap"/>
           <p:cNvSpPr txBox="1"/>
           <p:nvPr/>
         </p:nvSpPr>
         <p:spPr>
           <a:xfrm>
-            <a:off x="548640" y="5303520"/>
-            <a:ext cx="11064240" cy="320040"/>
+            <a:off x="548640" y="5029200"/>
+            <a:ext cx="11064240" cy="1005840"/>
           </a:xfrm>
           <a:prstGeom prst="rect">
             <a:avLst/>
@@ -9608,14 +7392,47 @@
               <a:buNone/>
             </a:pPr>
             <a:r>
-              <a:rPr lang="en-US" sz="1200" dirty="0">
-                <a:solidFill>
-                  <a:schemeClr val="accent6"/>
-                </a:solidFill>
-              </a:rPr>
-              <a:t>Simha et al. 2017; Al Lawati &amp; Akhtar 2026; Başak &amp; Prempain 2015; Strack van Schijndel et al. 2021</a:t>
-            </a:r>
-            <a:endParaRPr lang="en-US" sz="1200" dirty="0"/>
+              <a:rPr lang="en-US" sz="1500" b="1" dirty="0">
+                <a:solidFill>
+                  <a:schemeClr val="tx1"/>
+                </a:solidFill>
+              </a:rPr>
+              <a:t>Koopman / EDMD: </a:t>
+            </a:r>
+            <a:pPr indent="0" marL="0">
+              <a:buNone/>
+            </a:pPr>
+            <a:r>
+              <a:rPr lang="en-US" sz="1500" dirty="0">
+                <a:solidFill>
+                  <a:schemeClr val="tx1"/>
+                </a:solidFill>
+              </a:rPr>
+              <a:t>describe the state by many nonlinear features (here all pairwise products) and fit a linear model on them by least squares. We use the same tools to learn the one-step error of the physics model; it is evaluated outside the MPC optimization, so the MPC stays a convex quadratic program (QP). </a:t>
+            </a:r>
+            <a:pPr indent="0" marL="0">
+              <a:buNone/>
+            </a:pPr>
+            <a:r>
+              <a:rPr lang="en-US" sz="1500" b="1" dirty="0">
+                <a:solidFill>
+                  <a:schemeClr val="tx1"/>
+                </a:solidFill>
+              </a:rPr>
+              <a:t>Gap: </a:t>
+            </a:r>
+            <a:pPr indent="0" marL="0">
+              <a:buNone/>
+            </a:pPr>
+            <a:r>
+              <a:rPr lang="en-US" sz="1500" dirty="0">
+                <a:solidFill>
+                  <a:schemeClr val="tx1"/>
+                </a:solidFill>
+              </a:rPr>
+              <a:t>residual Koopman models exist for healthy drones and other robots (Todde et al. 2026; Bruder et al. 2025); we did not find them for the spinning regime after complete rotor loss.</a:t>
+            </a:r>
+            <a:endParaRPr lang="en-US" sz="1500" dirty="0"/>
           </a:p>
         </p:txBody>
       </p:sp>
@@ -9853,7 +7670,7 @@
                   <a:schemeClr val="tx1"/>
                 </a:solidFill>
               </a:rPr>
-              <a:t>Reduced attitude n = Rᵀe₃: the "up" direction seen from the body</a:t>
+              <a:t>Reduced attitude n: the "up" direction seen from the body (all that is controlled after the failure)</a:t>
             </a:r>
             <a:endParaRPr lang="en-US" sz="1700" dirty="0"/>
           </a:p>
@@ -9871,7 +7688,7 @@
                   <a:schemeClr val="tx1"/>
                 </a:solidFill>
               </a:rPr>
-              <a:t>RK4 integration; controller at 1–5 ms (zero-order hold)</a:t>
+              <a:t>RK4 integration; controller sample period 1–5 ms, command held between samples</a:t>
             </a:r>
             <a:endParaRPr lang="en-US" sz="1700" dirty="0"/>
           </a:p>
@@ -9889,7 +7706,7 @@
                   <a:schemeClr val="tx1"/>
                 </a:solidFill>
               </a:rPr>
-              <a:t>Truth plants for learning add thrust loss at high spin, inertia error and a different motor lag</a:t>
+              <a:t>"Truth" plants for learning data: same simulator plus effects the design model lacks (thrust loss at high spin, inertia error, slower motors)</a:t>
             </a:r>
             <a:endParaRPr lang="en-US" sz="1700" dirty="0"/>
           </a:p>
@@ -10414,7 +8231,7 @@
                             <a:schemeClr val="tx1"/>
                           </a:solidFill>
                         </a:rPr>
-                        <a:t>Thrust coefficient κf</a:t>
+                        <a:t>Thrust coefficient κf (f = κf Ω²)</a:t>
                       </a:r>
                       <a:endParaRPr lang="en-US" sz="1400" dirty="0"/>
                     </a:p>
@@ -10532,7 +8349,7 @@
                             <a:schemeClr val="tx1"/>
                           </a:solidFill>
                         </a:rPr>
-                        <a:t>Torque ratio κτ</a:t>
+                        <a:t>Yaw torque per newton κτ</a:t>
                       </a:r>
                       <a:endParaRPr lang="en-US" sz="1400" dirty="0"/>
                     </a:p>
@@ -10650,7 +8467,7 @@
                             <a:schemeClr val="tx1"/>
                           </a:solidFill>
                         </a:rPr>
-                        <a:t>Yaw drag γ</a:t>
+                        <a:t>Yaw air drag γ</a:t>
                       </a:r>
                       <a:endParaRPr lang="en-US" sz="1400" dirty="0"/>
                     </a:p>
@@ -11166,7 +8983,7 @@
                             <a:schemeClr val="tx1"/>
                           </a:solidFill>
                         </a:rPr>
-                        <a:t>ICRA 2014</a:t>
+                        <a:t>Mueller &amp; D'Andrea 2014</a:t>
                       </a:r>
                       <a:endParaRPr lang="en-US" sz="1400" dirty="0"/>
                     </a:p>
@@ -11224,7 +9041,7 @@
                             <a:schemeClr val="tx1"/>
                           </a:solidFill>
                         </a:rPr>
-                        <a:t>Two-rotor-loss equilibrium</a:t>
+                        <a:t>Two- and three-rotor-loss equilibria</a:t>
                       </a:r>
                       <a:endParaRPr lang="en-US" sz="1400" dirty="0"/>
                     </a:p>
@@ -11282,7 +9099,7 @@
                             <a:schemeClr val="tx1"/>
                           </a:solidFill>
                         </a:rPr>
-                        <a:t>All published digits (≤ 0.14%)</a:t>
+                        <a:t>Every printed digit (≤ 0.8%)</a:t>
                       </a:r>
                       <a:endParaRPr lang="en-US" sz="1400" dirty="0"/>
                     </a:p>
@@ -11342,183 +9159,7 @@
                             <a:schemeClr val="tx1"/>
                           </a:solidFill>
                         </a:rPr>
-                        <a:t>ICRA 2014</a:t>
-                      </a:r>
-                      <a:endParaRPr lang="en-US" sz="1400" dirty="0"/>
-                    </a:p>
-                  </a:txBody>
-                  <a:tcPr marL="76200" marR="76200" marT="38100" marB="38100" anchor="ctr">
-                    <a:lnL w="9525" cap="flat" cmpd="sng" algn="ctr">
-                      <a:solidFill>
-                        <a:srgbClr val="D5D9E0"/>
-                      </a:solidFill>
-                      <a:prstDash val="solid"/>
-                      <a:round/>
-                      <a:headEnd type="none" w="med" len="med"/>
-                      <a:tailEnd type="none" w="med" len="med"/>
-                    </a:lnL>
-                    <a:lnR w="9525" cap="flat" cmpd="sng" algn="ctr">
-                      <a:solidFill>
-                        <a:srgbClr val="D5D9E0"/>
-                      </a:solidFill>
-                      <a:prstDash val="solid"/>
-                      <a:round/>
-                      <a:headEnd type="none" w="med" len="med"/>
-                      <a:tailEnd type="none" w="med" len="med"/>
-                    </a:lnR>
-                    <a:lnT w="9525" cap="flat" cmpd="sng" algn="ctr">
-                      <a:solidFill>
-                        <a:srgbClr val="D5D9E0"/>
-                      </a:solidFill>
-                      <a:prstDash val="solid"/>
-                      <a:round/>
-                      <a:headEnd type="none" w="med" len="med"/>
-                      <a:tailEnd type="none" w="med" len="med"/>
-                    </a:lnT>
-                    <a:lnB w="9525" cap="flat" cmpd="sng" algn="ctr">
-                      <a:solidFill>
-                        <a:srgbClr val="D5D9E0"/>
-                      </a:solidFill>
-                      <a:prstDash val="solid"/>
-                      <a:round/>
-                      <a:headEnd type="none" w="med" len="med"/>
-                      <a:tailEnd type="none" w="med" len="med"/>
-                    </a:lnB>
-                  </a:tcPr>
-                </a:tc>
-                <a:tc>
-                  <a:txBody>
-                    <a:bodyPr/>
-                    <a:lstStyle/>
-                    <a:p>
-                      <a:pPr indent="0" marL="0">
-                        <a:buNone/>
-                      </a:pPr>
-                      <a:r>
-                        <a:rPr lang="en-US" sz="1400" dirty="0">
-                          <a:solidFill>
-                            <a:schemeClr val="tx1"/>
-                          </a:solidFill>
-                        </a:rPr>
-                        <a:t>Three-rotor-loss equilibrium</a:t>
-                      </a:r>
-                      <a:endParaRPr lang="en-US" sz="1400" dirty="0"/>
-                    </a:p>
-                  </a:txBody>
-                  <a:tcPr marL="76200" marR="76200" marT="38100" marB="38100" anchor="ctr">
-                    <a:lnL w="9525" cap="flat" cmpd="sng" algn="ctr">
-                      <a:solidFill>
-                        <a:srgbClr val="D5D9E0"/>
-                      </a:solidFill>
-                      <a:prstDash val="solid"/>
-                      <a:round/>
-                      <a:headEnd type="none" w="med" len="med"/>
-                      <a:tailEnd type="none" w="med" len="med"/>
-                    </a:lnL>
-                    <a:lnR w="9525" cap="flat" cmpd="sng" algn="ctr">
-                      <a:solidFill>
-                        <a:srgbClr val="D5D9E0"/>
-                      </a:solidFill>
-                      <a:prstDash val="solid"/>
-                      <a:round/>
-                      <a:headEnd type="none" w="med" len="med"/>
-                      <a:tailEnd type="none" w="med" len="med"/>
-                    </a:lnR>
-                    <a:lnT w="9525" cap="flat" cmpd="sng" algn="ctr">
-                      <a:solidFill>
-                        <a:srgbClr val="D5D9E0"/>
-                      </a:solidFill>
-                      <a:prstDash val="solid"/>
-                      <a:round/>
-                      <a:headEnd type="none" w="med" len="med"/>
-                      <a:tailEnd type="none" w="med" len="med"/>
-                    </a:lnT>
-                    <a:lnB w="9525" cap="flat" cmpd="sng" algn="ctr">
-                      <a:solidFill>
-                        <a:srgbClr val="D5D9E0"/>
-                      </a:solidFill>
-                      <a:prstDash val="solid"/>
-                      <a:round/>
-                      <a:headEnd type="none" w="med" len="med"/>
-                      <a:tailEnd type="none" w="med" len="med"/>
-                    </a:lnB>
-                  </a:tcPr>
-                </a:tc>
-                <a:tc>
-                  <a:txBody>
-                    <a:bodyPr/>
-                    <a:lstStyle/>
-                    <a:p>
-                      <a:pPr indent="0" marL="0">
-                        <a:buNone/>
-                      </a:pPr>
-                      <a:r>
-                        <a:rPr lang="en-US" sz="1400" dirty="0">
-                          <a:solidFill>
-                            <a:schemeClr val="tx1"/>
-                          </a:solidFill>
-                        </a:rPr>
-                        <a:t>All published digits (≤ 0.8%)</a:t>
-                      </a:r>
-                      <a:endParaRPr lang="en-US" sz="1400" dirty="0"/>
-                    </a:p>
-                  </a:txBody>
-                  <a:tcPr marL="76200" marR="76200" marT="38100" marB="38100" anchor="ctr">
-                    <a:lnL w="9525" cap="flat" cmpd="sng" algn="ctr">
-                      <a:solidFill>
-                        <a:srgbClr val="D5D9E0"/>
-                      </a:solidFill>
-                      <a:prstDash val="solid"/>
-                      <a:round/>
-                      <a:headEnd type="none" w="med" len="med"/>
-                      <a:tailEnd type="none" w="med" len="med"/>
-                    </a:lnL>
-                    <a:lnR w="9525" cap="flat" cmpd="sng" algn="ctr">
-                      <a:solidFill>
-                        <a:srgbClr val="D5D9E0"/>
-                      </a:solidFill>
-                      <a:prstDash val="solid"/>
-                      <a:round/>
-                      <a:headEnd type="none" w="med" len="med"/>
-                      <a:tailEnd type="none" w="med" len="med"/>
-                    </a:lnR>
-                    <a:lnT w="9525" cap="flat" cmpd="sng" algn="ctr">
-                      <a:solidFill>
-                        <a:srgbClr val="D5D9E0"/>
-                      </a:solidFill>
-                      <a:prstDash val="solid"/>
-                      <a:round/>
-                      <a:headEnd type="none" w="med" len="med"/>
-                      <a:tailEnd type="none" w="med" len="med"/>
-                    </a:lnT>
-                    <a:lnB w="9525" cap="flat" cmpd="sng" algn="ctr">
-                      <a:solidFill>
-                        <a:srgbClr val="D5D9E0"/>
-                      </a:solidFill>
-                      <a:prstDash val="solid"/>
-                      <a:round/>
-                      <a:headEnd type="none" w="med" len="med"/>
-                      <a:tailEnd type="none" w="med" len="med"/>
-                    </a:lnB>
-                  </a:tcPr>
-                </a:tc>
-              </a:tr>
-              <a:tr h="384048">
-                <a:tc>
-                  <a:txBody>
-                    <a:bodyPr/>
-                    <a:lstStyle/>
-                    <a:p>
-                      <a:pPr indent="0" marL="0">
-                        <a:buNone/>
-                      </a:pPr>
-                      <a:r>
-                        <a:rPr lang="en-US" sz="1400" dirty="0">
-                          <a:solidFill>
-                            <a:schemeClr val="tx1"/>
-                          </a:solidFill>
-                        </a:rPr>
-                        <a:t>ICRA 2014</a:t>
+                        <a:t>Mueller &amp; D'Andrea 2014</a:t>
                       </a:r>
                       <a:endParaRPr lang="en-US" sz="1400" dirty="0"/>
                     </a:p>
@@ -11634,7 +9275,7 @@
                             <a:schemeClr val="tx1"/>
                           </a:solidFill>
                         </a:rPr>
-                        <a:t>f, r, n_z ≤ 0.5%; pitch rate −6% *</a:t>
+                        <a:t>Thrusts, yaw rate, n_z ≤ 0.5%; pitch rate −6% *</a:t>
                       </a:r>
                       <a:endParaRPr lang="en-US" sz="1400" dirty="0"/>
                     </a:p>
@@ -11694,7 +9335,7 @@
                             <a:schemeClr val="tx1"/>
                           </a:solidFill>
                         </a:rPr>
-                        <a:t>ICRA 2014</a:t>
+                        <a:t>Mueller &amp; D'Andrea 2016</a:t>
                       </a:r>
                       <a:endParaRPr lang="en-US" sz="1400" dirty="0"/>
                     </a:p>
@@ -11752,183 +9393,7 @@
                             <a:schemeClr val="tx1"/>
                           </a:solidFill>
                         </a:rPr>
-                        <a:t>ā and controllability loss (eqs. 28, 39)</a:t>
-                      </a:r>
-                      <a:endParaRPr lang="en-US" sz="1400" dirty="0"/>
-                    </a:p>
-                  </a:txBody>
-                  <a:tcPr marL="76200" marR="76200" marT="38100" marB="38100" anchor="ctr">
-                    <a:lnL w="9525" cap="flat" cmpd="sng" algn="ctr">
-                      <a:solidFill>
-                        <a:srgbClr val="D5D9E0"/>
-                      </a:solidFill>
-                      <a:prstDash val="solid"/>
-                      <a:round/>
-                      <a:headEnd type="none" w="med" len="med"/>
-                      <a:tailEnd type="none" w="med" len="med"/>
-                    </a:lnL>
-                    <a:lnR w="9525" cap="flat" cmpd="sng" algn="ctr">
-                      <a:solidFill>
-                        <a:srgbClr val="D5D9E0"/>
-                      </a:solidFill>
-                      <a:prstDash val="solid"/>
-                      <a:round/>
-                      <a:headEnd type="none" w="med" len="med"/>
-                      <a:tailEnd type="none" w="med" len="med"/>
-                    </a:lnR>
-                    <a:lnT w="9525" cap="flat" cmpd="sng" algn="ctr">
-                      <a:solidFill>
-                        <a:srgbClr val="D5D9E0"/>
-                      </a:solidFill>
-                      <a:prstDash val="solid"/>
-                      <a:round/>
-                      <a:headEnd type="none" w="med" len="med"/>
-                      <a:tailEnd type="none" w="med" len="med"/>
-                    </a:lnT>
-                    <a:lnB w="9525" cap="flat" cmpd="sng" algn="ctr">
-                      <a:solidFill>
-                        <a:srgbClr val="D5D9E0"/>
-                      </a:solidFill>
-                      <a:prstDash val="solid"/>
-                      <a:round/>
-                      <a:headEnd type="none" w="med" len="med"/>
-                      <a:tailEnd type="none" w="med" len="med"/>
-                    </a:lnB>
-                  </a:tcPr>
-                </a:tc>
-                <a:tc>
-                  <a:txBody>
-                    <a:bodyPr/>
-                    <a:lstStyle/>
-                    <a:p>
-                      <a:pPr indent="0" marL="0">
-                        <a:buNone/>
-                      </a:pPr>
-                      <a:r>
-                        <a:rPr lang="en-US" sz="1400" dirty="0">
-                          <a:solidFill>
-                            <a:schemeClr val="tx1"/>
-                          </a:solidFill>
-                        </a:rPr>
-                        <a:t>Exact</a:t>
-                      </a:r>
-                      <a:endParaRPr lang="en-US" sz="1400" dirty="0"/>
-                    </a:p>
-                  </a:txBody>
-                  <a:tcPr marL="76200" marR="76200" marT="38100" marB="38100" anchor="ctr">
-                    <a:lnL w="9525" cap="flat" cmpd="sng" algn="ctr">
-                      <a:solidFill>
-                        <a:srgbClr val="D5D9E0"/>
-                      </a:solidFill>
-                      <a:prstDash val="solid"/>
-                      <a:round/>
-                      <a:headEnd type="none" w="med" len="med"/>
-                      <a:tailEnd type="none" w="med" len="med"/>
-                    </a:lnL>
-                    <a:lnR w="9525" cap="flat" cmpd="sng" algn="ctr">
-                      <a:solidFill>
-                        <a:srgbClr val="D5D9E0"/>
-                      </a:solidFill>
-                      <a:prstDash val="solid"/>
-                      <a:round/>
-                      <a:headEnd type="none" w="med" len="med"/>
-                      <a:tailEnd type="none" w="med" len="med"/>
-                    </a:lnR>
-                    <a:lnT w="9525" cap="flat" cmpd="sng" algn="ctr">
-                      <a:solidFill>
-                        <a:srgbClr val="D5D9E0"/>
-                      </a:solidFill>
-                      <a:prstDash val="solid"/>
-                      <a:round/>
-                      <a:headEnd type="none" w="med" len="med"/>
-                      <a:tailEnd type="none" w="med" len="med"/>
-                    </a:lnT>
-                    <a:lnB w="9525" cap="flat" cmpd="sng" algn="ctr">
-                      <a:solidFill>
-                        <a:srgbClr val="D5D9E0"/>
-                      </a:solidFill>
-                      <a:prstDash val="solid"/>
-                      <a:round/>
-                      <a:headEnd type="none" w="med" len="med"/>
-                      <a:tailEnd type="none" w="med" len="med"/>
-                    </a:lnB>
-                  </a:tcPr>
-                </a:tc>
-              </a:tr>
-              <a:tr h="384048">
-                <a:tc>
-                  <a:txBody>
-                    <a:bodyPr/>
-                    <a:lstStyle/>
-                    <a:p>
-                      <a:pPr indent="0" marL="0">
-                        <a:buNone/>
-                      </a:pPr>
-                      <a:r>
-                        <a:rPr lang="en-US" sz="1400" dirty="0">
-                          <a:solidFill>
-                            <a:schemeClr val="tx1"/>
-                          </a:solidFill>
-                        </a:rPr>
-                        <a:t>IJRR 2016</a:t>
-                      </a:r>
-                      <a:endParaRPr lang="en-US" sz="1400" dirty="0"/>
-                    </a:p>
-                  </a:txBody>
-                  <a:tcPr marL="76200" marR="76200" marT="38100" marB="38100" anchor="ctr">
-                    <a:lnL w="9525" cap="flat" cmpd="sng" algn="ctr">
-                      <a:solidFill>
-                        <a:srgbClr val="D5D9E0"/>
-                      </a:solidFill>
-                      <a:prstDash val="solid"/>
-                      <a:round/>
-                      <a:headEnd type="none" w="med" len="med"/>
-                      <a:tailEnd type="none" w="med" len="med"/>
-                    </a:lnL>
-                    <a:lnR w="9525" cap="flat" cmpd="sng" algn="ctr">
-                      <a:solidFill>
-                        <a:srgbClr val="D5D9E0"/>
-                      </a:solidFill>
-                      <a:prstDash val="solid"/>
-                      <a:round/>
-                      <a:headEnd type="none" w="med" len="med"/>
-                      <a:tailEnd type="none" w="med" len="med"/>
-                    </a:lnR>
-                    <a:lnT w="9525" cap="flat" cmpd="sng" algn="ctr">
-                      <a:solidFill>
-                        <a:srgbClr val="D5D9E0"/>
-                      </a:solidFill>
-                      <a:prstDash val="solid"/>
-                      <a:round/>
-                      <a:headEnd type="none" w="med" len="med"/>
-                      <a:tailEnd type="none" w="med" len="med"/>
-                    </a:lnT>
-                    <a:lnB w="9525" cap="flat" cmpd="sng" algn="ctr">
-                      <a:solidFill>
-                        <a:srgbClr val="D5D9E0"/>
-                      </a:solidFill>
-                      <a:prstDash val="solid"/>
-                      <a:round/>
-                      <a:headEnd type="none" w="med" len="med"/>
-                      <a:tailEnd type="none" w="med" len="med"/>
-                    </a:lnB>
-                  </a:tcPr>
-                </a:tc>
-                <a:tc>
-                  <a:txBody>
-                    <a:bodyPr/>
-                    <a:lstStyle/>
-                    <a:p>
-                      <a:pPr indent="0" marL="0">
-                        <a:buNone/>
-                      </a:pPr>
-                      <a:r>
-                        <a:rPr lang="en-US" sz="1400" dirty="0">
-                          <a:solidFill>
-                            <a:schemeClr val="tx1"/>
-                          </a:solidFill>
-                        </a:rPr>
-                        <a:t>Five failure cases, own implementation</a:t>
+                        <a:t>Their more detailed model, 5 hover cases (separate code)</a:t>
                       </a:r>
                       <a:endParaRPr lang="en-US" sz="1400" dirty="0"/>
                     </a:p>
@@ -12046,7 +9511,7 @@
                             <a:schemeClr val="tx1"/>
                           </a:solidFill>
                         </a:rPr>
-                        <a:t>Sun et al. 2020</a:t>
+                        <a:t>Sun et al. 2021</a:t>
                       </a:r>
                       <a:endParaRPr lang="en-US" sz="1400" dirty="0"/>
                     </a:p>
@@ -12104,7 +9569,7 @@
                             <a:schemeClr val="tx1"/>
                           </a:solidFill>
                         </a:rPr>
-                        <a:t>Bebop 2, two-rotor loss (eq. 60)</a:t>
+                        <a:t>Second drone (Parrot Bebop 2), two rotors lost</a:t>
                       </a:r>
                       <a:endParaRPr lang="en-US" sz="1400" dirty="0"/>
                     </a:p>
@@ -12162,7 +9627,7 @@
                             <a:schemeClr val="tx1"/>
                           </a:solidFill>
                         </a:rPr>
-                        <a:t>Exact</a:t>
+                        <a:t>Equal to the paper's formula</a:t>
                       </a:r>
                       <a:endParaRPr lang="en-US" sz="1400" dirty="0"/>
                     </a:p>
@@ -12426,7 +9891,7 @@
                   <a:schemeClr val="accent6"/>
                 </a:solidFill>
               </a:rPr>
-              <a:t>* The paper's own published values do not satisfy its eq. (12); its other two cases match exactly. </a:t>
+              <a:t>* The paper's own published values do not satisfy its own roll equation; its other two cases match exactly. </a:t>
             </a:r>
             <a:pPr indent="0" marL="0">
               <a:buNone/>
@@ -12437,7 +9902,7 @@
                   <a:schemeClr val="accent6"/>
                 </a:solidFill>
               </a:rPr>
-              <a:t>46 automated tests</a:t>
+              <a:t>47 automated tests</a:t>
             </a:r>
             <a:pPr indent="0" marL="0">
               <a:buNone/>
@@ -12448,7 +9913,7 @@
                   <a:schemeClr val="accent6"/>
                 </a:solidFill>
               </a:rPr>
-              <a:t> also check conservation laws, closed-form solutions and these published numbers.</a:t>
+              <a:t> (46 pass; 1 expected failure keeps that inconsistency visible) also check conservation laws, closed-form solutions and these published numbers.</a:t>
             </a:r>
             <a:endParaRPr lang="en-US" sz="1400" dirty="0"/>
           </a:p>
@@ -12654,7 +10119,7 @@
                   <a:schemeClr val="tx1"/>
                 </a:solidFill>
               </a:rPr>
-              <a:t>Rotor 4 lost, design ratio ρ = f₂/f₁ = 0.5:</a:t>
+              <a:t>Rotor 4 lost. f₁ = f₃: the two side rotors; f₂: the rotor opposite the failed one. Design ratio ρ = f₂/f₁ = 0.5:</a:t>
             </a:r>
             <a:endParaRPr lang="en-US" sz="1700" dirty="0"/>
           </a:p>
@@ -12702,7 +10167,7 @@
                   <a:schemeClr val="tx1"/>
                 </a:solidFill>
               </a:rPr>
-              <a:t>Thrust, spin rate and tilt match the paper within 0.5%.</a:t>
+              <a:t>Thrusts, yaw rate and n_z match the paper within 0.5%; pitch rate and tilt are about 5% lower (see validation).</a:t>
             </a:r>
             <a:endParaRPr lang="en-US" sz="1700" dirty="0"/>
           </a:p>
@@ -12719,7 +10184,7 @@
                   <a:schemeClr val="tx1"/>
                 </a:solidFill>
               </a:rPr>
-              <a:t>The ρ sweep reproduces the paper's Fig. 3 (minimum spin 18.6 vs 19.0 rad/s).</a:t>
+              <a:t>The figure shows how the equilibrium changes with ρ; it reproduces the paper's Fig. 3 (minimum spin 18.6 vs 19.0 rad/s).</a:t>
             </a:r>
             <a:endParaRPr lang="en-US" sz="1700" dirty="0"/>
           </a:p>
@@ -12946,7 +10411,7 @@
                   <a:schemeClr val="tx1"/>
                 </a:solidFill>
               </a:rPr>
-              <a:t>rank 7 of 7; every mode passes the PBH test.</a:t>
+              <a:t>the three rotors can steer all 7 states (controllability rank 7 of 7; every mode can be influenced, PBH test).</a:t>
             </a:r>
             <a:endParaRPr lang="en-US" sz="1700" dirty="0"/>
           </a:p>
@@ -13055,7 +10520,7 @@
                             <a:schemeClr val="tx1"/>
                           </a:solidFill>
                         </a:rPr>
-                        <a:t>Rank</a:t>
+                        <a:t>Observable (of 7)</a:t>
                       </a:r>
                       <a:endParaRPr lang="en-US" sz="1400" dirty="0"/>
                     </a:p>
@@ -13116,7 +10581,7 @@
                             <a:schemeClr val="tx1"/>
                           </a:solidFill>
                         </a:rPr>
-                        <a:t>Missing</a:t>
+                        <a:t>Cannot see</a:t>
                       </a:r>
                       <a:endParaRPr lang="en-US" sz="1400" dirty="0"/>
                     </a:p>
@@ -13911,7 +11376,7 @@
                   <a:schemeClr val="accent6"/>
                 </a:solidFill>
               </a:rPr>
-              <a:t>The equilibrium is tilted, so vertical acceleration depends on tilt. A barometer alone then reveals the tilt, but about 2,700× more weakly than a tilt sensor (observability Gramian).</a:t>
+              <a:t>The equilibrium is tilted, so vertical acceleration depends on tilt. A barometer then reveals the tilt in principle, but with realistic sensor noise the weakest direction is about 2,700× less visible than with a tilt sensor (smallest observability-Gramian eigenvalue).</a:t>
             </a:r>
             <a:endParaRPr lang="en-US" sz="1500" dirty="0"/>
           </a:p>
@@ -14245,8 +11710,8 @@
         </p:nvSpPr>
         <p:spPr>
           <a:xfrm>
-            <a:off x="548640" y="5989320"/>
-            <a:ext cx="11064240" cy="274320"/>
+            <a:off x="548640" y="5760720"/>
+            <a:ext cx="11064240" cy="548640"/>
           </a:xfrm>
           <a:prstGeom prst="rect">
             <a:avLst/>
@@ -14267,7 +11732,7 @@
                   <a:schemeClr val="accent6"/>
                 </a:solidFill>
               </a:rPr>
-              <a:t>Weights from Mueller &amp; D'Andrea, plus motor states and altitude</a:t>
+              <a:t>Nonlinear simulation from 1 m below the set-point with rate and tilt errors, rotor 4 off, motor lag and thrust limits. Weights from Mueller &amp; D'Andrea, plus motor states and altitude. The delay margin is less than half the healthy value: the spinning drone is much less forgiving.</a:t>
             </a:r>
             <a:endParaRPr lang="en-US" sz="1200" dirty="0"/>
           </a:p>
@@ -14375,7 +11840,7 @@
                   <a:schemeClr val="accent3"/>
                 </a:solidFill>
               </a:rPr>
-              <a:t>PART 1 · AS PROPOSED</a:t>
+              <a:t>THE APPROACH</a:t>
             </a:r>
             <a:endParaRPr lang="en-US" sz="1400" dirty="0"/>
           </a:p>
